--- a/SPOTIFLOW.pptx
+++ b/SPOTIFLOW.pptx
@@ -22,6 +22,9 @@
     <p:sldId id="270" r:id="rId17"/>
     <p:sldId id="271" r:id="rId18"/>
     <p:sldId id="272" r:id="rId19"/>
+    <p:sldId id="273" r:id="rId20"/>
+    <p:sldId id="274" r:id="rId21"/>
+    <p:sldId id="275" r:id="rId22"/>
   </p:sldIdLst>
   <p:sldSz cx="12192000" cy="6858000"/>
   <p:notesSz cx="7559675" cy="10691813"/>
@@ -5879,14 +5882,73 @@
       </p:grpSpPr>
       <p:sp>
         <p:nvSpPr>
-          <p:cNvPr id="97" name="PlaceHolder 4"/>
+          <p:cNvPr id="97" name="PlaceHolder 1"/>
+          <p:cNvSpPr>
+            <a:spLocks noGrp="1"/>
+          </p:cNvSpPr>
+          <p:nvPr>
+            <p:ph type="title"/>
+          </p:nvPr>
+        </p:nvSpPr>
+        <p:spPr>
+          <a:xfrm>
+            <a:off x="609480" y="-4320"/>
+            <a:ext cx="10962000" cy="585360"/>
+          </a:xfrm>
+          <a:prstGeom prst="rect">
+            <a:avLst/>
+          </a:prstGeom>
+          <a:noFill/>
+          <a:ln w="0">
+            <a:noFill/>
+          </a:ln>
+        </p:spPr>
+        <p:txBody>
+          <a:bodyPr lIns="0" rIns="0" tIns="0" bIns="0" anchor="ctr">
+            <a:spAutoFit/>
+          </a:bodyPr>
+          <a:p>
+            <a:pPr indent="0">
+              <a:lnSpc>
+                <a:spcPct val="100000"/>
+              </a:lnSpc>
+              <a:buNone/>
+              <a:tabLst>
+                <a:tab algn="l" pos="0"/>
+              </a:tabLst>
+            </a:pPr>
+            <a:r>
+              <a:rPr lang="en-US" sz="3200" b="1" u="none" strike="noStrike">
+                <a:solidFill>
+                  <a:srgbClr val="ff0000"/>
+                </a:solidFill>
+                <a:effectLst/>
+                <a:uFillTx/>
+                <a:latin typeface="Arial"/>
+              </a:rPr>
+              <a:t>Mathematical Formulation</a:t>
+            </a:r>
+            <a:endParaRPr lang="en-US" sz="3200" b="0" u="none" strike="noStrike">
+              <a:solidFill>
+                <a:srgbClr val="000000"/>
+              </a:solidFill>
+              <a:effectLst/>
+              <a:uFillTx/>
+              <a:latin typeface="Arial"/>
+            </a:endParaRPr>
+          </a:p>
+        </p:txBody>
+      </p:sp>
+      <p:sp>
+        <p:nvSpPr>
+          <p:cNvPr id="98" name=""/>
           <p:cNvSpPr/>
           <p:nvPr/>
         </p:nvSpPr>
         <p:spPr>
           <a:xfrm>
-            <a:off x="609840" y="45720"/>
-            <a:ext cx="10962000" cy="487080"/>
+            <a:off x="228600" y="685800"/>
+            <a:ext cx="11652120" cy="5855760"/>
           </a:xfrm>
           <a:prstGeom prst="rect">
             <a:avLst/>
@@ -5903,31 +5965,288 @@
           <a:fontRef idx="minor"/>
         </p:style>
         <p:txBody>
-          <a:bodyPr lIns="0" rIns="0" tIns="0" bIns="0" anchor="ctr">
+          <a:bodyPr lIns="90000" rIns="90000" tIns="45000" bIns="45000" anchor="t">
             <a:spAutoFit/>
           </a:bodyPr>
           <a:p>
+            <a:pPr marL="216000" indent="-216000">
+              <a:lnSpc>
+                <a:spcPct val="100000"/>
+              </a:lnSpc>
+              <a:buClr>
+                <a:srgbClr val="000000"/>
+              </a:buClr>
+              <a:buFont typeface="Wingdings" charset="2"/>
+              <a:buChar char=""/>
+            </a:pPr>
+            <a:r>
+              <a:rPr lang="en-US" sz="2800" b="0" u="none" strike="noStrike">
+                <a:solidFill>
+                  <a:srgbClr val="000000"/>
+                </a:solidFill>
+                <a:effectLst/>
+                <a:uFillTx/>
+                <a:latin typeface="Arial"/>
+                <a:ea typeface="SimSun"/>
+              </a:rPr>
+              <a:t>Heatmap: probability density of spot centers</a:t>
+            </a:r>
+            <a:endParaRPr lang="en-US" sz="2800" b="0" u="none" strike="noStrike">
+              <a:solidFill>
+                <a:srgbClr val="000000"/>
+              </a:solidFill>
+              <a:effectLst/>
+              <a:uFillTx/>
+              <a:latin typeface="Arial"/>
+            </a:endParaRPr>
+          </a:p>
+          <a:p>
+            <a:pPr marL="216000" indent="-216000">
+              <a:lnSpc>
+                <a:spcPct val="100000"/>
+              </a:lnSpc>
+              <a:spcBef>
+                <a:spcPts val="1191"/>
+              </a:spcBef>
+              <a:spcAft>
+                <a:spcPts val="992"/>
+              </a:spcAft>
+              <a:buClr>
+                <a:srgbClr val="000000"/>
+              </a:buClr>
+              <a:buFont typeface="Wingdings" charset="2"/>
+              <a:buChar char=""/>
+            </a:pPr>
+            <a:r>
+              <a:rPr lang="en-US" sz="2800" b="0" u="none" strike="noStrike">
+                <a:solidFill>
+                  <a:srgbClr val="000000"/>
+                </a:solidFill>
+                <a:effectLst/>
+                <a:uFillTx/>
+                <a:latin typeface="Arial"/>
+                <a:ea typeface="SimSun"/>
+              </a:rPr>
+              <a:t>Flow: vector field v(x,y) → center</a:t>
+            </a:r>
+            <a:endParaRPr lang="en-US" sz="2800" b="0" u="none" strike="noStrike">
+              <a:solidFill>
+                <a:srgbClr val="000000"/>
+              </a:solidFill>
+              <a:effectLst/>
+              <a:uFillTx/>
+              <a:latin typeface="Arial"/>
+            </a:endParaRPr>
+          </a:p>
+          <a:p>
+            <a:pPr marL="216000" indent="-216000">
+              <a:lnSpc>
+                <a:spcPct val="100000"/>
+              </a:lnSpc>
+              <a:spcBef>
+                <a:spcPts val="1191"/>
+              </a:spcBef>
+              <a:spcAft>
+                <a:spcPts val="992"/>
+              </a:spcAft>
+              <a:buClr>
+                <a:srgbClr val="000000"/>
+              </a:buClr>
+              <a:buFont typeface="Wingdings" charset="2"/>
+              <a:buChar char=""/>
+            </a:pPr>
+            <a:r>
+              <a:rPr lang="en-US" sz="2800" b="0" u="none" strike="noStrike">
+                <a:solidFill>
+                  <a:srgbClr val="000000"/>
+                </a:solidFill>
+                <a:effectLst/>
+                <a:uFillTx/>
+                <a:latin typeface="Arial"/>
+                <a:ea typeface="SimSun"/>
+              </a:rPr>
+              <a:t>Optimization: minimize L = L_heatmap + L_flow</a:t>
+            </a:r>
+            <a:endParaRPr lang="en-US" sz="2800" b="0" u="none" strike="noStrike">
+              <a:solidFill>
+                <a:srgbClr val="000000"/>
+              </a:solidFill>
+              <a:effectLst/>
+              <a:uFillTx/>
+              <a:latin typeface="Arial"/>
+            </a:endParaRPr>
+          </a:p>
+          <a:p>
+            <a:pPr marL="216000" indent="-216000">
+              <a:lnSpc>
+                <a:spcPct val="100000"/>
+              </a:lnSpc>
+              <a:spcBef>
+                <a:spcPts val="1191"/>
+              </a:spcBef>
+              <a:spcAft>
+                <a:spcPts val="992"/>
+              </a:spcAft>
+              <a:buClr>
+                <a:srgbClr val="000000"/>
+              </a:buClr>
+              <a:buFont typeface="Wingdings" charset="2"/>
+              <a:buChar char=""/>
+            </a:pPr>
+            <a:r>
+              <a:rPr lang="en-US" sz="2800" b="0" u="none" strike="noStrike">
+                <a:solidFill>
+                  <a:srgbClr val="000000"/>
+                </a:solidFill>
+                <a:effectLst/>
+                <a:uFillTx/>
+                <a:latin typeface="Arial"/>
+                <a:ea typeface="SimSun"/>
+              </a:rPr>
+              <a:t>Subpixel localization via convergence</a:t>
+            </a:r>
+            <a:endParaRPr lang="en-US" sz="2800" b="0" u="none" strike="noStrike">
+              <a:solidFill>
+                <a:srgbClr val="000000"/>
+              </a:solidFill>
+              <a:effectLst/>
+              <a:uFillTx/>
+              <a:latin typeface="Arial"/>
+            </a:endParaRPr>
+          </a:p>
+          <a:p>
             <a:pPr>
               <a:lnSpc>
                 <a:spcPct val="100000"/>
               </a:lnSpc>
-              <a:tabLst>
-                <a:tab algn="l" pos="0"/>
-              </a:tabLst>
-            </a:pPr>
-            <a:r>
-              <a:rPr lang="en-US" sz="3200" b="1" u="none" strike="noStrike">
-                <a:solidFill>
-                  <a:srgbClr val="ff0000"/>
-                </a:solidFill>
-                <a:effectLst/>
-                <a:uFillTx/>
-                <a:latin typeface="Arial"/>
-                <a:ea typeface="SimSun"/>
-              </a:rPr>
-              <a:t>Threshold block size</a:t>
-            </a:r>
-            <a:endParaRPr lang="en-US" sz="3200" b="0" u="none" strike="noStrike">
+              <a:spcBef>
+                <a:spcPts val="1191"/>
+              </a:spcBef>
+              <a:spcAft>
+                <a:spcPts val="992"/>
+              </a:spcAft>
+            </a:pPr>
+            <a:endParaRPr lang="en-US" sz="1800" b="0" u="none" strike="noStrike">
+              <a:solidFill>
+                <a:srgbClr val="000000"/>
+              </a:solidFill>
+              <a:effectLst/>
+              <a:uFillTx/>
+              <a:latin typeface="Arial"/>
+            </a:endParaRPr>
+          </a:p>
+          <a:p>
+            <a:pPr>
+              <a:lnSpc>
+                <a:spcPct val="100000"/>
+              </a:lnSpc>
+              <a:spcBef>
+                <a:spcPts val="624"/>
+              </a:spcBef>
+              <a:spcAft>
+                <a:spcPts val="425"/>
+              </a:spcAft>
+            </a:pPr>
+            <a:endParaRPr lang="en-US" sz="1800" b="0" u="none" strike="noStrike">
+              <a:solidFill>
+                <a:srgbClr val="000000"/>
+              </a:solidFill>
+              <a:effectLst/>
+              <a:uFillTx/>
+              <a:latin typeface="Arial"/>
+            </a:endParaRPr>
+          </a:p>
+          <a:p>
+            <a:pPr>
+              <a:lnSpc>
+                <a:spcPct val="100000"/>
+              </a:lnSpc>
+              <a:spcBef>
+                <a:spcPts val="1191"/>
+              </a:spcBef>
+              <a:spcAft>
+                <a:spcPts val="992"/>
+              </a:spcAft>
+            </a:pPr>
+            <a:endParaRPr lang="en-US" sz="1800" b="0" u="none" strike="noStrike">
+              <a:solidFill>
+                <a:srgbClr val="000000"/>
+              </a:solidFill>
+              <a:effectLst/>
+              <a:uFillTx/>
+              <a:latin typeface="Arial"/>
+            </a:endParaRPr>
+          </a:p>
+          <a:p>
+            <a:pPr>
+              <a:lnSpc>
+                <a:spcPct val="100000"/>
+              </a:lnSpc>
+              <a:spcBef>
+                <a:spcPts val="1191"/>
+              </a:spcBef>
+              <a:spcAft>
+                <a:spcPts val="992"/>
+              </a:spcAft>
+            </a:pPr>
+            <a:endParaRPr lang="en-US" sz="1800" b="0" u="none" strike="noStrike">
+              <a:solidFill>
+                <a:srgbClr val="000000"/>
+              </a:solidFill>
+              <a:effectLst/>
+              <a:uFillTx/>
+              <a:latin typeface="Arial"/>
+            </a:endParaRPr>
+          </a:p>
+          <a:p>
+            <a:pPr>
+              <a:lnSpc>
+                <a:spcPct val="100000"/>
+              </a:lnSpc>
+              <a:spcBef>
+                <a:spcPts val="1191"/>
+              </a:spcBef>
+              <a:spcAft>
+                <a:spcPts val="992"/>
+              </a:spcAft>
+            </a:pPr>
+            <a:endParaRPr lang="en-US" sz="1000" b="0" u="none" strike="noStrike">
+              <a:solidFill>
+                <a:srgbClr val="000000"/>
+              </a:solidFill>
+              <a:effectLst/>
+              <a:uFillTx/>
+              <a:latin typeface="Arial"/>
+            </a:endParaRPr>
+          </a:p>
+          <a:p>
+            <a:pPr>
+              <a:lnSpc>
+                <a:spcPct val="100000"/>
+              </a:lnSpc>
+              <a:spcBef>
+                <a:spcPts val="1191"/>
+              </a:spcBef>
+              <a:spcAft>
+                <a:spcPts val="992"/>
+              </a:spcAft>
+            </a:pPr>
+            <a:endParaRPr lang="en-US" sz="2000" b="0" u="none" strike="noStrike">
+              <a:solidFill>
+                <a:srgbClr val="000000"/>
+              </a:solidFill>
+              <a:effectLst/>
+              <a:uFillTx/>
+              <a:latin typeface="Arial"/>
+            </a:endParaRPr>
+          </a:p>
+          <a:p>
+            <a:pPr>
+              <a:lnSpc>
+                <a:spcPct val="100000"/>
+              </a:lnSpc>
+            </a:pPr>
+            <a:endParaRPr lang="en-US" sz="1000" b="0" u="none" strike="noStrike">
               <a:solidFill>
                 <a:srgbClr val="000000"/>
               </a:solidFill>
@@ -5938,1156 +6257,6 @@
           </a:p>
         </p:txBody>
       </p:sp>
-      <p:graphicFrame>
-        <p:nvGraphicFramePr>
-          <p:cNvPr id="98" name=""/>
-          <p:cNvGraphicFramePr/>
-          <p:nvPr/>
-        </p:nvGraphicFramePr>
-        <p:xfrm>
-          <a:off x="1827000" y="733680"/>
-          <a:ext cx="8457840" cy="5825160"/>
-        </p:xfrm>
-        <a:graphic>
-          <a:graphicData uri="http://schemas.openxmlformats.org/drawingml/2006/table">
-            <a:tbl>
-              <a:tblPr/>
-              <a:tblGrid>
-                <a:gridCol w="2113560"/>
-                <a:gridCol w="1047600"/>
-                <a:gridCol w="3818880"/>
-                <a:gridCol w="1478160"/>
-              </a:tblGrid>
-              <a:tr h="272160">
-                <a:tc>
-                  <a:txBody>
-                    <a:bodyPr lIns="36000" rIns="36000" tIns="36000" bIns="36000" anchor="t">
-                      <a:noAutofit/>
-                    </a:bodyPr>
-                    <a:p>
-                      <a:pPr algn="ctr">
-                        <a:lnSpc>
-                          <a:spcPct val="100000"/>
-                        </a:lnSpc>
-                      </a:pPr>
-                      <a:r>
-                        <a:rPr lang="en-US" sz="1400" b="0" u="none" strike="noStrike">
-                          <a:solidFill>
-                            <a:srgbClr val="000000"/>
-                          </a:solidFill>
-                          <a:effectLst/>
-                          <a:uFillTx/>
-                          <a:latin typeface="Arial"/>
-                        </a:rPr>
-                        <a:t>SIZE</a:t>
-                      </a:r>
-                      <a:endParaRPr lang="en-US" sz="1400" b="0" u="none" strike="noStrike">
-                        <a:solidFill>
-                          <a:srgbClr val="000000"/>
-                        </a:solidFill>
-                        <a:effectLst/>
-                        <a:uFillTx/>
-                        <a:latin typeface="Arial"/>
-                      </a:endParaRPr>
-                    </a:p>
-                  </a:txBody>
-                  <a:tcPr anchor="t" marL="36000" marR="36000" marT="36000" marB="36000">
-                    <a:lnL w="7200">
-                      <a:solidFill>
-                        <a:srgbClr val="000000"/>
-                      </a:solidFill>
-                      <a:prstDash val="solid"/>
-                    </a:lnL>
-                    <a:lnR w="7200">
-                      <a:solidFill>
-                        <a:srgbClr val="000000"/>
-                      </a:solidFill>
-                      <a:prstDash val="solid"/>
-                    </a:lnR>
-                    <a:lnT w="7200">
-                      <a:solidFill>
-                        <a:srgbClr val="000000"/>
-                      </a:solidFill>
-                      <a:prstDash val="solid"/>
-                    </a:lnT>
-                    <a:lnB w="7200">
-                      <a:solidFill>
-                        <a:srgbClr val="000000"/>
-                      </a:solidFill>
-                      <a:prstDash val="solid"/>
-                    </a:lnB>
-                    <a:noFill/>
-                  </a:tcPr>
-                </a:tc>
-                <a:tc>
-                  <a:txBody>
-                    <a:bodyPr lIns="36000" rIns="36000" tIns="36000" bIns="36000" anchor="t">
-                      <a:noAutofit/>
-                    </a:bodyPr>
-                    <a:p>
-                      <a:pPr algn="ctr">
-                        <a:lnSpc>
-                          <a:spcPct val="100000"/>
-                        </a:lnSpc>
-                      </a:pPr>
-                      <a:r>
-                        <a:rPr lang="en-US" sz="1400" b="0" u="none" strike="noStrike">
-                          <a:solidFill>
-                            <a:srgbClr val="000000"/>
-                          </a:solidFill>
-                          <a:effectLst/>
-                          <a:uFillTx/>
-                          <a:latin typeface="Arial"/>
-                        </a:rPr>
-                        <a:t>VALUE</a:t>
-                      </a:r>
-                      <a:endParaRPr lang="en-US" sz="1400" b="0" u="none" strike="noStrike">
-                        <a:solidFill>
-                          <a:srgbClr val="000000"/>
-                        </a:solidFill>
-                        <a:effectLst/>
-                        <a:uFillTx/>
-                        <a:latin typeface="Arial"/>
-                      </a:endParaRPr>
-                    </a:p>
-                  </a:txBody>
-                  <a:tcPr anchor="t" marL="36000" marR="36000" marT="36000" marB="36000">
-                    <a:lnL w="7200">
-                      <a:solidFill>
-                        <a:srgbClr val="000000"/>
-                      </a:solidFill>
-                      <a:prstDash val="solid"/>
-                    </a:lnL>
-                    <a:lnR w="7200">
-                      <a:solidFill>
-                        <a:srgbClr val="000000"/>
-                      </a:solidFill>
-                      <a:prstDash val="solid"/>
-                    </a:lnR>
-                    <a:lnT w="7200">
-                      <a:solidFill>
-                        <a:srgbClr val="000000"/>
-                      </a:solidFill>
-                      <a:prstDash val="solid"/>
-                    </a:lnT>
-                    <a:lnB w="7200">
-                      <a:solidFill>
-                        <a:srgbClr val="000000"/>
-                      </a:solidFill>
-                      <a:prstDash val="solid"/>
-                    </a:lnB>
-                    <a:noFill/>
-                  </a:tcPr>
-                </a:tc>
-                <a:tc>
-                  <a:txBody>
-                    <a:bodyPr lIns="36000" rIns="36000" tIns="36000" bIns="36000" anchor="t">
-                      <a:noAutofit/>
-                    </a:bodyPr>
-                    <a:p>
-                      <a:pPr algn="ctr">
-                        <a:lnSpc>
-                          <a:spcPct val="100000"/>
-                        </a:lnSpc>
-                      </a:pPr>
-                      <a:r>
-                        <a:rPr lang="en-US" sz="1400" b="0" u="none" strike="noStrike">
-                          <a:solidFill>
-                            <a:srgbClr val="000000"/>
-                          </a:solidFill>
-                          <a:effectLst/>
-                          <a:uFillTx/>
-                          <a:latin typeface="Arial"/>
-                        </a:rPr>
-                        <a:t>DESCRIPTION</a:t>
-                      </a:r>
-                      <a:endParaRPr lang="en-US" sz="1400" b="0" u="none" strike="noStrike">
-                        <a:solidFill>
-                          <a:srgbClr val="000000"/>
-                        </a:solidFill>
-                        <a:effectLst/>
-                        <a:uFillTx/>
-                        <a:latin typeface="Arial"/>
-                      </a:endParaRPr>
-                    </a:p>
-                  </a:txBody>
-                  <a:tcPr anchor="t" marL="36000" marR="36000" marT="36000" marB="36000">
-                    <a:lnL w="7200">
-                      <a:solidFill>
-                        <a:srgbClr val="000000"/>
-                      </a:solidFill>
-                      <a:prstDash val="solid"/>
-                    </a:lnL>
-                    <a:lnR w="7200">
-                      <a:solidFill>
-                        <a:srgbClr val="000000"/>
-                      </a:solidFill>
-                      <a:prstDash val="solid"/>
-                    </a:lnR>
-                    <a:lnT w="7200">
-                      <a:solidFill>
-                        <a:srgbClr val="000000"/>
-                      </a:solidFill>
-                      <a:prstDash val="solid"/>
-                    </a:lnT>
-                    <a:lnB w="7200">
-                      <a:solidFill>
-                        <a:srgbClr val="000000"/>
-                      </a:solidFill>
-                      <a:prstDash val="solid"/>
-                    </a:lnB>
-                    <a:noFill/>
-                  </a:tcPr>
-                </a:tc>
-                <a:tc>
-                  <a:txBody>
-                    <a:bodyPr lIns="36000" rIns="36000" tIns="36000" bIns="36000" anchor="t">
-                      <a:noAutofit/>
-                    </a:bodyPr>
-                    <a:p>
-                      <a:pPr algn="ctr">
-                        <a:lnSpc>
-                          <a:spcPct val="100000"/>
-                        </a:lnSpc>
-                      </a:pPr>
-                      <a:r>
-                        <a:rPr lang="en-US" sz="1400" b="0" u="none" strike="noStrike">
-                          <a:solidFill>
-                            <a:srgbClr val="000000"/>
-                          </a:solidFill>
-                          <a:effectLst/>
-                          <a:uFillTx/>
-                          <a:latin typeface="Arial"/>
-                        </a:rPr>
-                        <a:t>MEANING </a:t>
-                      </a:r>
-                      <a:endParaRPr lang="en-US" sz="1400" b="0" u="none" strike="noStrike">
-                        <a:solidFill>
-                          <a:srgbClr val="000000"/>
-                        </a:solidFill>
-                        <a:effectLst/>
-                        <a:uFillTx/>
-                        <a:latin typeface="Arial"/>
-                      </a:endParaRPr>
-                    </a:p>
-                  </a:txBody>
-                  <a:tcPr anchor="t" marL="36000" marR="36000" marT="36000" marB="36000">
-                    <a:lnL w="7200">
-                      <a:solidFill>
-                        <a:srgbClr val="000000"/>
-                      </a:solidFill>
-                      <a:prstDash val="solid"/>
-                    </a:lnL>
-                    <a:lnR w="7200">
-                      <a:solidFill>
-                        <a:srgbClr val="000000"/>
-                      </a:solidFill>
-                      <a:prstDash val="solid"/>
-                    </a:lnR>
-                    <a:lnT w="7200">
-                      <a:solidFill>
-                        <a:srgbClr val="000000"/>
-                      </a:solidFill>
-                      <a:prstDash val="solid"/>
-                    </a:lnT>
-                    <a:lnB w="7200">
-                      <a:solidFill>
-                        <a:srgbClr val="000000"/>
-                      </a:solidFill>
-                      <a:prstDash val="solid"/>
-                    </a:lnB>
-                    <a:noFill/>
-                  </a:tcPr>
-                </a:tc>
-              </a:tr>
-              <a:tr h="2869560">
-                <a:tc>
-                  <a:txBody>
-                    <a:bodyPr lIns="36000" rIns="36000" tIns="36000" bIns="36000" anchor="t">
-                      <a:noAutofit/>
-                    </a:bodyPr>
-                    <a:p>
-                      <a:pPr algn="ctr">
-                        <a:lnSpc>
-                          <a:spcPct val="100000"/>
-                        </a:lnSpc>
-                      </a:pPr>
-                      <a:r>
-                        <a:rPr lang="en-US" sz="1400" b="0" u="none" strike="noStrike">
-                          <a:solidFill>
-                            <a:srgbClr val="000000"/>
-                          </a:solidFill>
-                          <a:effectLst/>
-                          <a:uFillTx/>
-                          <a:latin typeface="Arial"/>
-                        </a:rPr>
-                        <a:t>BIG </a:t>
-                      </a:r>
-                      <a:endParaRPr lang="en-US" sz="1400" b="0" u="none" strike="noStrike">
-                        <a:solidFill>
-                          <a:srgbClr val="000000"/>
-                        </a:solidFill>
-                        <a:effectLst/>
-                        <a:uFillTx/>
-                        <a:latin typeface="Arial"/>
-                      </a:endParaRPr>
-                    </a:p>
-                  </a:txBody>
-                  <a:tcPr anchor="t" marL="36000" marR="36000" marT="36000" marB="36000">
-                    <a:lnL w="7200">
-                      <a:solidFill>
-                        <a:srgbClr val="000000"/>
-                      </a:solidFill>
-                      <a:prstDash val="solid"/>
-                    </a:lnL>
-                    <a:lnR w="7200">
-                      <a:solidFill>
-                        <a:srgbClr val="000000"/>
-                      </a:solidFill>
-                      <a:prstDash val="solid"/>
-                    </a:lnR>
-                    <a:lnT w="7200">
-                      <a:solidFill>
-                        <a:srgbClr val="000000"/>
-                      </a:solidFill>
-                      <a:prstDash val="solid"/>
-                    </a:lnT>
-                    <a:lnB w="7200">
-                      <a:solidFill>
-                        <a:srgbClr val="000000"/>
-                      </a:solidFill>
-                      <a:prstDash val="solid"/>
-                    </a:lnB>
-                    <a:noFill/>
-                  </a:tcPr>
-                </a:tc>
-                <a:tc>
-                  <a:txBody>
-                    <a:bodyPr lIns="36000" rIns="36000" tIns="36000" bIns="36000" anchor="t">
-                      <a:noAutofit/>
-                    </a:bodyPr>
-                    <a:p>
-                      <a:pPr algn="ctr">
-                        <a:lnSpc>
-                          <a:spcPct val="100000"/>
-                        </a:lnSpc>
-                      </a:pPr>
-                      <a:r>
-                        <a:rPr lang="en-US" sz="1400" b="0" u="none" strike="noStrike">
-                          <a:solidFill>
-                            <a:srgbClr val="000000"/>
-                          </a:solidFill>
-                          <a:effectLst/>
-                          <a:uFillTx/>
-                          <a:latin typeface="Arial"/>
-                        </a:rPr>
-                        <a:t>&gt;201</a:t>
-                      </a:r>
-                      <a:endParaRPr lang="en-US" sz="1400" b="0" u="none" strike="noStrike">
-                        <a:solidFill>
-                          <a:srgbClr val="000000"/>
-                        </a:solidFill>
-                        <a:effectLst/>
-                        <a:uFillTx/>
-                        <a:latin typeface="Arial"/>
-                      </a:endParaRPr>
-                    </a:p>
-                  </a:txBody>
-                  <a:tcPr anchor="t" marL="36000" marR="36000" marT="36000" marB="36000">
-                    <a:lnL w="7200">
-                      <a:solidFill>
-                        <a:srgbClr val="000000"/>
-                      </a:solidFill>
-                      <a:prstDash val="solid"/>
-                    </a:lnL>
-                    <a:lnR w="7200">
-                      <a:solidFill>
-                        <a:srgbClr val="000000"/>
-                      </a:solidFill>
-                      <a:prstDash val="solid"/>
-                    </a:lnR>
-                    <a:lnT w="7200">
-                      <a:solidFill>
-                        <a:srgbClr val="000000"/>
-                      </a:solidFill>
-                      <a:prstDash val="solid"/>
-                    </a:lnT>
-                    <a:lnB w="7200">
-                      <a:solidFill>
-                        <a:srgbClr val="000000"/>
-                      </a:solidFill>
-                      <a:prstDash val="solid"/>
-                    </a:lnB>
-                    <a:noFill/>
-                  </a:tcPr>
-                </a:tc>
-                <a:tc>
-                  <a:txBody>
-                    <a:bodyPr lIns="36000" rIns="36000" tIns="36000" bIns="36000" anchor="t">
-                      <a:noAutofit/>
-                    </a:bodyPr>
-                    <a:p>
-                      <a:pPr marL="216000" indent="-216000" algn="ctr">
-                        <a:lnSpc>
-                          <a:spcPct val="100000"/>
-                        </a:lnSpc>
-                        <a:buClr>
-                          <a:srgbClr val="000000"/>
-                        </a:buClr>
-                        <a:buSzPct val="45000"/>
-                        <a:buFont typeface="Wingdings" charset="2"/>
-                        <a:buChar char=""/>
-                      </a:pPr>
-                      <a:r>
-                        <a:rPr lang="en-US" sz="1400" b="0" u="none" strike="noStrike">
-                          <a:solidFill>
-                            <a:srgbClr val="000000"/>
-                          </a:solidFill>
-                          <a:effectLst/>
-                          <a:uFillTx/>
-                          <a:latin typeface="Arial"/>
-                        </a:rPr>
-                        <a:t>Threshold changes slowly across image.</a:t>
-                      </a:r>
-                      <a:endParaRPr lang="en-US" sz="1400" b="0" u="none" strike="noStrike">
-                        <a:solidFill>
-                          <a:srgbClr val="000000"/>
-                        </a:solidFill>
-                        <a:effectLst/>
-                        <a:uFillTx/>
-                        <a:latin typeface="Arial"/>
-                      </a:endParaRPr>
-                    </a:p>
-                    <a:p>
-                      <a:pPr marL="216000" indent="-216000" algn="ctr">
-                        <a:lnSpc>
-                          <a:spcPct val="100000"/>
-                        </a:lnSpc>
-                        <a:buClr>
-                          <a:srgbClr val="000000"/>
-                        </a:buClr>
-                        <a:buSzPct val="45000"/>
-                        <a:buFont typeface="Wingdings" charset="2"/>
-                        <a:buChar char=""/>
-                      </a:pPr>
-                      <a:r>
-                        <a:rPr lang="en-US" sz="1400" b="0" u="none" strike="noStrike">
-                          <a:solidFill>
-                            <a:srgbClr val="000000"/>
-                          </a:solidFill>
-                          <a:effectLst/>
-                          <a:uFillTx/>
-                          <a:latin typeface="Arial"/>
-                        </a:rPr>
-                        <a:t>Good for smooth illumination.</a:t>
-                      </a:r>
-                      <a:endParaRPr lang="en-US" sz="1400" b="0" u="none" strike="noStrike">
-                        <a:solidFill>
-                          <a:srgbClr val="000000"/>
-                        </a:solidFill>
-                        <a:effectLst/>
-                        <a:uFillTx/>
-                        <a:latin typeface="Arial"/>
-                      </a:endParaRPr>
-                    </a:p>
-                    <a:p>
-                      <a:pPr marL="216000" indent="-216000" algn="ctr">
-                        <a:lnSpc>
-                          <a:spcPct val="100000"/>
-                        </a:lnSpc>
-                        <a:buClr>
-                          <a:srgbClr val="000000"/>
-                        </a:buClr>
-                        <a:buSzPct val="45000"/>
-                        <a:buFont typeface="Wingdings" charset="2"/>
-                        <a:buChar char=""/>
-                      </a:pPr>
-                      <a:r>
-                        <a:rPr lang="en-US" sz="1400" b="0" u="none" strike="noStrike">
-                          <a:solidFill>
-                            <a:srgbClr val="000000"/>
-                          </a:solidFill>
-                          <a:effectLst/>
-                          <a:uFillTx/>
-                          <a:latin typeface="Arial"/>
-                        </a:rPr>
-                        <a:t>Good for thick neurites.</a:t>
-                      </a:r>
-                      <a:endParaRPr lang="en-US" sz="1400" b="0" u="none" strike="noStrike">
-                        <a:solidFill>
-                          <a:srgbClr val="000000"/>
-                        </a:solidFill>
-                        <a:effectLst/>
-                        <a:uFillTx/>
-                        <a:latin typeface="Arial"/>
-                      </a:endParaRPr>
-                    </a:p>
-                    <a:p>
-                      <a:pPr marL="216000" indent="-216000" algn="ctr">
-                        <a:lnSpc>
-                          <a:spcPct val="100000"/>
-                        </a:lnSpc>
-                        <a:buClr>
-                          <a:srgbClr val="000000"/>
-                        </a:buClr>
-                        <a:buSzPct val="45000"/>
-                        <a:buFont typeface="Wingdings" charset="2"/>
-                        <a:buChar char=""/>
-                      </a:pPr>
-                      <a:r>
-                        <a:rPr lang="en-US" sz="1400" b="0" u="none" strike="noStrike">
-                          <a:solidFill>
-                            <a:srgbClr val="ff0000"/>
-                          </a:solidFill>
-                          <a:effectLst/>
-                          <a:uFillTx/>
-                          <a:latin typeface="Arial"/>
-                        </a:rPr>
-                        <a:t>May miss very thin branches.</a:t>
-                      </a:r>
-                      <a:endParaRPr lang="en-US" sz="1400" b="0" u="none" strike="noStrike">
-                        <a:solidFill>
-                          <a:srgbClr val="000000"/>
-                        </a:solidFill>
-                        <a:effectLst/>
-                        <a:uFillTx/>
-                        <a:latin typeface="Arial"/>
-                      </a:endParaRPr>
-                    </a:p>
-                    <a:p>
-                      <a:pPr marL="216000" indent="-216000" algn="ctr">
-                        <a:lnSpc>
-                          <a:spcPct val="100000"/>
-                        </a:lnSpc>
-                        <a:buClr>
-                          <a:srgbClr val="000000"/>
-                        </a:buClr>
-                        <a:buSzPct val="45000"/>
-                        <a:buFont typeface="Wingdings" charset="2"/>
-                        <a:buChar char=""/>
-                      </a:pPr>
-                      <a:r>
-                        <a:rPr lang="en-US" sz="1400" b="0" u="none" strike="noStrike">
-                          <a:solidFill>
-                            <a:srgbClr val="ff0000"/>
-                          </a:solidFill>
-                          <a:effectLst/>
-                          <a:uFillTx/>
-                          <a:latin typeface="Arial"/>
-                        </a:rPr>
-                        <a:t>Can create small gaps in thin areas.</a:t>
-                      </a:r>
-                      <a:endParaRPr lang="en-US" sz="1400" b="0" u="none" strike="noStrike">
-                        <a:solidFill>
-                          <a:srgbClr val="000000"/>
-                        </a:solidFill>
-                        <a:effectLst/>
-                        <a:uFillTx/>
-                        <a:latin typeface="Arial"/>
-                      </a:endParaRPr>
-                    </a:p>
-                    <a:p>
-                      <a:pPr algn="ctr">
-                        <a:lnSpc>
-                          <a:spcPct val="100000"/>
-                        </a:lnSpc>
-                      </a:pPr>
-                      <a:endParaRPr lang="en-US" sz="1400" b="0" u="none" strike="noStrike">
-                        <a:solidFill>
-                          <a:srgbClr val="000000"/>
-                        </a:solidFill>
-                        <a:effectLst/>
-                        <a:uFillTx/>
-                        <a:latin typeface="Arial"/>
-                      </a:endParaRPr>
-                    </a:p>
-                    <a:p>
-                      <a:pPr algn="ctr">
-                        <a:lnSpc>
-                          <a:spcPct val="100000"/>
-                        </a:lnSpc>
-                      </a:pPr>
-                      <a:r>
-                        <a:rPr lang="en-US" sz="1400" b="0" u="none" strike="noStrike">
-                          <a:solidFill>
-                            <a:srgbClr val="000000"/>
-                          </a:solidFill>
-                          <a:effectLst/>
-                          <a:uFillTx/>
-                          <a:latin typeface="Arial"/>
-                        </a:rPr>
-                        <a:t>In simply words:</a:t>
-                      </a:r>
-                      <a:endParaRPr lang="en-US" sz="1400" b="0" u="none" strike="noStrike">
-                        <a:solidFill>
-                          <a:srgbClr val="000000"/>
-                        </a:solidFill>
-                        <a:effectLst/>
-                        <a:uFillTx/>
-                        <a:latin typeface="Arial"/>
-                      </a:endParaRPr>
-                    </a:p>
-                    <a:p>
-                      <a:pPr algn="ctr">
-                        <a:lnSpc>
-                          <a:spcPct val="100000"/>
-                        </a:lnSpc>
-                      </a:pPr>
-                      <a:r>
-                        <a:rPr lang="en-US" sz="1400" b="0" u="none" strike="noStrike">
-                          <a:solidFill>
-                            <a:srgbClr val="000000"/>
-                          </a:solidFill>
-                          <a:effectLst/>
-                          <a:uFillTx/>
-                          <a:latin typeface="Arial"/>
-                        </a:rPr>
-                        <a:t>“You judge brightness compared to a large region.”</a:t>
-                      </a:r>
-                      <a:endParaRPr lang="en-US" sz="1400" b="0" u="none" strike="noStrike">
-                        <a:solidFill>
-                          <a:srgbClr val="000000"/>
-                        </a:solidFill>
-                        <a:effectLst/>
-                        <a:uFillTx/>
-                        <a:latin typeface="Arial"/>
-                      </a:endParaRPr>
-                    </a:p>
-                    <a:p>
-                      <a:pPr algn="ctr">
-                        <a:lnSpc>
-                          <a:spcPct val="100000"/>
-                        </a:lnSpc>
-                      </a:pPr>
-                      <a:endParaRPr lang="en-US" sz="1400" b="0" u="none" strike="noStrike">
-                        <a:solidFill>
-                          <a:srgbClr val="000000"/>
-                        </a:solidFill>
-                        <a:effectLst/>
-                        <a:uFillTx/>
-                        <a:latin typeface="Arial"/>
-                      </a:endParaRPr>
-                    </a:p>
-                  </a:txBody>
-                  <a:tcPr anchor="t" marL="36000" marR="36000" marT="36000" marB="36000">
-                    <a:lnL w="7200">
-                      <a:solidFill>
-                        <a:srgbClr val="000000"/>
-                      </a:solidFill>
-                      <a:prstDash val="solid"/>
-                    </a:lnL>
-                    <a:lnR w="7200">
-                      <a:solidFill>
-                        <a:srgbClr val="000000"/>
-                      </a:solidFill>
-                      <a:prstDash val="solid"/>
-                    </a:lnR>
-                    <a:lnT w="7200">
-                      <a:solidFill>
-                        <a:srgbClr val="000000"/>
-                      </a:solidFill>
-                      <a:prstDash val="solid"/>
-                    </a:lnT>
-                    <a:lnB w="7200">
-                      <a:solidFill>
-                        <a:srgbClr val="000000"/>
-                      </a:solidFill>
-                      <a:prstDash val="solid"/>
-                    </a:lnB>
-                    <a:noFill/>
-                  </a:tcPr>
-                </a:tc>
-                <a:tc>
-                  <a:txBody>
-                    <a:bodyPr lIns="36000" rIns="36000" tIns="36000" bIns="36000" anchor="t">
-                      <a:noAutofit/>
-                    </a:bodyPr>
-                    <a:p>
-                      <a:pPr algn="ctr">
-                        <a:lnSpc>
-                          <a:spcPct val="100000"/>
-                        </a:lnSpc>
-                      </a:pPr>
-                      <a:r>
-                        <a:rPr lang="en-US" sz="1400" b="0" u="none" strike="noStrike">
-                          <a:solidFill>
-                            <a:srgbClr val="000000"/>
-                          </a:solidFill>
-                          <a:effectLst/>
-                          <a:uFillTx/>
-                          <a:latin typeface="Arial"/>
-                        </a:rPr>
-                        <a:t>Smooth, conservative mask </a:t>
-                      </a:r>
-                      <a:endParaRPr lang="en-US" sz="1400" b="0" u="none" strike="noStrike">
-                        <a:solidFill>
-                          <a:srgbClr val="000000"/>
-                        </a:solidFill>
-                        <a:effectLst/>
-                        <a:uFillTx/>
-                        <a:latin typeface="Arial"/>
-                      </a:endParaRPr>
-                    </a:p>
-                  </a:txBody>
-                  <a:tcPr anchor="t" marL="36000" marR="36000" marT="36000" marB="36000">
-                    <a:lnL w="7200">
-                      <a:solidFill>
-                        <a:srgbClr val="000000"/>
-                      </a:solidFill>
-                      <a:prstDash val="solid"/>
-                    </a:lnL>
-                    <a:lnR w="7200">
-                      <a:solidFill>
-                        <a:srgbClr val="000000"/>
-                      </a:solidFill>
-                      <a:prstDash val="solid"/>
-                    </a:lnR>
-                    <a:lnT w="7200">
-                      <a:solidFill>
-                        <a:srgbClr val="000000"/>
-                      </a:solidFill>
-                      <a:prstDash val="solid"/>
-                    </a:lnT>
-                    <a:lnB w="7200">
-                      <a:solidFill>
-                        <a:srgbClr val="000000"/>
-                      </a:solidFill>
-                      <a:prstDash val="solid"/>
-                    </a:lnB>
-                    <a:noFill/>
-                  </a:tcPr>
-                </a:tc>
-              </a:tr>
-              <a:tr h="2669760">
-                <a:tc>
-                  <a:txBody>
-                    <a:bodyPr lIns="36000" rIns="36000" tIns="36000" bIns="36000" anchor="t">
-                      <a:noAutofit/>
-                    </a:bodyPr>
-                    <a:p>
-                      <a:pPr algn="ctr">
-                        <a:lnSpc>
-                          <a:spcPct val="100000"/>
-                        </a:lnSpc>
-                      </a:pPr>
-                      <a:r>
-                        <a:rPr lang="en-US" sz="1400" b="0" u="none" strike="noStrike">
-                          <a:solidFill>
-                            <a:srgbClr val="000000"/>
-                          </a:solidFill>
-                          <a:effectLst/>
-                          <a:uFillTx/>
-                          <a:latin typeface="Arial"/>
-                        </a:rPr>
-                        <a:t>SMALL</a:t>
-                      </a:r>
-                      <a:endParaRPr lang="en-US" sz="1400" b="0" u="none" strike="noStrike">
-                        <a:solidFill>
-                          <a:srgbClr val="000000"/>
-                        </a:solidFill>
-                        <a:effectLst/>
-                        <a:uFillTx/>
-                        <a:latin typeface="Arial"/>
-                      </a:endParaRPr>
-                    </a:p>
-                  </a:txBody>
-                  <a:tcPr anchor="t" marL="36000" marR="36000" marT="36000" marB="36000">
-                    <a:lnL w="7200">
-                      <a:solidFill>
-                        <a:srgbClr val="000000"/>
-                      </a:solidFill>
-                      <a:prstDash val="solid"/>
-                    </a:lnL>
-                    <a:lnR w="7200">
-                      <a:solidFill>
-                        <a:srgbClr val="000000"/>
-                      </a:solidFill>
-                      <a:prstDash val="solid"/>
-                    </a:lnR>
-                    <a:lnT w="7200">
-                      <a:solidFill>
-                        <a:srgbClr val="000000"/>
-                      </a:solidFill>
-                      <a:prstDash val="solid"/>
-                    </a:lnT>
-                    <a:lnB w="7200">
-                      <a:solidFill>
-                        <a:srgbClr val="000000"/>
-                      </a:solidFill>
-                      <a:prstDash val="solid"/>
-                    </a:lnB>
-                    <a:noFill/>
-                  </a:tcPr>
-                </a:tc>
-                <a:tc>
-                  <a:txBody>
-                    <a:bodyPr lIns="36000" rIns="36000" tIns="36000" bIns="36000" anchor="t">
-                      <a:noAutofit/>
-                    </a:bodyPr>
-                    <a:p>
-                      <a:pPr algn="ctr">
-                        <a:lnSpc>
-                          <a:spcPct val="100000"/>
-                        </a:lnSpc>
-                      </a:pPr>
-                      <a:r>
-                        <a:rPr lang="en-US" sz="1400" b="0" u="none" strike="noStrike">
-                          <a:solidFill>
-                            <a:srgbClr val="000000"/>
-                          </a:solidFill>
-                          <a:effectLst/>
-                          <a:uFillTx/>
-                          <a:latin typeface="Arial"/>
-                        </a:rPr>
-                        <a:t>&lt;91</a:t>
-                      </a:r>
-                      <a:endParaRPr lang="en-US" sz="1400" b="0" u="none" strike="noStrike">
-                        <a:solidFill>
-                          <a:srgbClr val="000000"/>
-                        </a:solidFill>
-                        <a:effectLst/>
-                        <a:uFillTx/>
-                        <a:latin typeface="Arial"/>
-                      </a:endParaRPr>
-                    </a:p>
-                  </a:txBody>
-                  <a:tcPr anchor="t" marL="36000" marR="36000" marT="36000" marB="36000">
-                    <a:lnL w="7200">
-                      <a:solidFill>
-                        <a:srgbClr val="000000"/>
-                      </a:solidFill>
-                      <a:prstDash val="solid"/>
-                    </a:lnL>
-                    <a:lnR w="7200">
-                      <a:solidFill>
-                        <a:srgbClr val="000000"/>
-                      </a:solidFill>
-                      <a:prstDash val="solid"/>
-                    </a:lnR>
-                    <a:lnT w="7200">
-                      <a:solidFill>
-                        <a:srgbClr val="000000"/>
-                      </a:solidFill>
-                      <a:prstDash val="solid"/>
-                    </a:lnT>
-                    <a:lnB w="7200">
-                      <a:solidFill>
-                        <a:srgbClr val="000000"/>
-                      </a:solidFill>
-                      <a:prstDash val="solid"/>
-                    </a:lnB>
-                    <a:noFill/>
-                  </a:tcPr>
-                </a:tc>
-                <a:tc>
-                  <a:txBody>
-                    <a:bodyPr lIns="36000" rIns="36000" tIns="36000" bIns="36000" anchor="t">
-                      <a:noAutofit/>
-                    </a:bodyPr>
-                    <a:p>
-                      <a:pPr marL="216000" indent="-216000" algn="ctr">
-                        <a:lnSpc>
-                          <a:spcPct val="100000"/>
-                        </a:lnSpc>
-                        <a:buClr>
-                          <a:srgbClr val="000000"/>
-                        </a:buClr>
-                        <a:buSzPct val="45000"/>
-                        <a:buFont typeface="Wingdings" charset="2"/>
-                        <a:buChar char=""/>
-                      </a:pPr>
-                      <a:r>
-                        <a:rPr lang="en-US" sz="1400" b="0" u="none" strike="noStrike">
-                          <a:solidFill>
-                            <a:srgbClr val="000000"/>
-                          </a:solidFill>
-                          <a:effectLst/>
-                          <a:uFillTx/>
-                          <a:latin typeface="Arial"/>
-                        </a:rPr>
-                        <a:t>Detects thin neurites better.</a:t>
-                      </a:r>
-                      <a:endParaRPr lang="en-US" sz="1400" b="0" u="none" strike="noStrike">
-                        <a:solidFill>
-                          <a:srgbClr val="000000"/>
-                        </a:solidFill>
-                        <a:effectLst/>
-                        <a:uFillTx/>
-                        <a:latin typeface="Arial"/>
-                      </a:endParaRPr>
-                    </a:p>
-                    <a:p>
-                      <a:pPr marL="216000" indent="-216000" algn="ctr">
-                        <a:lnSpc>
-                          <a:spcPct val="100000"/>
-                        </a:lnSpc>
-                        <a:buClr>
-                          <a:srgbClr val="000000"/>
-                        </a:buClr>
-                        <a:buSzPct val="45000"/>
-                        <a:buFont typeface="Wingdings" charset="2"/>
-                        <a:buChar char=""/>
-                      </a:pPr>
-                      <a:r>
-                        <a:rPr lang="en-US" sz="1400" b="0" u="none" strike="noStrike">
-                          <a:solidFill>
-                            <a:srgbClr val="000000"/>
-                          </a:solidFill>
-                          <a:effectLst/>
-                          <a:uFillTx/>
-                          <a:latin typeface="Arial"/>
-                        </a:rPr>
-                        <a:t>Adapts quickly to local changes.</a:t>
-                      </a:r>
-                      <a:endParaRPr lang="en-US" sz="1400" b="0" u="none" strike="noStrike">
-                        <a:solidFill>
-                          <a:srgbClr val="000000"/>
-                        </a:solidFill>
-                        <a:effectLst/>
-                        <a:uFillTx/>
-                        <a:latin typeface="Arial"/>
-                      </a:endParaRPr>
-                    </a:p>
-                    <a:p>
-                      <a:pPr marL="216000" indent="-216000" algn="ctr">
-                        <a:lnSpc>
-                          <a:spcPct val="100000"/>
-                        </a:lnSpc>
-                        <a:buClr>
-                          <a:srgbClr val="000000"/>
-                        </a:buClr>
-                        <a:buSzPct val="45000"/>
-                        <a:buFont typeface="Wingdings" charset="2"/>
-                        <a:buChar char=""/>
-                      </a:pPr>
-                      <a:r>
-                        <a:rPr lang="en-US" sz="1400" b="0" u="none" strike="noStrike">
-                          <a:solidFill>
-                            <a:srgbClr val="ff0000"/>
-                          </a:solidFill>
-                          <a:effectLst/>
-                          <a:uFillTx/>
-                          <a:latin typeface="Arial"/>
-                        </a:rPr>
-                        <a:t>More sensitive to noise.</a:t>
-                      </a:r>
-                      <a:endParaRPr lang="en-US" sz="1400" b="0" u="none" strike="noStrike">
-                        <a:solidFill>
-                          <a:srgbClr val="000000"/>
-                        </a:solidFill>
-                        <a:effectLst/>
-                        <a:uFillTx/>
-                        <a:latin typeface="Arial"/>
-                      </a:endParaRPr>
-                    </a:p>
-                    <a:p>
-                      <a:pPr marL="216000" indent="-216000" algn="ctr">
-                        <a:lnSpc>
-                          <a:spcPct val="100000"/>
-                        </a:lnSpc>
-                        <a:buClr>
-                          <a:srgbClr val="000000"/>
-                        </a:buClr>
-                        <a:buSzPct val="45000"/>
-                        <a:buFont typeface="Wingdings" charset="2"/>
-                        <a:buChar char=""/>
-                      </a:pPr>
-                      <a:r>
-                        <a:rPr lang="en-US" sz="1400" b="0" u="none" strike="noStrike">
-                          <a:solidFill>
-                            <a:srgbClr val="ff0000"/>
-                          </a:solidFill>
-                          <a:effectLst/>
-                          <a:uFillTx/>
-                          <a:latin typeface="Arial"/>
-                        </a:rPr>
-                        <a:t> Mask may look patchy.</a:t>
-                      </a:r>
-                      <a:endParaRPr lang="en-US" sz="1400" b="0" u="none" strike="noStrike">
-                        <a:solidFill>
-                          <a:srgbClr val="000000"/>
-                        </a:solidFill>
-                        <a:effectLst/>
-                        <a:uFillTx/>
-                        <a:latin typeface="Arial"/>
-                      </a:endParaRPr>
-                    </a:p>
-                    <a:p>
-                      <a:pPr algn="ctr">
-                        <a:lnSpc>
-                          <a:spcPct val="100000"/>
-                        </a:lnSpc>
-                      </a:pPr>
-                      <a:endParaRPr lang="en-US" sz="1400" b="0" u="none" strike="noStrike">
-                        <a:solidFill>
-                          <a:srgbClr val="000000"/>
-                        </a:solidFill>
-                        <a:effectLst/>
-                        <a:uFillTx/>
-                        <a:latin typeface="Arial"/>
-                      </a:endParaRPr>
-                    </a:p>
-                    <a:p>
-                      <a:pPr algn="ctr">
-                        <a:lnSpc>
-                          <a:spcPct val="100000"/>
-                        </a:lnSpc>
-                      </a:pPr>
-                      <a:r>
-                        <a:rPr lang="en-US" sz="1400" b="0" u="none" strike="noStrike">
-                          <a:solidFill>
-                            <a:srgbClr val="000000"/>
-                          </a:solidFill>
-                          <a:effectLst/>
-                          <a:uFillTx/>
-                          <a:latin typeface="Arial"/>
-                        </a:rPr>
-                        <a:t>In simply words:</a:t>
-                      </a:r>
-                      <a:endParaRPr lang="en-US" sz="1400" b="0" u="none" strike="noStrike">
-                        <a:solidFill>
-                          <a:srgbClr val="000000"/>
-                        </a:solidFill>
-                        <a:effectLst/>
-                        <a:uFillTx/>
-                        <a:latin typeface="Arial"/>
-                      </a:endParaRPr>
-                    </a:p>
-                    <a:p>
-                      <a:pPr algn="ctr">
-                        <a:lnSpc>
-                          <a:spcPct val="100000"/>
-                        </a:lnSpc>
-                      </a:pPr>
-                      <a:r>
-                        <a:rPr lang="en-US" sz="1400" b="0" u="none" strike="noStrike">
-                          <a:solidFill>
-                            <a:srgbClr val="000000"/>
-                          </a:solidFill>
-                          <a:effectLst/>
-                          <a:uFillTx/>
-                          <a:latin typeface="Arial"/>
-                        </a:rPr>
-                        <a:t>“You judge brightness compared to a tiny neighborhood.”</a:t>
-                      </a:r>
-                      <a:endParaRPr lang="en-US" sz="1400" b="0" u="none" strike="noStrike">
-                        <a:solidFill>
-                          <a:srgbClr val="000000"/>
-                        </a:solidFill>
-                        <a:effectLst/>
-                        <a:uFillTx/>
-                        <a:latin typeface="Arial"/>
-                      </a:endParaRPr>
-                    </a:p>
-                    <a:p>
-                      <a:pPr algn="ctr">
-                        <a:lnSpc>
-                          <a:spcPct val="100000"/>
-                        </a:lnSpc>
-                      </a:pPr>
-                      <a:endParaRPr lang="en-US" sz="1400" b="0" u="none" strike="noStrike">
-                        <a:solidFill>
-                          <a:srgbClr val="000000"/>
-                        </a:solidFill>
-                        <a:effectLst/>
-                        <a:uFillTx/>
-                        <a:latin typeface="Arial"/>
-                      </a:endParaRPr>
-                    </a:p>
-                  </a:txBody>
-                  <a:tcPr anchor="t" marL="36000" marR="36000" marT="36000" marB="36000">
-                    <a:lnL w="7200">
-                      <a:solidFill>
-                        <a:srgbClr val="000000"/>
-                      </a:solidFill>
-                      <a:prstDash val="solid"/>
-                    </a:lnL>
-                    <a:lnR w="7200">
-                      <a:solidFill>
-                        <a:srgbClr val="000000"/>
-                      </a:solidFill>
-                      <a:prstDash val="solid"/>
-                    </a:lnR>
-                    <a:lnT w="7200">
-                      <a:solidFill>
-                        <a:srgbClr val="000000"/>
-                      </a:solidFill>
-                      <a:prstDash val="solid"/>
-                    </a:lnT>
-                    <a:lnB w="7200">
-                      <a:solidFill>
-                        <a:srgbClr val="000000"/>
-                      </a:solidFill>
-                      <a:prstDash val="solid"/>
-                    </a:lnB>
-                    <a:noFill/>
-                  </a:tcPr>
-                </a:tc>
-                <a:tc>
-                  <a:txBody>
-                    <a:bodyPr lIns="36000" rIns="36000" tIns="36000" bIns="36000" anchor="t">
-                      <a:noAutofit/>
-                    </a:bodyPr>
-                    <a:p>
-                      <a:pPr algn="ctr">
-                        <a:lnSpc>
-                          <a:spcPct val="100000"/>
-                        </a:lnSpc>
-                      </a:pPr>
-                      <a:r>
-                        <a:rPr lang="en-US" sz="1400" b="0" u="none" strike="noStrike">
-                          <a:solidFill>
-                            <a:srgbClr val="000000"/>
-                          </a:solidFill>
-                          <a:effectLst/>
-                          <a:uFillTx/>
-                          <a:latin typeface="Arial"/>
-                        </a:rPr>
-                        <a:t>Sensitive, detailed mask </a:t>
-                      </a:r>
-                      <a:endParaRPr lang="en-US" sz="1400" b="0" u="none" strike="noStrike">
-                        <a:solidFill>
-                          <a:srgbClr val="000000"/>
-                        </a:solidFill>
-                        <a:effectLst/>
-                        <a:uFillTx/>
-                        <a:latin typeface="Arial"/>
-                      </a:endParaRPr>
-                    </a:p>
-                  </a:txBody>
-                  <a:tcPr anchor="t" marL="36000" marR="36000" marT="36000" marB="36000">
-                    <a:lnL w="7200">
-                      <a:solidFill>
-                        <a:srgbClr val="000000"/>
-                      </a:solidFill>
-                      <a:prstDash val="solid"/>
-                    </a:lnL>
-                    <a:lnR w="7200">
-                      <a:solidFill>
-                        <a:srgbClr val="000000"/>
-                      </a:solidFill>
-                      <a:prstDash val="solid"/>
-                    </a:lnR>
-                    <a:lnT w="7200">
-                      <a:solidFill>
-                        <a:srgbClr val="000000"/>
-                      </a:solidFill>
-                      <a:prstDash val="solid"/>
-                    </a:lnT>
-                    <a:lnB w="7200">
-                      <a:solidFill>
-                        <a:srgbClr val="000000"/>
-                      </a:solidFill>
-                      <a:prstDash val="solid"/>
-                    </a:lnB>
-                    <a:noFill/>
-                  </a:tcPr>
-                </a:tc>
-              </a:tr>
-            </a:tbl>
-          </a:graphicData>
-        </a:graphic>
-      </p:graphicFrame>
     </p:spTree>
   </p:cSld>
   <mc:AlternateContent>
@@ -7164,7 +6333,7 @@
                 <a:uFillTx/>
                 <a:latin typeface="Arial"/>
               </a:rPr>
-              <a:t>Threshold offset std multiplier</a:t>
+              <a:t>Post-processing Algorithm</a:t>
             </a:r>
             <a:endParaRPr lang="en-US" sz="3200" b="0" u="none" strike="noStrike">
               <a:solidFill>
@@ -7186,7 +6355,7 @@
         <p:spPr>
           <a:xfrm>
             <a:off x="228600" y="685800"/>
-            <a:ext cx="11652120" cy="3864960"/>
+            <a:ext cx="11652120" cy="6471000"/>
           </a:xfrm>
           <a:prstGeom prst="rect">
             <a:avLst/>
@@ -7212,19 +6381,180 @@
                 <a:spcPct val="100000"/>
               </a:lnSpc>
             </a:pPr>
-            <a:r>
-              <a:rPr lang="en-US" sz="1800" b="1" u="none" strike="noStrike">
-                <a:solidFill>
-                  <a:srgbClr val="000000"/>
-                </a:solidFill>
-                <a:effectLst/>
-                <a:uFillTx/>
-                <a:latin typeface="Arial"/>
-                <a:ea typeface="SimSun"/>
-              </a:rPr>
-              <a:t>How strict are we?</a:t>
-            </a:r>
-            <a:endParaRPr lang="en-US" sz="1800" b="0" u="none" strike="noStrike">
+            <a:endParaRPr lang="en-US" sz="4000" b="0" u="none" strike="noStrike">
+              <a:solidFill>
+                <a:srgbClr val="000000"/>
+              </a:solidFill>
+              <a:effectLst/>
+              <a:uFillTx/>
+              <a:latin typeface="Arial"/>
+            </a:endParaRPr>
+          </a:p>
+          <a:p>
+            <a:pPr marL="216000" indent="-216000">
+              <a:lnSpc>
+                <a:spcPct val="100000"/>
+              </a:lnSpc>
+              <a:buClr>
+                <a:srgbClr val="158466"/>
+              </a:buClr>
+              <a:buFont typeface="Wingdings" charset="2"/>
+              <a:buChar char=""/>
+            </a:pPr>
+            <a:r>
+              <a:rPr lang="en-US" sz="4000" b="1" u="none" strike="noStrike">
+                <a:solidFill>
+                  <a:srgbClr val="000000"/>
+                </a:solidFill>
+                <a:effectLst/>
+                <a:uFillTx/>
+                <a:latin typeface="Arial"/>
+                <a:ea typeface="SimSun"/>
+              </a:rPr>
+              <a:t>Initialize pixels</a:t>
+            </a:r>
+            <a:endParaRPr lang="en-US" sz="4000" b="0" u="none" strike="noStrike">
+              <a:solidFill>
+                <a:srgbClr val="000000"/>
+              </a:solidFill>
+              <a:effectLst/>
+              <a:uFillTx/>
+              <a:latin typeface="Arial"/>
+            </a:endParaRPr>
+          </a:p>
+          <a:p>
+            <a:pPr marL="216000" indent="-216000">
+              <a:lnSpc>
+                <a:spcPct val="100000"/>
+              </a:lnSpc>
+              <a:buClr>
+                <a:srgbClr val="158466"/>
+              </a:buClr>
+              <a:buFont typeface="Wingdings" charset="2"/>
+              <a:buChar char=""/>
+            </a:pPr>
+            <a:r>
+              <a:rPr lang="en-US" sz="4000" b="1" u="none" strike="noStrike">
+                <a:solidFill>
+                  <a:srgbClr val="000000"/>
+                </a:solidFill>
+                <a:effectLst/>
+                <a:uFillTx/>
+                <a:latin typeface="Arial"/>
+                <a:ea typeface="SimSun"/>
+              </a:rPr>
+              <a:t>Follow flow vectors iteratively</a:t>
+            </a:r>
+            <a:endParaRPr lang="en-US" sz="4000" b="0" u="none" strike="noStrike">
+              <a:solidFill>
+                <a:srgbClr val="000000"/>
+              </a:solidFill>
+              <a:effectLst/>
+              <a:uFillTx/>
+              <a:latin typeface="Arial"/>
+            </a:endParaRPr>
+          </a:p>
+          <a:p>
+            <a:pPr marL="216000" indent="-216000">
+              <a:lnSpc>
+                <a:spcPct val="100000"/>
+              </a:lnSpc>
+              <a:buClr>
+                <a:srgbClr val="158466"/>
+              </a:buClr>
+              <a:buFont typeface="Wingdings" charset="2"/>
+              <a:buChar char=""/>
+            </a:pPr>
+            <a:r>
+              <a:rPr lang="en-US" sz="4000" b="1" u="none" strike="noStrike">
+                <a:solidFill>
+                  <a:srgbClr val="000000"/>
+                </a:solidFill>
+                <a:effectLst/>
+                <a:uFillTx/>
+                <a:latin typeface="Arial"/>
+                <a:ea typeface="SimSun"/>
+              </a:rPr>
+              <a:t>Cluster convergence points</a:t>
+            </a:r>
+            <a:endParaRPr lang="en-US" sz="4000" b="0" u="none" strike="noStrike">
+              <a:solidFill>
+                <a:srgbClr val="000000"/>
+              </a:solidFill>
+              <a:effectLst/>
+              <a:uFillTx/>
+              <a:latin typeface="Arial"/>
+            </a:endParaRPr>
+          </a:p>
+          <a:p>
+            <a:pPr marL="216000" indent="-216000">
+              <a:lnSpc>
+                <a:spcPct val="100000"/>
+              </a:lnSpc>
+              <a:buClr>
+                <a:srgbClr val="158466"/>
+              </a:buClr>
+              <a:buFont typeface="Wingdings" charset="2"/>
+              <a:buChar char=""/>
+            </a:pPr>
+            <a:r>
+              <a:rPr lang="en-US" sz="4000" b="1" u="none" strike="noStrike">
+                <a:solidFill>
+                  <a:srgbClr val="000000"/>
+                </a:solidFill>
+                <a:effectLst/>
+                <a:uFillTx/>
+                <a:latin typeface="Arial"/>
+                <a:ea typeface="SimSun"/>
+              </a:rPr>
+              <a:t>Extract final coordinates</a:t>
+            </a:r>
+            <a:endParaRPr lang="en-US" sz="4000" b="0" u="none" strike="noStrike">
+              <a:solidFill>
+                <a:srgbClr val="000000"/>
+              </a:solidFill>
+              <a:effectLst/>
+              <a:uFillTx/>
+              <a:latin typeface="Arial"/>
+            </a:endParaRPr>
+          </a:p>
+          <a:p>
+            <a:pPr>
+              <a:lnSpc>
+                <a:spcPct val="100000"/>
+              </a:lnSpc>
+            </a:pPr>
+            <a:endParaRPr lang="en-US" sz="2200" b="0" u="none" strike="noStrike">
+              <a:solidFill>
+                <a:srgbClr val="000000"/>
+              </a:solidFill>
+              <a:effectLst/>
+              <a:uFillTx/>
+              <a:latin typeface="Arial"/>
+            </a:endParaRPr>
+          </a:p>
+          <a:p>
+            <a:pPr>
+              <a:lnSpc>
+                <a:spcPct val="100000"/>
+              </a:lnSpc>
+            </a:pPr>
+            <a:endParaRPr lang="en-US" sz="2200" b="0" u="none" strike="noStrike">
+              <a:solidFill>
+                <a:srgbClr val="000000"/>
+              </a:solidFill>
+              <a:effectLst/>
+              <a:uFillTx/>
+              <a:latin typeface="Arial"/>
+            </a:endParaRPr>
+          </a:p>
+          <a:p>
+            <a:pPr>
+              <a:lnSpc>
+                <a:spcPct val="100000"/>
+              </a:lnSpc>
+            </a:pPr>
+            <a:endParaRPr lang="en-US" sz="2200" b="0" u="none" strike="noStrike">
               <a:solidFill>
                 <a:srgbClr val="000000"/>
               </a:solidFill>
@@ -7245,40 +6575,7 @@
                 <a:spcPts val="992"/>
               </a:spcAft>
             </a:pPr>
-            <a:r>
-              <a:rPr lang="en-US" sz="1800" b="0" u="none" strike="noStrike">
-                <a:solidFill>
-                  <a:srgbClr val="000000"/>
-                </a:solidFill>
-                <a:effectLst/>
-                <a:uFillTx/>
-                <a:latin typeface="Arial"/>
-                <a:ea typeface="SimSun"/>
-              </a:rPr>
-              <a:t>This controls how much we lower the threshold so this value decides how easy it is for a pixel to be considered neurite.</a:t>
-            </a:r>
-            <a:endParaRPr lang="en-US" sz="1800" b="0" u="none" strike="noStrike">
-              <a:solidFill>
-                <a:srgbClr val="000000"/>
-              </a:solidFill>
-              <a:effectLst/>
-              <a:uFillTx/>
-              <a:latin typeface="Arial"/>
-            </a:endParaRPr>
-          </a:p>
-          <a:p>
-            <a:pPr>
-              <a:lnSpc>
-                <a:spcPct val="100000"/>
-              </a:lnSpc>
-              <a:spcBef>
-                <a:spcPts val="624"/>
-              </a:spcBef>
-              <a:spcAft>
-                <a:spcPts val="425"/>
-              </a:spcAft>
-            </a:pPr>
-            <a:endParaRPr lang="en-US" sz="1800" b="0" u="none" strike="noStrike">
+            <a:endParaRPr lang="en-US" sz="2200" b="0" u="none" strike="noStrike">
               <a:solidFill>
                 <a:srgbClr val="000000"/>
               </a:solidFill>
@@ -7320,7 +6617,7 @@
                 <a:spcPts val="992"/>
               </a:spcAft>
             </a:pPr>
-            <a:endParaRPr lang="en-US" sz="1800" b="0" u="none" strike="noStrike">
+            <a:endParaRPr lang="en-US" sz="1000" b="0" u="none" strike="noStrike">
               <a:solidFill>
                 <a:srgbClr val="000000"/>
               </a:solidFill>
@@ -7341,27 +6638,6 @@
                 <a:spcPts val="992"/>
               </a:spcAft>
             </a:pPr>
-            <a:endParaRPr lang="en-US" sz="1000" b="0" u="none" strike="noStrike">
-              <a:solidFill>
-                <a:srgbClr val="000000"/>
-              </a:solidFill>
-              <a:effectLst/>
-              <a:uFillTx/>
-              <a:latin typeface="Arial"/>
-            </a:endParaRPr>
-          </a:p>
-          <a:p>
-            <a:pPr>
-              <a:lnSpc>
-                <a:spcPct val="100000"/>
-              </a:lnSpc>
-              <a:spcBef>
-                <a:spcPts val="1191"/>
-              </a:spcBef>
-              <a:spcAft>
-                <a:spcPts val="992"/>
-              </a:spcAft>
-            </a:pPr>
             <a:endParaRPr lang="en-US" sz="2000" b="0" u="none" strike="noStrike">
               <a:solidFill>
                 <a:srgbClr val="000000"/>
@@ -7388,843 +6664,6 @@
           </a:p>
         </p:txBody>
       </p:sp>
-      <p:graphicFrame>
-        <p:nvGraphicFramePr>
-          <p:cNvPr id="101" name=""/>
-          <p:cNvGraphicFramePr/>
-          <p:nvPr/>
-        </p:nvGraphicFramePr>
-        <p:xfrm>
-          <a:off x="1626840" y="1883520"/>
-          <a:ext cx="5846760" cy="4822920"/>
-        </p:xfrm>
-        <a:graphic>
-          <a:graphicData uri="http://schemas.openxmlformats.org/drawingml/2006/table">
-            <a:tbl>
-              <a:tblPr/>
-              <a:tblGrid>
-                <a:gridCol w="1770480"/>
-                <a:gridCol w="877680"/>
-                <a:gridCol w="3198960"/>
-              </a:tblGrid>
-              <a:tr h="272160">
-                <a:tc>
-                  <a:txBody>
-                    <a:bodyPr lIns="36000" rIns="36000" tIns="36000" bIns="36000" anchor="t">
-                      <a:noAutofit/>
-                    </a:bodyPr>
-                    <a:p>
-                      <a:pPr algn="ctr">
-                        <a:lnSpc>
-                          <a:spcPct val="100000"/>
-                        </a:lnSpc>
-                      </a:pPr>
-                      <a:r>
-                        <a:rPr lang="en-US" sz="1400" b="0" u="none" strike="noStrike">
-                          <a:solidFill>
-                            <a:srgbClr val="000000"/>
-                          </a:solidFill>
-                          <a:effectLst/>
-                          <a:uFillTx/>
-                          <a:latin typeface="Arial"/>
-                        </a:rPr>
-                        <a:t>SIZE</a:t>
-                      </a:r>
-                      <a:endParaRPr lang="en-US" sz="1400" b="0" u="none" strike="noStrike">
-                        <a:solidFill>
-                          <a:srgbClr val="000000"/>
-                        </a:solidFill>
-                        <a:effectLst/>
-                        <a:uFillTx/>
-                        <a:latin typeface="Arial"/>
-                      </a:endParaRPr>
-                    </a:p>
-                  </a:txBody>
-                  <a:tcPr anchor="t" marL="36000" marR="36000" marT="36000" marB="36000">
-                    <a:lnL w="7200">
-                      <a:solidFill>
-                        <a:srgbClr val="000000"/>
-                      </a:solidFill>
-                      <a:prstDash val="solid"/>
-                    </a:lnL>
-                    <a:lnR w="7200">
-                      <a:solidFill>
-                        <a:srgbClr val="000000"/>
-                      </a:solidFill>
-                      <a:prstDash val="solid"/>
-                    </a:lnR>
-                    <a:lnT w="7200">
-                      <a:solidFill>
-                        <a:srgbClr val="000000"/>
-                      </a:solidFill>
-                      <a:prstDash val="solid"/>
-                    </a:lnT>
-                    <a:lnB w="7200">
-                      <a:solidFill>
-                        <a:srgbClr val="000000"/>
-                      </a:solidFill>
-                      <a:prstDash val="solid"/>
-                    </a:lnB>
-                    <a:noFill/>
-                  </a:tcPr>
-                </a:tc>
-                <a:tc>
-                  <a:txBody>
-                    <a:bodyPr lIns="36000" rIns="36000" tIns="36000" bIns="36000" anchor="t">
-                      <a:noAutofit/>
-                    </a:bodyPr>
-                    <a:p>
-                      <a:pPr algn="ctr">
-                        <a:lnSpc>
-                          <a:spcPct val="100000"/>
-                        </a:lnSpc>
-                      </a:pPr>
-                      <a:r>
-                        <a:rPr lang="en-US" sz="1400" b="0" u="none" strike="noStrike">
-                          <a:solidFill>
-                            <a:srgbClr val="000000"/>
-                          </a:solidFill>
-                          <a:effectLst/>
-                          <a:uFillTx/>
-                          <a:latin typeface="Arial"/>
-                        </a:rPr>
-                        <a:t>VALUE</a:t>
-                      </a:r>
-                      <a:endParaRPr lang="en-US" sz="1400" b="0" u="none" strike="noStrike">
-                        <a:solidFill>
-                          <a:srgbClr val="000000"/>
-                        </a:solidFill>
-                        <a:effectLst/>
-                        <a:uFillTx/>
-                        <a:latin typeface="Arial"/>
-                      </a:endParaRPr>
-                    </a:p>
-                  </a:txBody>
-                  <a:tcPr anchor="t" marL="36000" marR="36000" marT="36000" marB="36000">
-                    <a:lnL w="7200">
-                      <a:solidFill>
-                        <a:srgbClr val="000000"/>
-                      </a:solidFill>
-                      <a:prstDash val="solid"/>
-                    </a:lnL>
-                    <a:lnR w="7200">
-                      <a:solidFill>
-                        <a:srgbClr val="000000"/>
-                      </a:solidFill>
-                      <a:prstDash val="solid"/>
-                    </a:lnR>
-                    <a:lnT w="7200">
-                      <a:solidFill>
-                        <a:srgbClr val="000000"/>
-                      </a:solidFill>
-                      <a:prstDash val="solid"/>
-                    </a:lnT>
-                    <a:lnB w="7200">
-                      <a:solidFill>
-                        <a:srgbClr val="000000"/>
-                      </a:solidFill>
-                      <a:prstDash val="solid"/>
-                    </a:lnB>
-                    <a:noFill/>
-                  </a:tcPr>
-                </a:tc>
-                <a:tc>
-                  <a:txBody>
-                    <a:bodyPr lIns="36000" rIns="36000" tIns="36000" bIns="36000" anchor="t">
-                      <a:noAutofit/>
-                    </a:bodyPr>
-                    <a:p>
-                      <a:pPr algn="ctr">
-                        <a:lnSpc>
-                          <a:spcPct val="100000"/>
-                        </a:lnSpc>
-                      </a:pPr>
-                      <a:r>
-                        <a:rPr lang="en-US" sz="1400" b="0" u="none" strike="noStrike">
-                          <a:solidFill>
-                            <a:srgbClr val="000000"/>
-                          </a:solidFill>
-                          <a:effectLst/>
-                          <a:uFillTx/>
-                          <a:latin typeface="Arial"/>
-                        </a:rPr>
-                        <a:t>DESCRIPTION</a:t>
-                      </a:r>
-                      <a:endParaRPr lang="en-US" sz="1400" b="0" u="none" strike="noStrike">
-                        <a:solidFill>
-                          <a:srgbClr val="000000"/>
-                        </a:solidFill>
-                        <a:effectLst/>
-                        <a:uFillTx/>
-                        <a:latin typeface="Arial"/>
-                      </a:endParaRPr>
-                    </a:p>
-                  </a:txBody>
-                  <a:tcPr anchor="t" marL="36000" marR="36000" marT="36000" marB="36000">
-                    <a:lnL w="7200">
-                      <a:solidFill>
-                        <a:srgbClr val="000000"/>
-                      </a:solidFill>
-                      <a:prstDash val="solid"/>
-                    </a:lnL>
-                    <a:lnR w="7200">
-                      <a:solidFill>
-                        <a:srgbClr val="000000"/>
-                      </a:solidFill>
-                      <a:prstDash val="solid"/>
-                    </a:lnR>
-                    <a:lnT w="7200">
-                      <a:solidFill>
-                        <a:srgbClr val="000000"/>
-                      </a:solidFill>
-                      <a:prstDash val="solid"/>
-                    </a:lnT>
-                    <a:lnB w="7200">
-                      <a:solidFill>
-                        <a:srgbClr val="000000"/>
-                      </a:solidFill>
-                      <a:prstDash val="solid"/>
-                    </a:lnB>
-                    <a:noFill/>
-                  </a:tcPr>
-                </a:tc>
-              </a:tr>
-              <a:tr h="2270160">
-                <a:tc>
-                  <a:txBody>
-                    <a:bodyPr lIns="36000" rIns="36000" tIns="36000" bIns="36000" anchor="t">
-                      <a:noAutofit/>
-                    </a:bodyPr>
-                    <a:p>
-                      <a:pPr algn="ctr">
-                        <a:lnSpc>
-                          <a:spcPct val="100000"/>
-                        </a:lnSpc>
-                      </a:pPr>
-                      <a:r>
-                        <a:rPr lang="en-US" sz="1400" b="0" u="none" strike="noStrike">
-                          <a:solidFill>
-                            <a:srgbClr val="000000"/>
-                          </a:solidFill>
-                          <a:effectLst/>
-                          <a:uFillTx/>
-                          <a:latin typeface="Arial"/>
-                        </a:rPr>
-                        <a:t>BIG </a:t>
-                      </a:r>
-                      <a:endParaRPr lang="en-US" sz="1400" b="0" u="none" strike="noStrike">
-                        <a:solidFill>
-                          <a:srgbClr val="000000"/>
-                        </a:solidFill>
-                        <a:effectLst/>
-                        <a:uFillTx/>
-                        <a:latin typeface="Arial"/>
-                      </a:endParaRPr>
-                    </a:p>
-                  </a:txBody>
-                  <a:tcPr anchor="t" marL="36000" marR="36000" marT="36000" marB="36000">
-                    <a:lnL w="7200">
-                      <a:solidFill>
-                        <a:srgbClr val="000000"/>
-                      </a:solidFill>
-                      <a:prstDash val="solid"/>
-                    </a:lnL>
-                    <a:lnR w="7200">
-                      <a:solidFill>
-                        <a:srgbClr val="000000"/>
-                      </a:solidFill>
-                      <a:prstDash val="solid"/>
-                    </a:lnR>
-                    <a:lnT w="7200">
-                      <a:solidFill>
-                        <a:srgbClr val="000000"/>
-                      </a:solidFill>
-                      <a:prstDash val="solid"/>
-                    </a:lnT>
-                    <a:lnB w="7200">
-                      <a:solidFill>
-                        <a:srgbClr val="000000"/>
-                      </a:solidFill>
-                      <a:prstDash val="solid"/>
-                    </a:lnB>
-                    <a:noFill/>
-                  </a:tcPr>
-                </a:tc>
-                <a:tc>
-                  <a:txBody>
-                    <a:bodyPr lIns="36000" rIns="36000" tIns="36000" bIns="36000" anchor="t">
-                      <a:noAutofit/>
-                    </a:bodyPr>
-                    <a:p>
-                      <a:pPr algn="ctr">
-                        <a:lnSpc>
-                          <a:spcPct val="100000"/>
-                        </a:lnSpc>
-                      </a:pPr>
-                      <a:r>
-                        <a:rPr lang="en-US" sz="1400" b="0" u="none" strike="noStrike">
-                          <a:solidFill>
-                            <a:srgbClr val="000000"/>
-                          </a:solidFill>
-                          <a:effectLst/>
-                          <a:uFillTx/>
-                          <a:latin typeface="Arial"/>
-                        </a:rPr>
-                        <a:t>&gt;0.20</a:t>
-                      </a:r>
-                      <a:endParaRPr lang="en-US" sz="1400" b="0" u="none" strike="noStrike">
-                        <a:solidFill>
-                          <a:srgbClr val="000000"/>
-                        </a:solidFill>
-                        <a:effectLst/>
-                        <a:uFillTx/>
-                        <a:latin typeface="Arial"/>
-                      </a:endParaRPr>
-                    </a:p>
-                  </a:txBody>
-                  <a:tcPr anchor="t" marL="36000" marR="36000" marT="36000" marB="36000">
-                    <a:lnL w="7200">
-                      <a:solidFill>
-                        <a:srgbClr val="000000"/>
-                      </a:solidFill>
-                      <a:prstDash val="solid"/>
-                    </a:lnL>
-                    <a:lnR w="7200">
-                      <a:solidFill>
-                        <a:srgbClr val="000000"/>
-                      </a:solidFill>
-                      <a:prstDash val="solid"/>
-                    </a:lnR>
-                    <a:lnT w="7200">
-                      <a:solidFill>
-                        <a:srgbClr val="000000"/>
-                      </a:solidFill>
-                      <a:prstDash val="solid"/>
-                    </a:lnT>
-                    <a:lnB w="7200">
-                      <a:solidFill>
-                        <a:srgbClr val="000000"/>
-                      </a:solidFill>
-                      <a:prstDash val="solid"/>
-                    </a:lnB>
-                    <a:noFill/>
-                  </a:tcPr>
-                </a:tc>
-                <a:tc>
-                  <a:txBody>
-                    <a:bodyPr lIns="36000" rIns="36000" tIns="36000" bIns="36000" anchor="t">
-                      <a:noAutofit/>
-                    </a:bodyPr>
-                    <a:p>
-                      <a:pPr>
-                        <a:lnSpc>
-                          <a:spcPct val="100000"/>
-                        </a:lnSpc>
-                      </a:pPr>
-                      <a:r>
-                        <a:rPr lang="en-US" sz="1800" b="0" u="none" strike="noStrike">
-                          <a:solidFill>
-                            <a:srgbClr val="000000"/>
-                          </a:solidFill>
-                          <a:effectLst/>
-                          <a:uFillTx/>
-                          <a:latin typeface="Arial"/>
-                        </a:rPr>
-                        <a:t>-Dim neurites kept.</a:t>
-                      </a:r>
-                      <a:endParaRPr lang="en-US" sz="1800" b="0" u="none" strike="noStrike">
-                        <a:solidFill>
-                          <a:srgbClr val="000000"/>
-                        </a:solidFill>
-                        <a:effectLst/>
-                        <a:uFillTx/>
-                        <a:latin typeface="Arial"/>
-                      </a:endParaRPr>
-                    </a:p>
-                    <a:p>
-                      <a:pPr>
-                        <a:lnSpc>
-                          <a:spcPct val="100000"/>
-                        </a:lnSpc>
-                      </a:pPr>
-                      <a:r>
-                        <a:rPr lang="en-US" sz="1800" b="0" u="none" strike="noStrike">
-                          <a:solidFill>
-                            <a:srgbClr val="000000"/>
-                          </a:solidFill>
-                          <a:effectLst/>
-                          <a:uFillTx/>
-                          <a:latin typeface="Arial"/>
-                        </a:rPr>
-                        <a:t>-Fewer gaps</a:t>
-                      </a:r>
-                      <a:endParaRPr lang="en-US" sz="1800" b="0" u="none" strike="noStrike">
-                        <a:solidFill>
-                          <a:srgbClr val="000000"/>
-                        </a:solidFill>
-                        <a:effectLst/>
-                        <a:uFillTx/>
-                        <a:latin typeface="Arial"/>
-                      </a:endParaRPr>
-                    </a:p>
-                    <a:p>
-                      <a:pPr>
-                        <a:lnSpc>
-                          <a:spcPct val="100000"/>
-                        </a:lnSpc>
-                      </a:pPr>
-                      <a:r>
-                        <a:rPr lang="en-US" sz="1800" b="0" u="none" strike="noStrike">
-                          <a:solidFill>
-                            <a:srgbClr val="ff0000"/>
-                          </a:solidFill>
-                          <a:effectLst/>
-                          <a:uFillTx/>
-                          <a:latin typeface="Arial"/>
-                        </a:rPr>
-                        <a:t>-More noise included</a:t>
-                      </a:r>
-                      <a:endParaRPr lang="en-US" sz="1800" b="0" u="none" strike="noStrike">
-                        <a:solidFill>
-                          <a:srgbClr val="000000"/>
-                        </a:solidFill>
-                        <a:effectLst/>
-                        <a:uFillTx/>
-                        <a:latin typeface="Arial"/>
-                      </a:endParaRPr>
-                    </a:p>
-                    <a:p>
-                      <a:pPr>
-                        <a:lnSpc>
-                          <a:spcPct val="100000"/>
-                        </a:lnSpc>
-                      </a:pPr>
-                      <a:endParaRPr lang="en-US" sz="1800" b="0" u="none" strike="noStrike">
-                        <a:solidFill>
-                          <a:srgbClr val="000000"/>
-                        </a:solidFill>
-                        <a:effectLst/>
-                        <a:uFillTx/>
-                        <a:latin typeface="Arial"/>
-                      </a:endParaRPr>
-                    </a:p>
-                    <a:p>
-                      <a:pPr>
-                        <a:lnSpc>
-                          <a:spcPct val="100000"/>
-                        </a:lnSpc>
-                      </a:pPr>
-                      <a:r>
-                        <a:rPr lang="en-US" sz="1800" b="0" u="none" strike="noStrike">
-                          <a:solidFill>
-                            <a:srgbClr val="000000"/>
-                          </a:solidFill>
-                          <a:effectLst/>
-                          <a:uFillTx/>
-                          <a:latin typeface="Arial"/>
-                        </a:rPr>
-                        <a:t>In simply words:</a:t>
-                      </a:r>
-                      <a:endParaRPr lang="en-US" sz="1800" b="0" u="none" strike="noStrike">
-                        <a:solidFill>
-                          <a:srgbClr val="000000"/>
-                        </a:solidFill>
-                        <a:effectLst/>
-                        <a:uFillTx/>
-                        <a:latin typeface="Arial"/>
-                      </a:endParaRPr>
-                    </a:p>
-                    <a:p>
-                      <a:pPr>
-                        <a:lnSpc>
-                          <a:spcPct val="100000"/>
-                        </a:lnSpc>
-                      </a:pPr>
-                      <a:r>
-                        <a:rPr lang="en-US" sz="1800" b="0" u="none" strike="noStrike">
-                          <a:solidFill>
-                            <a:srgbClr val="000000"/>
-                          </a:solidFill>
-                          <a:effectLst/>
-                          <a:uFillTx/>
-                          <a:latin typeface="Arial"/>
-                        </a:rPr>
-                        <a:t>“Even slightly bright pixels are allowed.”</a:t>
-                      </a:r>
-                      <a:endParaRPr lang="en-US" sz="1800" b="0" u="none" strike="noStrike">
-                        <a:solidFill>
-                          <a:srgbClr val="000000"/>
-                        </a:solidFill>
-                        <a:effectLst/>
-                        <a:uFillTx/>
-                        <a:latin typeface="Arial"/>
-                      </a:endParaRPr>
-                    </a:p>
-                    <a:p>
-                      <a:pPr>
-                        <a:lnSpc>
-                          <a:spcPct val="100000"/>
-                        </a:lnSpc>
-                      </a:pPr>
-                      <a:endParaRPr lang="en-US" sz="1800" b="0" u="none" strike="noStrike">
-                        <a:solidFill>
-                          <a:srgbClr val="000000"/>
-                        </a:solidFill>
-                        <a:effectLst/>
-                        <a:uFillTx/>
-                        <a:latin typeface="Arial"/>
-                      </a:endParaRPr>
-                    </a:p>
-                  </a:txBody>
-                  <a:tcPr anchor="t" marL="36000" marR="36000" marT="36000" marB="36000">
-                    <a:lnL w="7200">
-                      <a:solidFill>
-                        <a:srgbClr val="000000"/>
-                      </a:solidFill>
-                      <a:prstDash val="solid"/>
-                    </a:lnL>
-                    <a:lnR w="7200">
-                      <a:solidFill>
-                        <a:srgbClr val="000000"/>
-                      </a:solidFill>
-                      <a:prstDash val="solid"/>
-                    </a:lnR>
-                    <a:lnT w="7200">
-                      <a:solidFill>
-                        <a:srgbClr val="000000"/>
-                      </a:solidFill>
-                      <a:prstDash val="solid"/>
-                    </a:lnT>
-                    <a:lnB w="7200">
-                      <a:solidFill>
-                        <a:srgbClr val="000000"/>
-                      </a:solidFill>
-                      <a:prstDash val="solid"/>
-                    </a:lnB>
-                    <a:noFill/>
-                  </a:tcPr>
-                </a:tc>
-              </a:tr>
-              <a:tr h="1870560">
-                <a:tc>
-                  <a:txBody>
-                    <a:bodyPr lIns="36000" rIns="36000" tIns="36000" bIns="36000" anchor="t">
-                      <a:noAutofit/>
-                    </a:bodyPr>
-                    <a:p>
-                      <a:pPr algn="ctr">
-                        <a:lnSpc>
-                          <a:spcPct val="100000"/>
-                        </a:lnSpc>
-                      </a:pPr>
-                      <a:r>
-                        <a:rPr lang="en-US" sz="1400" b="0" u="none" strike="noStrike">
-                          <a:solidFill>
-                            <a:srgbClr val="000000"/>
-                          </a:solidFill>
-                          <a:effectLst/>
-                          <a:uFillTx/>
-                          <a:latin typeface="Arial"/>
-                        </a:rPr>
-                        <a:t>SMALL</a:t>
-                      </a:r>
-                      <a:endParaRPr lang="en-US" sz="1400" b="0" u="none" strike="noStrike">
-                        <a:solidFill>
-                          <a:srgbClr val="000000"/>
-                        </a:solidFill>
-                        <a:effectLst/>
-                        <a:uFillTx/>
-                        <a:latin typeface="Arial"/>
-                      </a:endParaRPr>
-                    </a:p>
-                  </a:txBody>
-                  <a:tcPr anchor="t" marL="36000" marR="36000" marT="36000" marB="36000">
-                    <a:lnL w="7200">
-                      <a:solidFill>
-                        <a:srgbClr val="000000"/>
-                      </a:solidFill>
-                      <a:prstDash val="solid"/>
-                    </a:lnL>
-                    <a:lnR w="7200">
-                      <a:solidFill>
-                        <a:srgbClr val="000000"/>
-                      </a:solidFill>
-                      <a:prstDash val="solid"/>
-                    </a:lnR>
-                    <a:lnT w="7200">
-                      <a:solidFill>
-                        <a:srgbClr val="000000"/>
-                      </a:solidFill>
-                      <a:prstDash val="solid"/>
-                    </a:lnT>
-                    <a:lnB w="7200">
-                      <a:solidFill>
-                        <a:srgbClr val="000000"/>
-                      </a:solidFill>
-                      <a:prstDash val="solid"/>
-                    </a:lnB>
-                    <a:noFill/>
-                  </a:tcPr>
-                </a:tc>
-                <a:tc>
-                  <a:txBody>
-                    <a:bodyPr lIns="36000" rIns="36000" tIns="36000" bIns="36000" anchor="t">
-                      <a:noAutofit/>
-                    </a:bodyPr>
-                    <a:p>
-                      <a:pPr algn="ctr">
-                        <a:lnSpc>
-                          <a:spcPct val="100000"/>
-                        </a:lnSpc>
-                      </a:pPr>
-                      <a:r>
-                        <a:rPr lang="en-US" sz="1400" b="0" u="none" strike="noStrike">
-                          <a:solidFill>
-                            <a:srgbClr val="000000"/>
-                          </a:solidFill>
-                          <a:effectLst/>
-                          <a:uFillTx/>
-                          <a:latin typeface="Arial"/>
-                        </a:rPr>
-                        <a:t>&lt;0.10 </a:t>
-                      </a:r>
-                      <a:endParaRPr lang="en-US" sz="1400" b="0" u="none" strike="noStrike">
-                        <a:solidFill>
-                          <a:srgbClr val="000000"/>
-                        </a:solidFill>
-                        <a:effectLst/>
-                        <a:uFillTx/>
-                        <a:latin typeface="Arial"/>
-                      </a:endParaRPr>
-                    </a:p>
-                  </a:txBody>
-                  <a:tcPr anchor="t" marL="36000" marR="36000" marT="36000" marB="36000">
-                    <a:lnL w="7200">
-                      <a:solidFill>
-                        <a:srgbClr val="000000"/>
-                      </a:solidFill>
-                      <a:prstDash val="solid"/>
-                    </a:lnL>
-                    <a:lnR w="7200">
-                      <a:solidFill>
-                        <a:srgbClr val="000000"/>
-                      </a:solidFill>
-                      <a:prstDash val="solid"/>
-                    </a:lnR>
-                    <a:lnT w="7200">
-                      <a:solidFill>
-                        <a:srgbClr val="000000"/>
-                      </a:solidFill>
-                      <a:prstDash val="solid"/>
-                    </a:lnT>
-                    <a:lnB w="7200">
-                      <a:solidFill>
-                        <a:srgbClr val="000000"/>
-                      </a:solidFill>
-                      <a:prstDash val="solid"/>
-                    </a:lnB>
-                    <a:noFill/>
-                  </a:tcPr>
-                </a:tc>
-                <a:tc>
-                  <a:txBody>
-                    <a:bodyPr lIns="36000" rIns="36000" tIns="36000" bIns="36000" anchor="t">
-                      <a:noAutofit/>
-                    </a:bodyPr>
-                    <a:p>
-                      <a:pPr>
-                        <a:lnSpc>
-                          <a:spcPct val="100000"/>
-                        </a:lnSpc>
-                      </a:pPr>
-                      <a:r>
-                        <a:rPr lang="en-US" sz="1800" b="0" u="none" strike="noStrike">
-                          <a:solidFill>
-                            <a:srgbClr val="000000"/>
-                          </a:solidFill>
-                          <a:effectLst/>
-                          <a:uFillTx/>
-                          <a:latin typeface="Arial"/>
-                        </a:rPr>
-                        <a:t>-Strict</a:t>
-                      </a:r>
-                      <a:endParaRPr lang="en-US" sz="1800" b="0" u="none" strike="noStrike">
-                        <a:solidFill>
-                          <a:srgbClr val="000000"/>
-                        </a:solidFill>
-                        <a:effectLst/>
-                        <a:uFillTx/>
-                        <a:latin typeface="Arial"/>
-                      </a:endParaRPr>
-                    </a:p>
-                    <a:p>
-                      <a:pPr>
-                        <a:lnSpc>
-                          <a:spcPct val="100000"/>
-                        </a:lnSpc>
-                      </a:pPr>
-                      <a:r>
-                        <a:rPr lang="en-US" sz="1800" b="0" u="none" strike="noStrike">
-                          <a:solidFill>
-                            <a:srgbClr val="000000"/>
-                          </a:solidFill>
-                          <a:effectLst/>
-                          <a:uFillTx/>
-                          <a:latin typeface="Arial"/>
-                        </a:rPr>
-                        <a:t>-Only bright neurites kept</a:t>
-                      </a:r>
-                      <a:endParaRPr lang="en-US" sz="1800" b="0" u="none" strike="noStrike">
-                        <a:solidFill>
-                          <a:srgbClr val="000000"/>
-                        </a:solidFill>
-                        <a:effectLst/>
-                        <a:uFillTx/>
-                        <a:latin typeface="Arial"/>
-                      </a:endParaRPr>
-                    </a:p>
-                    <a:p>
-                      <a:pPr>
-                        <a:lnSpc>
-                          <a:spcPct val="100000"/>
-                        </a:lnSpc>
-                      </a:pPr>
-                      <a:r>
-                        <a:rPr lang="en-US" sz="1800" b="0" u="none" strike="noStrike">
-                          <a:solidFill>
-                            <a:srgbClr val="ff0000"/>
-                          </a:solidFill>
-                          <a:effectLst/>
-                          <a:uFillTx/>
-                          <a:latin typeface="Arial"/>
-                        </a:rPr>
-                        <a:t>-Dim neurites may disappear</a:t>
-                      </a:r>
-                      <a:endParaRPr lang="en-US" sz="1800" b="0" u="none" strike="noStrike">
-                        <a:solidFill>
-                          <a:srgbClr val="000000"/>
-                        </a:solidFill>
-                        <a:effectLst/>
-                        <a:uFillTx/>
-                        <a:latin typeface="Arial"/>
-                      </a:endParaRPr>
-                    </a:p>
-                    <a:p>
-                      <a:pPr>
-                        <a:lnSpc>
-                          <a:spcPct val="100000"/>
-                        </a:lnSpc>
-                      </a:pPr>
-                      <a:endParaRPr lang="en-US" sz="1800" b="0" u="none" strike="noStrike">
-                        <a:solidFill>
-                          <a:srgbClr val="000000"/>
-                        </a:solidFill>
-                        <a:effectLst/>
-                        <a:uFillTx/>
-                        <a:latin typeface="Arial"/>
-                      </a:endParaRPr>
-                    </a:p>
-                    <a:p>
-                      <a:pPr>
-                        <a:lnSpc>
-                          <a:spcPct val="100000"/>
-                        </a:lnSpc>
-                      </a:pPr>
-                      <a:r>
-                        <a:rPr lang="en-US" sz="1800" b="0" u="none" strike="noStrike">
-                          <a:solidFill>
-                            <a:srgbClr val="000000"/>
-                          </a:solidFill>
-                          <a:effectLst/>
-                          <a:uFillTx/>
-                          <a:latin typeface="Arial"/>
-                        </a:rPr>
-                        <a:t>In simply words:</a:t>
-                      </a:r>
-                      <a:endParaRPr lang="en-US" sz="1800" b="0" u="none" strike="noStrike">
-                        <a:solidFill>
-                          <a:srgbClr val="000000"/>
-                        </a:solidFill>
-                        <a:effectLst/>
-                        <a:uFillTx/>
-                        <a:latin typeface="Arial"/>
-                      </a:endParaRPr>
-                    </a:p>
-                    <a:p>
-                      <a:pPr>
-                        <a:lnSpc>
-                          <a:spcPct val="100000"/>
-                        </a:lnSpc>
-                      </a:pPr>
-                      <a:r>
-                        <a:rPr lang="en-US" sz="1800" b="0" u="none" strike="noStrike">
-                          <a:solidFill>
-                            <a:srgbClr val="000000"/>
-                          </a:solidFill>
-                          <a:effectLst/>
-                          <a:uFillTx/>
-                          <a:latin typeface="Arial"/>
-                        </a:rPr>
-                        <a:t>“Only clearly bright pixels count.”</a:t>
-                      </a:r>
-                      <a:endParaRPr lang="en-US" sz="1800" b="0" u="none" strike="noStrike">
-                        <a:solidFill>
-                          <a:srgbClr val="000000"/>
-                        </a:solidFill>
-                        <a:effectLst/>
-                        <a:uFillTx/>
-                        <a:latin typeface="Arial"/>
-                      </a:endParaRPr>
-                    </a:p>
-                    <a:p>
-                      <a:pPr>
-                        <a:lnSpc>
-                          <a:spcPct val="100000"/>
-                        </a:lnSpc>
-                      </a:pPr>
-                      <a:endParaRPr lang="en-US" sz="1800" b="0" u="none" strike="noStrike">
-                        <a:solidFill>
-                          <a:srgbClr val="000000"/>
-                        </a:solidFill>
-                        <a:effectLst/>
-                        <a:uFillTx/>
-                        <a:latin typeface="Arial"/>
-                      </a:endParaRPr>
-                    </a:p>
-                  </a:txBody>
-                  <a:tcPr anchor="t" marL="36000" marR="36000" marT="36000" marB="36000">
-                    <a:lnL w="7200">
-                      <a:solidFill>
-                        <a:srgbClr val="000000"/>
-                      </a:solidFill>
-                      <a:prstDash val="solid"/>
-                    </a:lnL>
-                    <a:lnR w="7200">
-                      <a:solidFill>
-                        <a:srgbClr val="000000"/>
-                      </a:solidFill>
-                      <a:prstDash val="solid"/>
-                    </a:lnR>
-                    <a:lnT w="7200">
-                      <a:solidFill>
-                        <a:srgbClr val="000000"/>
-                      </a:solidFill>
-                      <a:prstDash val="solid"/>
-                    </a:lnT>
-                    <a:lnB w="7200">
-                      <a:solidFill>
-                        <a:srgbClr val="000000"/>
-                      </a:solidFill>
-                      <a:prstDash val="solid"/>
-                    </a:lnB>
-                    <a:noFill/>
-                  </a:tcPr>
-                </a:tc>
-              </a:tr>
-            </a:tbl>
-          </a:graphicData>
-        </a:graphic>
-      </p:graphicFrame>
     </p:spTree>
   </p:cSld>
   <mc:AlternateContent>
@@ -8257,7 +6696,7 @@
       </p:grpSpPr>
       <p:sp>
         <p:nvSpPr>
-          <p:cNvPr id="102" name="PlaceHolder 1"/>
+          <p:cNvPr id="101" name="PlaceHolder 1"/>
           <p:cNvSpPr>
             <a:spLocks noGrp="1"/>
           </p:cNvSpPr>
@@ -8267,8 +6706,8 @@
         </p:nvSpPr>
         <p:spPr>
           <a:xfrm>
-            <a:off x="609480" y="-4320"/>
-            <a:ext cx="10962000" cy="585360"/>
+            <a:off x="609480" y="137880"/>
+            <a:ext cx="2586240" cy="677520"/>
           </a:xfrm>
           <a:prstGeom prst="rect">
             <a:avLst/>
@@ -8283,7 +6722,7 @@
             <a:spAutoFit/>
           </a:bodyPr>
           <a:p>
-            <a:pPr indent="0">
+            <a:pPr indent="0" algn="ctr">
               <a:lnSpc>
                 <a:spcPct val="100000"/>
               </a:lnSpc>
@@ -8293,7 +6732,7 @@
               </a:tabLst>
             </a:pPr>
             <a:r>
-              <a:rPr lang="en-US" sz="3200" b="1" u="none" strike="noStrike">
+              <a:rPr lang="en-US" sz="4400" b="1" u="none" strike="noStrike">
                 <a:solidFill>
                   <a:srgbClr val="ff0000"/>
                 </a:solidFill>
@@ -8301,9 +6740,9 @@
                 <a:uFillTx/>
                 <a:latin typeface="Arial"/>
               </a:rPr>
-              <a:t>Threshold block size and Threshold offset std multiplier</a:t>
-            </a:r>
-            <a:endParaRPr lang="en-US" sz="3200" b="0" u="none" strike="noStrike">
+              <a:t>Interface</a:t>
+            </a:r>
+            <a:endParaRPr lang="en-US" sz="4400" b="0" u="none" strike="noStrike">
               <a:solidFill>
                 <a:srgbClr val="000000"/>
               </a:solidFill>
@@ -8314,16 +6753,20 @@
           </a:p>
         </p:txBody>
       </p:sp>
-      <p:sp>
-        <p:nvSpPr>
-          <p:cNvPr id="103" name=""/>
-          <p:cNvSpPr/>
+      <p:pic>
+        <p:nvPicPr>
+          <p:cNvPr id="102" name=""/>
+          <p:cNvPicPr/>
           <p:nvPr/>
-        </p:nvSpPr>
+        </p:nvPicPr>
+        <p:blipFill>
+          <a:blip r:embed="rId1"/>
+          <a:stretch/>
+        </p:blipFill>
         <p:spPr>
           <a:xfrm>
-            <a:off x="228600" y="685800"/>
-            <a:ext cx="11652120" cy="2753280"/>
+            <a:off x="324000" y="904680"/>
+            <a:ext cx="3593880" cy="5724720"/>
           </a:xfrm>
           <a:prstGeom prst="rect">
             <a:avLst/>
@@ -8333,531 +6776,17 @@
             <a:noFill/>
           </a:ln>
         </p:spPr>
-        <p:style>
-          <a:lnRef idx="0"/>
-          <a:fillRef idx="0"/>
-          <a:effectRef idx="0"/>
-          <a:fontRef idx="minor"/>
-        </p:style>
-        <p:txBody>
-          <a:bodyPr lIns="90000" rIns="90000" tIns="45000" bIns="45000" anchor="t">
-            <a:spAutoFit/>
-          </a:bodyPr>
-          <a:p>
-            <a:pPr>
-              <a:lnSpc>
-                <a:spcPct val="100000"/>
-              </a:lnSpc>
-            </a:pPr>
-            <a:r>
-              <a:rPr lang="en-US" sz="2200" b="1" u="none" strike="noStrike">
-                <a:solidFill>
-                  <a:srgbClr val="158466"/>
-                </a:solidFill>
-                <a:effectLst/>
-                <a:uFillTx/>
-                <a:latin typeface="Arial"/>
-                <a:ea typeface="SimSun"/>
-              </a:rPr>
-              <a:t>Comparison</a:t>
-            </a:r>
-            <a:endParaRPr lang="en-US" sz="2200" b="0" u="none" strike="noStrike">
-              <a:solidFill>
-                <a:srgbClr val="000000"/>
-              </a:solidFill>
-              <a:effectLst/>
-              <a:uFillTx/>
-              <a:latin typeface="Arial"/>
-            </a:endParaRPr>
-          </a:p>
-          <a:p>
-            <a:pPr>
-              <a:lnSpc>
-                <a:spcPct val="100000"/>
-              </a:lnSpc>
-              <a:spcBef>
-                <a:spcPts val="1191"/>
-              </a:spcBef>
-              <a:spcAft>
-                <a:spcPts val="992"/>
-              </a:spcAft>
-            </a:pPr>
-            <a:endParaRPr lang="en-US" sz="2200" b="0" u="none" strike="noStrike">
-              <a:solidFill>
-                <a:srgbClr val="000000"/>
-              </a:solidFill>
-              <a:effectLst/>
-              <a:uFillTx/>
-              <a:latin typeface="Arial"/>
-            </a:endParaRPr>
-          </a:p>
-          <a:p>
-            <a:pPr>
-              <a:lnSpc>
-                <a:spcPct val="100000"/>
-              </a:lnSpc>
-              <a:spcBef>
-                <a:spcPts val="1191"/>
-              </a:spcBef>
-              <a:spcAft>
-                <a:spcPts val="992"/>
-              </a:spcAft>
-            </a:pPr>
-            <a:endParaRPr lang="en-US" sz="1800" b="0" u="none" strike="noStrike">
-              <a:solidFill>
-                <a:srgbClr val="000000"/>
-              </a:solidFill>
-              <a:effectLst/>
-              <a:uFillTx/>
-              <a:latin typeface="Arial"/>
-            </a:endParaRPr>
-          </a:p>
-          <a:p>
-            <a:pPr>
-              <a:lnSpc>
-                <a:spcPct val="100000"/>
-              </a:lnSpc>
-              <a:spcBef>
-                <a:spcPts val="1191"/>
-              </a:spcBef>
-              <a:spcAft>
-                <a:spcPts val="992"/>
-              </a:spcAft>
-            </a:pPr>
-            <a:endParaRPr lang="en-US" sz="1000" b="0" u="none" strike="noStrike">
-              <a:solidFill>
-                <a:srgbClr val="000000"/>
-              </a:solidFill>
-              <a:effectLst/>
-              <a:uFillTx/>
-              <a:latin typeface="Arial"/>
-            </a:endParaRPr>
-          </a:p>
-          <a:p>
-            <a:pPr>
-              <a:lnSpc>
-                <a:spcPct val="100000"/>
-              </a:lnSpc>
-              <a:spcBef>
-                <a:spcPts val="1191"/>
-              </a:spcBef>
-              <a:spcAft>
-                <a:spcPts val="992"/>
-              </a:spcAft>
-            </a:pPr>
-            <a:endParaRPr lang="en-US" sz="2000" b="0" u="none" strike="noStrike">
-              <a:solidFill>
-                <a:srgbClr val="000000"/>
-              </a:solidFill>
-              <a:effectLst/>
-              <a:uFillTx/>
-              <a:latin typeface="Arial"/>
-            </a:endParaRPr>
-          </a:p>
-          <a:p>
-            <a:pPr>
-              <a:lnSpc>
-                <a:spcPct val="100000"/>
-              </a:lnSpc>
-            </a:pPr>
-            <a:endParaRPr lang="en-US" sz="1000" b="0" u="none" strike="noStrike">
-              <a:solidFill>
-                <a:srgbClr val="000000"/>
-              </a:solidFill>
-              <a:effectLst/>
-              <a:uFillTx/>
-              <a:latin typeface="Arial"/>
-            </a:endParaRPr>
-          </a:p>
-        </p:txBody>
-      </p:sp>
-      <p:graphicFrame>
-        <p:nvGraphicFramePr>
-          <p:cNvPr id="104" name=""/>
-          <p:cNvGraphicFramePr/>
-          <p:nvPr/>
-        </p:nvGraphicFramePr>
-        <p:xfrm>
-          <a:off x="2107080" y="713520"/>
-          <a:ext cx="6070680" cy="1040040"/>
-        </p:xfrm>
-        <a:graphic>
-          <a:graphicData uri="http://schemas.openxmlformats.org/drawingml/2006/table">
-            <a:tbl>
-              <a:tblPr/>
-              <a:tblGrid>
-                <a:gridCol w="2894760"/>
-                <a:gridCol w="3176280"/>
-              </a:tblGrid>
-              <a:tr h="0">
-                <a:tc>
-                  <a:txBody>
-                    <a:bodyPr lIns="36000" rIns="36000" tIns="36000" bIns="36000" anchor="t">
-                      <a:noAutofit/>
-                    </a:bodyPr>
-                    <a:p>
-                      <a:pPr>
-                        <a:lnSpc>
-                          <a:spcPct val="100000"/>
-                        </a:lnSpc>
-                      </a:pPr>
-                      <a:endParaRPr lang="en-US" sz="1800" b="0" u="none" strike="noStrike">
-                        <a:solidFill>
-                          <a:srgbClr val="000000"/>
-                        </a:solidFill>
-                        <a:effectLst/>
-                        <a:uFillTx/>
-                        <a:latin typeface="Arial"/>
-                      </a:endParaRPr>
-                    </a:p>
-                  </a:txBody>
-                  <a:tcPr anchor="t" marL="36000" marR="36000" marT="36000" marB="36000">
-                    <a:lnL w="7200">
-                      <a:solidFill>
-                        <a:srgbClr val="000000"/>
-                      </a:solidFill>
-                      <a:prstDash val="solid"/>
-                    </a:lnL>
-                    <a:lnR w="7200">
-                      <a:solidFill>
-                        <a:srgbClr val="000000"/>
-                      </a:solidFill>
-                      <a:prstDash val="solid"/>
-                    </a:lnR>
-                    <a:lnT w="7200">
-                      <a:solidFill>
-                        <a:srgbClr val="000000"/>
-                      </a:solidFill>
-                      <a:prstDash val="solid"/>
-                    </a:lnT>
-                    <a:lnB w="7200">
-                      <a:solidFill>
-                        <a:srgbClr val="000000"/>
-                      </a:solidFill>
-                      <a:prstDash val="solid"/>
-                    </a:lnB>
-                    <a:noFill/>
-                  </a:tcPr>
-                </a:tc>
-                <a:tc>
-                  <a:txBody>
-                    <a:bodyPr lIns="36000" rIns="36000" tIns="36000" bIns="36000" anchor="t">
-                      <a:noAutofit/>
-                    </a:bodyPr>
-                    <a:p>
-                      <a:pPr>
-                        <a:lnSpc>
-                          <a:spcPct val="100000"/>
-                        </a:lnSpc>
-                      </a:pPr>
-                      <a:r>
-                        <a:rPr lang="en-US" sz="1800" b="0" u="none" strike="noStrike">
-                          <a:solidFill>
-                            <a:srgbClr val="000000"/>
-                          </a:solidFill>
-                          <a:effectLst/>
-                          <a:uFillTx/>
-                          <a:latin typeface="Arial"/>
-                        </a:rPr>
-                        <a:t>What it controls </a:t>
-                      </a:r>
-                      <a:endParaRPr lang="en-US" sz="1800" b="0" u="none" strike="noStrike">
-                        <a:solidFill>
-                          <a:srgbClr val="000000"/>
-                        </a:solidFill>
-                        <a:effectLst/>
-                        <a:uFillTx/>
-                        <a:latin typeface="Arial"/>
-                      </a:endParaRPr>
-                    </a:p>
-                  </a:txBody>
-                  <a:tcPr anchor="t" marL="36000" marR="36000" marT="36000" marB="36000">
-                    <a:lnL w="7200">
-                      <a:solidFill>
-                        <a:srgbClr val="000000"/>
-                      </a:solidFill>
-                      <a:prstDash val="solid"/>
-                    </a:lnL>
-                    <a:lnR w="7200">
-                      <a:solidFill>
-                        <a:srgbClr val="000000"/>
-                      </a:solidFill>
-                      <a:prstDash val="solid"/>
-                    </a:lnR>
-                    <a:lnT w="7200">
-                      <a:solidFill>
-                        <a:srgbClr val="000000"/>
-                      </a:solidFill>
-                      <a:prstDash val="solid"/>
-                    </a:lnT>
-                    <a:lnB w="7200">
-                      <a:solidFill>
-                        <a:srgbClr val="000000"/>
-                      </a:solidFill>
-                      <a:prstDash val="solid"/>
-                    </a:lnB>
-                    <a:noFill/>
-                  </a:tcPr>
-                </a:tc>
-              </a:tr>
-              <a:tr h="0">
-                <a:tc>
-                  <a:txBody>
-                    <a:bodyPr lIns="36000" rIns="36000" tIns="36000" bIns="36000" anchor="t">
-                      <a:noAutofit/>
-                    </a:bodyPr>
-                    <a:p>
-                      <a:pPr>
-                        <a:lnSpc>
-                          <a:spcPct val="100000"/>
-                        </a:lnSpc>
-                      </a:pPr>
-                      <a:r>
-                        <a:rPr lang="en-US" sz="1800" b="0" u="none" strike="noStrike">
-                          <a:solidFill>
-                            <a:srgbClr val="000000"/>
-                          </a:solidFill>
-                          <a:effectLst/>
-                          <a:uFillTx/>
-                          <a:latin typeface="Arial"/>
-                        </a:rPr>
-                        <a:t>block_size </a:t>
-                      </a:r>
-                      <a:endParaRPr lang="en-US" sz="1800" b="0" u="none" strike="noStrike">
-                        <a:solidFill>
-                          <a:srgbClr val="000000"/>
-                        </a:solidFill>
-                        <a:effectLst/>
-                        <a:uFillTx/>
-                        <a:latin typeface="Arial"/>
-                      </a:endParaRPr>
-                    </a:p>
-                  </a:txBody>
-                  <a:tcPr anchor="t" marL="36000" marR="36000" marT="36000" marB="36000">
-                    <a:lnL w="7200">
-                      <a:solidFill>
-                        <a:srgbClr val="000000"/>
-                      </a:solidFill>
-                      <a:prstDash val="solid"/>
-                    </a:lnL>
-                    <a:lnR w="7200">
-                      <a:solidFill>
-                        <a:srgbClr val="000000"/>
-                      </a:solidFill>
-                      <a:prstDash val="solid"/>
-                    </a:lnR>
-                    <a:lnT w="7200">
-                      <a:solidFill>
-                        <a:srgbClr val="000000"/>
-                      </a:solidFill>
-                      <a:prstDash val="solid"/>
-                    </a:lnT>
-                    <a:lnB w="7200">
-                      <a:solidFill>
-                        <a:srgbClr val="000000"/>
-                      </a:solidFill>
-                      <a:prstDash val="solid"/>
-                    </a:lnB>
-                    <a:noFill/>
-                  </a:tcPr>
-                </a:tc>
-                <a:tc>
-                  <a:txBody>
-                    <a:bodyPr lIns="36000" rIns="36000" tIns="36000" bIns="36000" anchor="t">
-                      <a:noAutofit/>
-                    </a:bodyPr>
-                    <a:p>
-                      <a:pPr>
-                        <a:lnSpc>
-                          <a:spcPct val="100000"/>
-                        </a:lnSpc>
-                      </a:pPr>
-                      <a:r>
-                        <a:rPr lang="en-US" sz="1800" b="0" u="none" strike="noStrike">
-                          <a:solidFill>
-                            <a:srgbClr val="000000"/>
-                          </a:solidFill>
-                          <a:effectLst/>
-                          <a:uFillTx/>
-                          <a:latin typeface="Arial"/>
-                        </a:rPr>
-                        <a:t>How LOCAL the decision is </a:t>
-                      </a:r>
-                      <a:endParaRPr lang="en-US" sz="1800" b="0" u="none" strike="noStrike">
-                        <a:solidFill>
-                          <a:srgbClr val="000000"/>
-                        </a:solidFill>
-                        <a:effectLst/>
-                        <a:uFillTx/>
-                        <a:latin typeface="Arial"/>
-                      </a:endParaRPr>
-                    </a:p>
-                  </a:txBody>
-                  <a:tcPr anchor="t" marL="36000" marR="36000" marT="36000" marB="36000">
-                    <a:lnL w="7200">
-                      <a:solidFill>
-                        <a:srgbClr val="000000"/>
-                      </a:solidFill>
-                      <a:prstDash val="solid"/>
-                    </a:lnL>
-                    <a:lnR w="7200">
-                      <a:solidFill>
-                        <a:srgbClr val="000000"/>
-                      </a:solidFill>
-                      <a:prstDash val="solid"/>
-                    </a:lnR>
-                    <a:lnT w="7200">
-                      <a:solidFill>
-                        <a:srgbClr val="000000"/>
-                      </a:solidFill>
-                      <a:prstDash val="solid"/>
-                    </a:lnT>
-                    <a:lnB w="7200">
-                      <a:solidFill>
-                        <a:srgbClr val="000000"/>
-                      </a:solidFill>
-                      <a:prstDash val="solid"/>
-                    </a:lnB>
-                    <a:noFill/>
-                  </a:tcPr>
-                </a:tc>
-              </a:tr>
-              <a:tr h="346320">
-                <a:tc>
-                  <a:txBody>
-                    <a:bodyPr lIns="36000" rIns="36000" tIns="36000" bIns="36000" anchor="t">
-                      <a:noAutofit/>
-                    </a:bodyPr>
-                    <a:p>
-                      <a:pPr>
-                        <a:lnSpc>
-                          <a:spcPct val="100000"/>
-                        </a:lnSpc>
-                      </a:pPr>
-                      <a:r>
-                        <a:rPr lang="en-US" sz="1800" b="0" u="none" strike="noStrike">
-                          <a:solidFill>
-                            <a:srgbClr val="000000"/>
-                          </a:solidFill>
-                          <a:effectLst/>
-                          <a:uFillTx/>
-                          <a:latin typeface="Arial"/>
-                        </a:rPr>
-                        <a:t>offset_std_mult </a:t>
-                      </a:r>
-                      <a:endParaRPr lang="en-US" sz="1800" b="0" u="none" strike="noStrike">
-                        <a:solidFill>
-                          <a:srgbClr val="000000"/>
-                        </a:solidFill>
-                        <a:effectLst/>
-                        <a:uFillTx/>
-                        <a:latin typeface="Arial"/>
-                      </a:endParaRPr>
-                    </a:p>
-                  </a:txBody>
-                  <a:tcPr anchor="t" marL="36000" marR="36000" marT="36000" marB="36000">
-                    <a:lnL w="7200">
-                      <a:solidFill>
-                        <a:srgbClr val="000000"/>
-                      </a:solidFill>
-                      <a:prstDash val="solid"/>
-                    </a:lnL>
-                    <a:lnR w="7200">
-                      <a:solidFill>
-                        <a:srgbClr val="000000"/>
-                      </a:solidFill>
-                      <a:prstDash val="solid"/>
-                    </a:lnR>
-                    <a:lnT w="7200">
-                      <a:solidFill>
-                        <a:srgbClr val="000000"/>
-                      </a:solidFill>
-                      <a:prstDash val="solid"/>
-                    </a:lnT>
-                    <a:lnB w="7200">
-                      <a:solidFill>
-                        <a:srgbClr val="000000"/>
-                      </a:solidFill>
-                      <a:prstDash val="solid"/>
-                    </a:lnB>
-                    <a:noFill/>
-                  </a:tcPr>
-                </a:tc>
-                <a:tc>
-                  <a:txBody>
-                    <a:bodyPr lIns="36000" rIns="36000" tIns="36000" bIns="36000" anchor="t">
-                      <a:noAutofit/>
-                    </a:bodyPr>
-                    <a:p>
-                      <a:pPr>
-                        <a:lnSpc>
-                          <a:spcPct val="100000"/>
-                        </a:lnSpc>
-                      </a:pPr>
-                      <a:r>
-                        <a:rPr lang="en-US" sz="1800" b="0" u="none" strike="noStrike">
-                          <a:solidFill>
-                            <a:srgbClr val="000000"/>
-                          </a:solidFill>
-                          <a:effectLst/>
-                          <a:uFillTx/>
-                          <a:latin typeface="Arial"/>
-                        </a:rPr>
-                        <a:t>How STRICT the decision is </a:t>
-                      </a:r>
-                      <a:endParaRPr lang="en-US" sz="1800" b="0" u="none" strike="noStrike">
-                        <a:solidFill>
-                          <a:srgbClr val="000000"/>
-                        </a:solidFill>
-                        <a:effectLst/>
-                        <a:uFillTx/>
-                        <a:latin typeface="Arial"/>
-                      </a:endParaRPr>
-                    </a:p>
-                  </a:txBody>
-                  <a:tcPr anchor="t" marL="36000" marR="36000" marT="36000" marB="36000">
-                    <a:lnL w="7200">
-                      <a:solidFill>
-                        <a:srgbClr val="000000"/>
-                      </a:solidFill>
-                      <a:prstDash val="solid"/>
-                    </a:lnL>
-                    <a:lnR w="7200">
-                      <a:solidFill>
-                        <a:srgbClr val="000000"/>
-                      </a:solidFill>
-                      <a:prstDash val="solid"/>
-                    </a:lnR>
-                    <a:lnT w="7200">
-                      <a:solidFill>
-                        <a:srgbClr val="000000"/>
-                      </a:solidFill>
-                      <a:prstDash val="solid"/>
-                    </a:lnT>
-                    <a:lnB w="7200">
-                      <a:solidFill>
-                        <a:srgbClr val="000000"/>
-                      </a:solidFill>
-                      <a:prstDash val="solid"/>
-                    </a:lnB>
-                    <a:noFill/>
-                  </a:tcPr>
-                </a:tc>
-              </a:tr>
-            </a:tbl>
-          </a:graphicData>
-        </a:graphic>
-      </p:graphicFrame>
+      </p:pic>
       <p:sp>
         <p:nvSpPr>
-          <p:cNvPr id="105" name=""/>
-          <p:cNvSpPr/>
+          <p:cNvPr id="103" name=""/>
+          <p:cNvSpPr txBox="1"/>
           <p:nvPr/>
         </p:nvSpPr>
         <p:spPr>
           <a:xfrm>
-            <a:off x="140400" y="2057400"/>
-            <a:ext cx="9915480" cy="5335560"/>
+            <a:off x="4343400" y="228600"/>
+            <a:ext cx="7543800" cy="6400800"/>
           </a:xfrm>
           <a:prstGeom prst="rect">
             <a:avLst/>
@@ -8867,35 +6796,282 @@
             <a:noFill/>
           </a:ln>
         </p:spPr>
-        <p:style>
-          <a:lnRef idx="0"/>
-          <a:fillRef idx="0"/>
-          <a:effectRef idx="0"/>
-          <a:fontRef idx="minor"/>
-        </p:style>
         <p:txBody>
           <a:bodyPr lIns="90000" rIns="90000" tIns="45000" bIns="45000" anchor="t">
             <a:spAutoFit/>
           </a:bodyPr>
           <a:p>
+            <a:r>
+              <a:rPr lang="en-US" sz="1800" b="1" u="none" strike="noStrike">
+                <a:solidFill>
+                  <a:srgbClr val="000000"/>
+                </a:solidFill>
+                <a:effectLst/>
+                <a:uFillTx/>
+                <a:latin typeface="Arial"/>
+              </a:rPr>
+              <a:t>Input:</a:t>
+            </a:r>
+            <a:r>
+              <a:rPr lang="en-US" sz="1800" b="0" u="none" strike="noStrike">
+                <a:solidFill>
+                  <a:srgbClr val="000000"/>
+                </a:solidFill>
+                <a:effectLst/>
+                <a:uFillTx/>
+                <a:latin typeface="Arial"/>
+              </a:rPr>
+              <a:t> ch2 raw(puncta), ch1 raw(cells)</a:t>
+            </a:r>
+            <a:endParaRPr lang="en-US" sz="1800" b="0" u="none" strike="noStrike">
+              <a:solidFill>
+                <a:srgbClr val="000000"/>
+              </a:solidFill>
+              <a:effectLst/>
+              <a:uFillTx/>
+              <a:latin typeface="Arial"/>
+            </a:endParaRPr>
+          </a:p>
+          <a:p>
+            <a:r>
+              <a:rPr lang="en-US" sz="1800" b="1" u="none" strike="noStrike">
+                <a:solidFill>
+                  <a:srgbClr val="000000"/>
+                </a:solidFill>
+                <a:effectLst/>
+                <a:uFillTx/>
+                <a:latin typeface="Arial"/>
+              </a:rPr>
+              <a:t>Axes order:</a:t>
+            </a:r>
+            <a:r>
+              <a:rPr lang="en-US" sz="1800" b="0" u="none" strike="noStrike">
+                <a:solidFill>
+                  <a:srgbClr val="000000"/>
+                </a:solidFill>
+                <a:effectLst/>
+                <a:uFillTx/>
+                <a:latin typeface="Arial"/>
+              </a:rPr>
+              <a:t> ZYX</a:t>
+            </a:r>
+            <a:endParaRPr lang="en-US" sz="1800" b="0" u="none" strike="noStrike">
+              <a:solidFill>
+                <a:srgbClr val="000000"/>
+              </a:solidFill>
+              <a:effectLst/>
+              <a:uFillTx/>
+              <a:latin typeface="Arial"/>
+            </a:endParaRPr>
+          </a:p>
+          <a:p>
+            <a:r>
+              <a:rPr lang="en-US" sz="1800" b="0" u="none" strike="noStrike">
+                <a:solidFill>
+                  <a:srgbClr val="000000"/>
+                </a:solidFill>
+                <a:effectLst/>
+                <a:uFillTx/>
+                <a:latin typeface="Arial"/>
+              </a:rPr>
+              <a:t>Your data is interpreted as:</a:t>
+            </a:r>
+            <a:endParaRPr lang="en-US" sz="1800" b="0" u="none" strike="noStrike">
+              <a:solidFill>
+                <a:srgbClr val="000000"/>
+              </a:solidFill>
+              <a:effectLst/>
+              <a:uFillTx/>
+              <a:latin typeface="Arial"/>
+            </a:endParaRPr>
+          </a:p>
+          <a:p>
+            <a:r>
+              <a:rPr lang="en-US" sz="1800" b="0" u="none" strike="noStrike">
+                <a:solidFill>
+                  <a:srgbClr val="000000"/>
+                </a:solidFill>
+                <a:effectLst/>
+                <a:uFillTx/>
+                <a:latin typeface="Arial"/>
+              </a:rPr>
+              <a:t>Z = depth (slices)</a:t>
+            </a:r>
+            <a:endParaRPr lang="en-US" sz="1800" b="0" u="none" strike="noStrike">
+              <a:solidFill>
+                <a:srgbClr val="000000"/>
+              </a:solidFill>
+              <a:effectLst/>
+              <a:uFillTx/>
+              <a:latin typeface="Arial"/>
+            </a:endParaRPr>
+          </a:p>
+          <a:p>
+            <a:r>
+              <a:rPr lang="en-US" sz="1800" b="0" u="none" strike="noStrike">
+                <a:solidFill>
+                  <a:srgbClr val="000000"/>
+                </a:solidFill>
+                <a:effectLst/>
+                <a:uFillTx/>
+                <a:latin typeface="Arial"/>
+              </a:rPr>
+              <a:t>Y = height</a:t>
+            </a:r>
+            <a:endParaRPr lang="en-US" sz="1800" b="0" u="none" strike="noStrike">
+              <a:solidFill>
+                <a:srgbClr val="000000"/>
+              </a:solidFill>
+              <a:effectLst/>
+              <a:uFillTx/>
+              <a:latin typeface="Arial"/>
+            </a:endParaRPr>
+          </a:p>
+          <a:p>
+            <a:r>
+              <a:rPr lang="en-US" sz="1800" b="0" u="none" strike="noStrike">
+                <a:solidFill>
+                  <a:srgbClr val="000000"/>
+                </a:solidFill>
+                <a:effectLst/>
+                <a:uFillTx/>
+                <a:latin typeface="Arial"/>
+              </a:rPr>
+              <a:t>X = width</a:t>
+            </a:r>
+            <a:endParaRPr lang="en-US" sz="1800" b="0" u="none" strike="noStrike">
+              <a:solidFill>
+                <a:srgbClr val="000000"/>
+              </a:solidFill>
+              <a:effectLst/>
+              <a:uFillTx/>
+              <a:latin typeface="Arial"/>
+            </a:endParaRPr>
+          </a:p>
+          <a:p>
+            <a:r>
+              <a:rPr lang="en-US" sz="1800" b="1" u="sng" strike="noStrike">
+                <a:solidFill>
+                  <a:srgbClr val="000000"/>
+                </a:solidFill>
+                <a:effectLst/>
+                <a:uFillTx/>
+                <a:latin typeface="Arial"/>
+              </a:rPr>
+              <a:t>Model</a:t>
+            </a:r>
+            <a:endParaRPr lang="en-US" sz="1800" b="0" u="none" strike="noStrike">
+              <a:solidFill>
+                <a:srgbClr val="000000"/>
+              </a:solidFill>
+              <a:effectLst/>
+              <a:uFillTx/>
+              <a:latin typeface="Arial"/>
+            </a:endParaRPr>
+          </a:p>
+          <a:p>
+            <a:r>
+              <a:rPr lang="en-US" sz="1800" b="1" u="none" strike="noStrike">
+                <a:solidFill>
+                  <a:srgbClr val="000000"/>
+                </a:solidFill>
+                <a:effectLst/>
+                <a:uFillTx/>
+                <a:latin typeface="Arial"/>
+              </a:rPr>
+              <a:t>Mode: </a:t>
+            </a:r>
+            <a:r>
+              <a:rPr lang="en-US" sz="1800" b="0" u="none" strike="noStrike">
+                <a:solidFill>
+                  <a:srgbClr val="000000"/>
+                </a:solidFill>
+                <a:effectLst/>
+                <a:uFillTx/>
+                <a:latin typeface="Arial"/>
+              </a:rPr>
+              <a:t>3D</a:t>
+            </a:r>
+            <a:endParaRPr lang="en-US" sz="1800" b="0" u="none" strike="noStrike">
+              <a:solidFill>
+                <a:srgbClr val="000000"/>
+              </a:solidFill>
+              <a:effectLst/>
+              <a:uFillTx/>
+              <a:latin typeface="Arial"/>
+            </a:endParaRPr>
+          </a:p>
+          <a:p>
+            <a:r>
+              <a:rPr lang="en-US" sz="1800" b="0" u="none" strike="noStrike">
+                <a:solidFill>
+                  <a:srgbClr val="000000"/>
+                </a:solidFill>
+                <a:effectLst/>
+                <a:uFillTx/>
+                <a:latin typeface="Arial"/>
+              </a:rPr>
+              <a:t>The model detects spots in full 3D volume, not slice-by-slice.</a:t>
+            </a:r>
+            <a:endParaRPr lang="en-US" sz="1800" b="0" u="none" strike="noStrike">
+              <a:solidFill>
+                <a:srgbClr val="000000"/>
+              </a:solidFill>
+              <a:effectLst/>
+              <a:uFillTx/>
+              <a:latin typeface="Arial"/>
+            </a:endParaRPr>
+          </a:p>
+          <a:p>
+            <a:r>
+              <a:rPr lang="en-US" sz="1800" b="0" u="none" strike="noStrike">
+                <a:solidFill>
+                  <a:srgbClr val="000000"/>
+                </a:solidFill>
+                <a:effectLst/>
+                <a:uFillTx/>
+                <a:latin typeface="Arial"/>
+              </a:rPr>
+              <a:t>It considers spatial continuity across Z.</a:t>
+            </a:r>
+            <a:endParaRPr lang="en-US" sz="1800" b="0" u="none" strike="noStrike">
+              <a:solidFill>
+                <a:srgbClr val="000000"/>
+              </a:solidFill>
+              <a:effectLst/>
+              <a:uFillTx/>
+              <a:latin typeface="Arial"/>
+            </a:endParaRPr>
+          </a:p>
+          <a:p>
             <a:pPr>
               <a:lnSpc>
                 <a:spcPct val="100000"/>
               </a:lnSpc>
             </a:pPr>
             <a:r>
-              <a:rPr lang="en-US" sz="1400" b="1" u="none" strike="noStrike">
-                <a:solidFill>
-                  <a:srgbClr val="000000"/>
-                </a:solidFill>
-                <a:effectLst/>
-                <a:uFillTx/>
-                <a:latin typeface="Arial"/>
-                <a:ea typeface="SimSun"/>
-              </a:rPr>
-              <a:t>How They Work Together</a:t>
-            </a:r>
-            <a:endParaRPr lang="en-US" sz="1400" b="0" u="none" strike="noStrike">
+              <a:rPr lang="en-US" sz="1800" b="1" u="none" strike="noStrike">
+                <a:solidFill>
+                  <a:srgbClr val="000000"/>
+                </a:solidFill>
+                <a:effectLst/>
+                <a:uFillTx/>
+                <a:latin typeface="Arial"/>
+              </a:rPr>
+              <a:t>Model type:</a:t>
+            </a:r>
+            <a:r>
+              <a:rPr lang="en-US" sz="1800" b="0" u="none" strike="noStrike">
+                <a:solidFill>
+                  <a:srgbClr val="000000"/>
+                </a:solidFill>
+                <a:effectLst/>
+                <a:uFillTx/>
+                <a:latin typeface="Arial"/>
+              </a:rPr>
+              <a:t> Pre-trained</a:t>
+            </a:r>
+            <a:endParaRPr lang="en-US" sz="1800" b="0" u="none" strike="noStrike">
               <a:solidFill>
                 <a:srgbClr val="000000"/>
               </a:solidFill>
@@ -8911,18 +7087,17 @@
               </a:lnSpc>
             </a:pPr>
             <a:r>
-              <a:rPr lang="en-US" sz="1400" b="0" u="none" strike="noStrike">
-                <a:solidFill>
-                  <a:srgbClr val="000000"/>
-                </a:solidFill>
-                <a:effectLst/>
-                <a:uFillTx/>
-                <a:latin typeface="Arial"/>
-                <a:ea typeface="SimSun"/>
-              </a:rPr>
-              <a:t>Large block + small offset: Very conservative mask → possible broken branches</a:t>
-            </a:r>
-            <a:endParaRPr lang="en-US" sz="1400" b="0" u="none" strike="noStrike">
+              <a:rPr lang="en-US" sz="1800" b="0" u="none" strike="noStrike">
+                <a:solidFill>
+                  <a:srgbClr val="000000"/>
+                </a:solidFill>
+                <a:effectLst/>
+                <a:uFillTx/>
+                <a:latin typeface="Arial"/>
+              </a:rPr>
+              <a:t>Using a ready-made neural network.</a:t>
+            </a:r>
+            <a:endParaRPr lang="en-US" sz="1800" b="0" u="none" strike="noStrike">
               <a:solidFill>
                 <a:srgbClr val="000000"/>
               </a:solidFill>
@@ -8938,30 +7113,28 @@
               </a:lnSpc>
             </a:pPr>
             <a:r>
-              <a:rPr lang="en-US" sz="1400" b="1" u="none" strike="noStrike">
-                <a:solidFill>
-                  <a:srgbClr val="000000"/>
-                </a:solidFill>
-                <a:effectLst/>
-                <a:uFillTx/>
-                <a:latin typeface="Arial"/>
-                <a:ea typeface="SimSun"/>
-              </a:rPr>
-              <a:t>Small block + large offset: </a:t>
-            </a:r>
-            <a:r>
-              <a:rPr lang="en-US" sz="1400" b="0" u="none" strike="noStrike">
-                <a:solidFill>
-                  <a:srgbClr val="000000"/>
-                </a:solidFill>
-                <a:effectLst/>
-                <a:uFillTx/>
-                <a:latin typeface="Arial"/>
-                <a:ea typeface="SimSun"/>
-              </a:rPr>
-              <a:t>Very permissive mask → noise</a:t>
-            </a:r>
-            <a:endParaRPr lang="en-US" sz="1400" b="0" u="none" strike="noStrike">
+              <a:rPr lang="en-US" sz="1800" b="1" u="none" strike="noStrike">
+                <a:solidFill>
+                  <a:srgbClr val="000000"/>
+                </a:solidFill>
+                <a:effectLst/>
+                <a:uFillTx/>
+                <a:latin typeface="Arial"/>
+              </a:rPr>
+              <a:t>Pre-trained model (3D):</a:t>
+            </a:r>
+            <a:r>
+              <a:rPr lang="en-US" sz="1800" b="0" u="none" strike="noStrike">
+                <a:solidFill>
+                  <a:srgbClr val="000000"/>
+                </a:solidFill>
+                <a:effectLst/>
+                <a:uFillTx/>
+                <a:latin typeface="Arial"/>
+              </a:rPr>
+              <a:t> synth_3d</a:t>
+            </a:r>
+            <a:endParaRPr lang="en-US" sz="1800" b="0" u="none" strike="noStrike">
               <a:solidFill>
                 <a:srgbClr val="000000"/>
               </a:solidFill>
@@ -8975,38 +7148,19 @@
               <a:lnSpc>
                 <a:spcPct val="100000"/>
               </a:lnSpc>
-              <a:spcBef>
-                <a:spcPts val="340"/>
-              </a:spcBef>
-              <a:spcAft>
-                <a:spcPts val="142"/>
-              </a:spcAft>
-            </a:pPr>
-            <a:r>
-              <a:rPr lang="en-US" sz="1400" b="1" u="none" strike="noStrike">
-                <a:solidFill>
-                  <a:srgbClr val="000000"/>
-                </a:solidFill>
-                <a:effectLst/>
-                <a:uFillTx/>
-                <a:latin typeface="Arial"/>
-                <a:ea typeface="SimSun"/>
-              </a:rPr>
-              <a:t>block_size =</a:t>
-            </a:r>
-            <a:r>
-              <a:rPr lang="en-US" sz="1400" b="0" u="none" strike="noStrike">
-                <a:solidFill>
-                  <a:srgbClr val="000000"/>
-                </a:solidFill>
-                <a:effectLst/>
-                <a:uFillTx/>
-                <a:latin typeface="Arial"/>
-                <a:ea typeface="SimSun"/>
-              </a:rPr>
-              <a:t> “How big is the area I compare each pixel to?”</a:t>
-            </a:r>
-            <a:endParaRPr lang="en-US" sz="1400" b="0" u="none" strike="noStrike">
+            </a:pPr>
+            <a:r>
+              <a:rPr lang="en-US" sz="1800" b="0" u="none" strike="noStrike">
+                <a:solidFill>
+                  <a:srgbClr val="000000"/>
+                </a:solidFill>
+                <a:effectLst/>
+                <a:uFillTx/>
+                <a:latin typeface="Arial"/>
+              </a:rPr>
+              <a:t>A model trained on synthetic 3D spot-like data.</a:t>
+            </a:r>
+            <a:endParaRPr lang="en-US" sz="1800" b="0" u="none" strike="noStrike">
               <a:solidFill>
                 <a:srgbClr val="000000"/>
               </a:solidFill>
@@ -9020,38 +7174,19 @@
               <a:lnSpc>
                 <a:spcPct val="100000"/>
               </a:lnSpc>
-              <a:spcBef>
-                <a:spcPts val="340"/>
-              </a:spcBef>
-              <a:spcAft>
-                <a:spcPts val="142"/>
-              </a:spcAft>
-            </a:pPr>
-            <a:r>
-              <a:rPr lang="en-US" sz="1400" b="1" u="none" strike="noStrike">
-                <a:solidFill>
-                  <a:srgbClr val="000000"/>
-                </a:solidFill>
-                <a:effectLst/>
-                <a:uFillTx/>
-                <a:latin typeface="Arial"/>
-                <a:ea typeface="SimSun"/>
-              </a:rPr>
-              <a:t>offset_std_mult =</a:t>
-            </a:r>
-            <a:r>
-              <a:rPr lang="en-US" sz="1400" b="0" u="none" strike="noStrike">
-                <a:solidFill>
-                  <a:srgbClr val="000000"/>
-                </a:solidFill>
-                <a:effectLst/>
-                <a:uFillTx/>
-                <a:latin typeface="Arial"/>
-                <a:ea typeface="SimSun"/>
-              </a:rPr>
-              <a:t> “How easy do I allow pixels to pass the threshold?”</a:t>
-            </a:r>
-            <a:endParaRPr lang="en-US" sz="1400" b="0" u="none" strike="noStrike">
+            </a:pPr>
+            <a:r>
+              <a:rPr lang="en-US" sz="1800" b="1" u="none" strike="noStrike">
+                <a:solidFill>
+                  <a:srgbClr val="000000"/>
+                </a:solidFill>
+                <a:effectLst/>
+                <a:uFillTx/>
+                <a:latin typeface="Arial"/>
+              </a:rPr>
+              <a:t>Works well for:</a:t>
+            </a:r>
+            <a:endParaRPr lang="en-US" sz="1800" b="0" u="none" strike="noStrike">
               <a:solidFill>
                 <a:srgbClr val="000000"/>
               </a:solidFill>
@@ -9065,14 +7200,19 @@
               <a:lnSpc>
                 <a:spcPct val="100000"/>
               </a:lnSpc>
-              <a:spcBef>
-                <a:spcPts val="340"/>
-              </a:spcBef>
-              <a:spcAft>
-                <a:spcPts val="142"/>
-              </a:spcAft>
-            </a:pPr>
-            <a:endParaRPr lang="en-US" sz="1400" b="0" u="none" strike="noStrike">
+            </a:pPr>
+            <a:r>
+              <a:rPr lang="en-US" sz="1800" b="0" u="none" strike="noStrike">
+                <a:solidFill>
+                  <a:srgbClr val="000000"/>
+                </a:solidFill>
+                <a:effectLst/>
+                <a:uFillTx/>
+                <a:latin typeface="Arial"/>
+              </a:rPr>
+              <a:t>Spherical/compact bright spots</a:t>
+            </a:r>
+            <a:endParaRPr lang="en-US" sz="1800" b="0" u="none" strike="noStrike">
               <a:solidFill>
                 <a:srgbClr val="000000"/>
               </a:solidFill>
@@ -9086,242 +7226,40 @@
               <a:lnSpc>
                 <a:spcPct val="100000"/>
               </a:lnSpc>
-              <a:spcBef>
-                <a:spcPts val="1191"/>
-              </a:spcBef>
-              <a:spcAft>
-                <a:spcPts val="992"/>
-              </a:spcAft>
-            </a:pPr>
-            <a:r>
-              <a:rPr lang="en-US" sz="1200" b="1" u="none" strike="noStrike">
-                <a:solidFill>
-                  <a:srgbClr val="000000"/>
-                </a:solidFill>
-                <a:effectLst/>
-                <a:uFillTx/>
-                <a:latin typeface="Arial"/>
-                <a:ea typeface="Microsoft YaHei"/>
-              </a:rPr>
-              <a:t> If you see broken branches</a:t>
-            </a:r>
-            <a:endParaRPr lang="en-US" sz="1200" b="0" u="none" strike="noStrike">
-              <a:solidFill>
-                <a:srgbClr val="000000"/>
-              </a:solidFill>
-              <a:effectLst/>
-              <a:uFillTx/>
-              <a:latin typeface="Arial"/>
-            </a:endParaRPr>
-          </a:p>
-          <a:p>
-            <a:pPr>
-              <a:lnSpc>
-                <a:spcPct val="100000"/>
-              </a:lnSpc>
-              <a:spcBef>
-                <a:spcPts val="340"/>
-              </a:spcBef>
-              <a:spcAft>
-                <a:spcPts val="142"/>
-              </a:spcAft>
-            </a:pPr>
-            <a:r>
-              <a:rPr lang="en-US" sz="1200" b="0" u="none" strike="noStrike">
-                <a:solidFill>
-                  <a:srgbClr val="000000"/>
-                </a:solidFill>
-                <a:effectLst/>
-                <a:uFillTx/>
-                <a:latin typeface="Arial"/>
-                <a:ea typeface="Microsoft YaHei"/>
-              </a:rPr>
-              <a:t>→ Increase offset</a:t>
-            </a:r>
-            <a:endParaRPr lang="en-US" sz="1200" b="0" u="none" strike="noStrike">
-              <a:solidFill>
-                <a:srgbClr val="000000"/>
-              </a:solidFill>
-              <a:effectLst/>
-              <a:uFillTx/>
-              <a:latin typeface="Arial"/>
-            </a:endParaRPr>
-          </a:p>
-          <a:p>
-            <a:pPr>
-              <a:lnSpc>
-                <a:spcPct val="100000"/>
-              </a:lnSpc>
-              <a:spcBef>
-                <a:spcPts val="340"/>
-              </a:spcBef>
-              <a:spcAft>
-                <a:spcPts val="142"/>
-              </a:spcAft>
-            </a:pPr>
-            <a:r>
-              <a:rPr lang="en-US" sz="1200" b="0" u="none" strike="noStrike">
-                <a:solidFill>
-                  <a:srgbClr val="000000"/>
-                </a:solidFill>
-                <a:effectLst/>
-                <a:uFillTx/>
-                <a:latin typeface="Arial"/>
-                <a:ea typeface="Microsoft YaHei"/>
-              </a:rPr>
-              <a:t>→ Or decrease block_size</a:t>
-            </a:r>
-            <a:endParaRPr lang="en-US" sz="1200" b="0" u="none" strike="noStrike">
-              <a:solidFill>
-                <a:srgbClr val="000000"/>
-              </a:solidFill>
-              <a:effectLst/>
-              <a:uFillTx/>
-              <a:latin typeface="Arial"/>
-            </a:endParaRPr>
-          </a:p>
-          <a:p>
-            <a:pPr>
-              <a:lnSpc>
-                <a:spcPct val="100000"/>
-              </a:lnSpc>
-              <a:spcBef>
-                <a:spcPts val="1191"/>
-              </a:spcBef>
-              <a:spcAft>
-                <a:spcPts val="992"/>
-              </a:spcAft>
-            </a:pPr>
-            <a:r>
-              <a:rPr lang="en-US" sz="1200" b="1" u="none" strike="noStrike">
-                <a:solidFill>
-                  <a:srgbClr val="000000"/>
-                </a:solidFill>
-                <a:effectLst/>
-                <a:uFillTx/>
-                <a:latin typeface="Arial"/>
-                <a:ea typeface="Microsoft YaHei"/>
-              </a:rPr>
-              <a:t>If you see too much noise</a:t>
-            </a:r>
-            <a:endParaRPr lang="en-US" sz="1200" b="0" u="none" strike="noStrike">
-              <a:solidFill>
-                <a:srgbClr val="000000"/>
-              </a:solidFill>
-              <a:effectLst/>
-              <a:uFillTx/>
-              <a:latin typeface="Arial"/>
-            </a:endParaRPr>
-          </a:p>
-          <a:p>
-            <a:pPr>
-              <a:lnSpc>
-                <a:spcPct val="100000"/>
-              </a:lnSpc>
-              <a:spcBef>
-                <a:spcPts val="624"/>
-              </a:spcBef>
-              <a:spcAft>
-                <a:spcPts val="425"/>
-              </a:spcAft>
-            </a:pPr>
-            <a:r>
-              <a:rPr lang="en-US" sz="1200" b="0" u="none" strike="noStrike">
-                <a:solidFill>
-                  <a:srgbClr val="000000"/>
-                </a:solidFill>
-                <a:effectLst/>
-                <a:uFillTx/>
-                <a:latin typeface="Arial"/>
-                <a:ea typeface="Microsoft YaHei"/>
-              </a:rPr>
-              <a:t>→ Decrease offset</a:t>
-            </a:r>
-            <a:endParaRPr lang="en-US" sz="1200" b="0" u="none" strike="noStrike">
-              <a:solidFill>
-                <a:srgbClr val="000000"/>
-              </a:solidFill>
-              <a:effectLst/>
-              <a:uFillTx/>
-              <a:latin typeface="Arial"/>
-            </a:endParaRPr>
-          </a:p>
-          <a:p>
-            <a:pPr>
-              <a:lnSpc>
-                <a:spcPct val="100000"/>
-              </a:lnSpc>
-              <a:spcBef>
-                <a:spcPts val="624"/>
-              </a:spcBef>
-              <a:spcAft>
-                <a:spcPts val="425"/>
-              </a:spcAft>
-            </a:pPr>
-            <a:r>
-              <a:rPr lang="en-US" sz="1200" b="0" u="none" strike="noStrike">
-                <a:solidFill>
-                  <a:srgbClr val="000000"/>
-                </a:solidFill>
-                <a:effectLst/>
-                <a:uFillTx/>
-                <a:latin typeface="Arial"/>
-                <a:ea typeface="Microsoft YaHei"/>
-              </a:rPr>
-              <a:t>→ Or increase block_size</a:t>
-            </a:r>
-            <a:endParaRPr lang="en-US" sz="1200" b="0" u="none" strike="noStrike">
-              <a:solidFill>
-                <a:srgbClr val="000000"/>
-              </a:solidFill>
-              <a:effectLst/>
-              <a:uFillTx/>
-              <a:latin typeface="Arial"/>
-            </a:endParaRPr>
-          </a:p>
-          <a:p>
-            <a:pPr>
-              <a:lnSpc>
-                <a:spcPct val="100000"/>
-              </a:lnSpc>
-              <a:spcBef>
-                <a:spcPts val="1191"/>
-              </a:spcBef>
-              <a:spcAft>
-                <a:spcPts val="992"/>
-              </a:spcAft>
-            </a:pPr>
-            <a:endParaRPr lang="en-US" sz="1200" b="0" u="none" strike="noStrike">
-              <a:solidFill>
-                <a:srgbClr val="000000"/>
-              </a:solidFill>
-              <a:effectLst/>
-              <a:uFillTx/>
-              <a:latin typeface="Arial"/>
-            </a:endParaRPr>
-          </a:p>
-          <a:p>
-            <a:pPr>
-              <a:lnSpc>
-                <a:spcPct val="100000"/>
-              </a:lnSpc>
-            </a:pPr>
-            <a:endParaRPr lang="en-US" sz="1400" b="0" u="none" strike="noStrike">
-              <a:solidFill>
-                <a:srgbClr val="000000"/>
-              </a:solidFill>
-              <a:effectLst/>
-              <a:uFillTx/>
-              <a:latin typeface="Arial"/>
-            </a:endParaRPr>
-          </a:p>
-          <a:p>
-            <a:pPr>
-              <a:lnSpc>
-                <a:spcPct val="100000"/>
-              </a:lnSpc>
-            </a:pPr>
-            <a:endParaRPr lang="en-US" sz="1000" b="0" u="none" strike="noStrike">
+            </a:pPr>
+            <a:r>
+              <a:rPr lang="en-US" sz="1800" b="0" u="none" strike="noStrike">
+                <a:solidFill>
+                  <a:srgbClr val="000000"/>
+                </a:solidFill>
+                <a:effectLst/>
+                <a:uFillTx/>
+                <a:latin typeface="Arial"/>
+              </a:rPr>
+              <a:t>Isotropic-ish objects</a:t>
+            </a:r>
+            <a:endParaRPr lang="en-US" sz="1800" b="0" u="none" strike="noStrike">
+              <a:solidFill>
+                <a:srgbClr val="000000"/>
+              </a:solidFill>
+              <a:effectLst/>
+              <a:uFillTx/>
+              <a:latin typeface="Arial"/>
+            </a:endParaRPr>
+          </a:p>
+          <a:p>
+            <a:r>
+              <a:rPr lang="en-US" sz="1800" b="0" u="none" strike="noStrike">
+                <a:solidFill>
+                  <a:srgbClr val="000000"/>
+                </a:solidFill>
+                <a:effectLst/>
+                <a:uFillTx/>
+                <a:latin typeface="Arial"/>
+              </a:rPr>
+              <a:t>                                                                  </a:t>
+            </a:r>
+            <a:endParaRPr lang="en-US" sz="1800" b="0" u="none" strike="noStrike">
               <a:solidFill>
                 <a:srgbClr val="000000"/>
               </a:solidFill>
@@ -9332,1270 +7270,6 @@
           </a:p>
         </p:txBody>
       </p:sp>
-      <p:graphicFrame>
-        <p:nvGraphicFramePr>
-          <p:cNvPr id="106" name=""/>
-          <p:cNvGraphicFramePr/>
-          <p:nvPr/>
-        </p:nvGraphicFramePr>
-        <p:xfrm>
-          <a:off x="6841800" y="2035080"/>
-          <a:ext cx="5075280" cy="1733400"/>
-        </p:xfrm>
-        <a:graphic>
-          <a:graphicData uri="http://schemas.openxmlformats.org/drawingml/2006/table">
-            <a:tbl>
-              <a:tblPr/>
-              <a:tblGrid>
-                <a:gridCol w="2537640"/>
-                <a:gridCol w="2538000"/>
-              </a:tblGrid>
-              <a:tr h="346320">
-                <a:tc>
-                  <a:txBody>
-                    <a:bodyPr lIns="36000" rIns="36000" tIns="36000" bIns="36000" anchor="t">
-                      <a:noAutofit/>
-                    </a:bodyPr>
-                    <a:p>
-                      <a:pPr>
-                        <a:lnSpc>
-                          <a:spcPct val="100000"/>
-                        </a:lnSpc>
-                      </a:pPr>
-                      <a:r>
-                        <a:rPr lang="en-US" sz="1800" b="0" u="none" strike="noStrike">
-                          <a:solidFill>
-                            <a:srgbClr val="000000"/>
-                          </a:solidFill>
-                          <a:effectLst/>
-                          <a:uFillTx/>
-                          <a:latin typeface="Arial"/>
-                        </a:rPr>
-                        <a:t>Situation</a:t>
-                      </a:r>
-                      <a:endParaRPr lang="en-US" sz="1800" b="0" u="none" strike="noStrike">
-                        <a:solidFill>
-                          <a:srgbClr val="000000"/>
-                        </a:solidFill>
-                        <a:effectLst/>
-                        <a:uFillTx/>
-                        <a:latin typeface="Arial"/>
-                      </a:endParaRPr>
-                    </a:p>
-                  </a:txBody>
-                  <a:tcPr anchor="t" marL="36000" marR="36000" marT="36000" marB="36000">
-                    <a:lnL w="7200">
-                      <a:solidFill>
-                        <a:srgbClr val="000000"/>
-                      </a:solidFill>
-                      <a:prstDash val="solid"/>
-                    </a:lnL>
-                    <a:lnR w="7200">
-                      <a:solidFill>
-                        <a:srgbClr val="000000"/>
-                      </a:solidFill>
-                      <a:prstDash val="solid"/>
-                    </a:lnR>
-                    <a:lnT w="7200">
-                      <a:solidFill>
-                        <a:srgbClr val="000000"/>
-                      </a:solidFill>
-                      <a:prstDash val="solid"/>
-                    </a:lnT>
-                    <a:lnB w="7200">
-                      <a:solidFill>
-                        <a:srgbClr val="000000"/>
-                      </a:solidFill>
-                      <a:prstDash val="solid"/>
-                    </a:lnB>
-                    <a:noFill/>
-                  </a:tcPr>
-                </a:tc>
-                <a:tc>
-                  <a:txBody>
-                    <a:bodyPr lIns="36000" rIns="36000" tIns="36000" bIns="36000" anchor="t">
-                      <a:noAutofit/>
-                    </a:bodyPr>
-                    <a:p>
-                      <a:pPr>
-                        <a:lnSpc>
-                          <a:spcPct val="100000"/>
-                        </a:lnSpc>
-                      </a:pPr>
-                      <a:r>
-                        <a:rPr lang="en-US" sz="1800" b="0" u="none" strike="noStrike">
-                          <a:solidFill>
-                            <a:srgbClr val="000000"/>
-                          </a:solidFill>
-                          <a:effectLst/>
-                          <a:uFillTx/>
-                          <a:latin typeface="Arial"/>
-                        </a:rPr>
-                        <a:t> COMBINATIONS</a:t>
-                      </a:r>
-                      <a:endParaRPr lang="en-US" sz="1800" b="0" u="none" strike="noStrike">
-                        <a:solidFill>
-                          <a:srgbClr val="000000"/>
-                        </a:solidFill>
-                        <a:effectLst/>
-                        <a:uFillTx/>
-                        <a:latin typeface="Arial"/>
-                      </a:endParaRPr>
-                    </a:p>
-                  </a:txBody>
-                  <a:tcPr anchor="t" marL="36000" marR="36000" marT="36000" marB="36000">
-                    <a:lnL w="7200">
-                      <a:solidFill>
-                        <a:srgbClr val="000000"/>
-                      </a:solidFill>
-                      <a:prstDash val="solid"/>
-                    </a:lnL>
-                    <a:lnR w="7200">
-                      <a:solidFill>
-                        <a:srgbClr val="000000"/>
-                      </a:solidFill>
-                      <a:prstDash val="solid"/>
-                    </a:lnR>
-                    <a:lnT w="7200">
-                      <a:solidFill>
-                        <a:srgbClr val="000000"/>
-                      </a:solidFill>
-                      <a:prstDash val="solid"/>
-                    </a:lnT>
-                    <a:lnB w="7200">
-                      <a:solidFill>
-                        <a:srgbClr val="000000"/>
-                      </a:solidFill>
-                      <a:prstDash val="solid"/>
-                    </a:lnB>
-                    <a:noFill/>
-                  </a:tcPr>
-                </a:tc>
-              </a:tr>
-              <a:tr h="346320">
-                <a:tc>
-                  <a:txBody>
-                    <a:bodyPr lIns="36000" rIns="36000" tIns="36000" bIns="36000" anchor="t">
-                      <a:noAutofit/>
-                    </a:bodyPr>
-                    <a:p>
-                      <a:pPr>
-                        <a:lnSpc>
-                          <a:spcPct val="100000"/>
-                        </a:lnSpc>
-                      </a:pPr>
-                      <a:r>
-                        <a:rPr lang="en-US" sz="1800" b="0" u="none" strike="noStrike">
-                          <a:solidFill>
-                            <a:srgbClr val="000000"/>
-                          </a:solidFill>
-                          <a:effectLst/>
-                          <a:uFillTx/>
-                          <a:latin typeface="Arial"/>
-                        </a:rPr>
-                        <a:t>Thick bright axons </a:t>
-                      </a:r>
-                      <a:endParaRPr lang="en-US" sz="1800" b="0" u="none" strike="noStrike">
-                        <a:solidFill>
-                          <a:srgbClr val="000000"/>
-                        </a:solidFill>
-                        <a:effectLst/>
-                        <a:uFillTx/>
-                        <a:latin typeface="Arial"/>
-                      </a:endParaRPr>
-                    </a:p>
-                  </a:txBody>
-                  <a:tcPr anchor="t" marL="36000" marR="36000" marT="36000" marB="36000">
-                    <a:lnL w="7200">
-                      <a:solidFill>
-                        <a:srgbClr val="000000"/>
-                      </a:solidFill>
-                      <a:prstDash val="solid"/>
-                    </a:lnL>
-                    <a:lnR w="7200">
-                      <a:solidFill>
-                        <a:srgbClr val="000000"/>
-                      </a:solidFill>
-                      <a:prstDash val="solid"/>
-                    </a:lnR>
-                    <a:lnT w="7200">
-                      <a:solidFill>
-                        <a:srgbClr val="000000"/>
-                      </a:solidFill>
-                      <a:prstDash val="solid"/>
-                    </a:lnT>
-                    <a:lnB w="7200">
-                      <a:solidFill>
-                        <a:srgbClr val="000000"/>
-                      </a:solidFill>
-                      <a:prstDash val="solid"/>
-                    </a:lnB>
-                    <a:noFill/>
-                  </a:tcPr>
-                </a:tc>
-                <a:tc>
-                  <a:txBody>
-                    <a:bodyPr lIns="36000" rIns="36000" tIns="36000" bIns="36000" anchor="t">
-                      <a:noAutofit/>
-                    </a:bodyPr>
-                    <a:p>
-                      <a:pPr>
-                        <a:lnSpc>
-                          <a:spcPct val="100000"/>
-                        </a:lnSpc>
-                      </a:pPr>
-                      <a:r>
-                        <a:rPr lang="en-US" sz="1800" b="0" u="none" strike="noStrike">
-                          <a:solidFill>
-                            <a:srgbClr val="000000"/>
-                          </a:solidFill>
-                          <a:effectLst/>
-                          <a:uFillTx/>
-                          <a:latin typeface="Arial"/>
-                        </a:rPr>
-                        <a:t>151–201 + 0.12–0.15 </a:t>
-                      </a:r>
-                      <a:endParaRPr lang="en-US" sz="1800" b="0" u="none" strike="noStrike">
-                        <a:solidFill>
-                          <a:srgbClr val="000000"/>
-                        </a:solidFill>
-                        <a:effectLst/>
-                        <a:uFillTx/>
-                        <a:latin typeface="Arial"/>
-                      </a:endParaRPr>
-                    </a:p>
-                  </a:txBody>
-                  <a:tcPr anchor="t" marL="36000" marR="36000" marT="36000" marB="36000">
-                    <a:lnL w="7200">
-                      <a:solidFill>
-                        <a:srgbClr val="000000"/>
-                      </a:solidFill>
-                      <a:prstDash val="solid"/>
-                    </a:lnL>
-                    <a:lnR w="7200">
-                      <a:solidFill>
-                        <a:srgbClr val="000000"/>
-                      </a:solidFill>
-                      <a:prstDash val="solid"/>
-                    </a:lnR>
-                    <a:lnT w="7200">
-                      <a:solidFill>
-                        <a:srgbClr val="000000"/>
-                      </a:solidFill>
-                      <a:prstDash val="solid"/>
-                    </a:lnT>
-                    <a:lnB w="7200">
-                      <a:solidFill>
-                        <a:srgbClr val="000000"/>
-                      </a:solidFill>
-                      <a:prstDash val="solid"/>
-                    </a:lnB>
-                    <a:noFill/>
-                  </a:tcPr>
-                </a:tc>
-              </a:tr>
-              <a:tr h="346320">
-                <a:tc>
-                  <a:txBody>
-                    <a:bodyPr lIns="36000" rIns="36000" tIns="36000" bIns="36000" anchor="t">
-                      <a:noAutofit/>
-                    </a:bodyPr>
-                    <a:p>
-                      <a:pPr>
-                        <a:lnSpc>
-                          <a:spcPct val="100000"/>
-                        </a:lnSpc>
-                      </a:pPr>
-                      <a:r>
-                        <a:rPr lang="en-US" sz="1800" b="0" u="none" strike="noStrike">
-                          <a:solidFill>
-                            <a:srgbClr val="000000"/>
-                          </a:solidFill>
-                          <a:effectLst/>
-                          <a:uFillTx/>
-                          <a:latin typeface="Arial"/>
-                        </a:rPr>
-                        <a:t>Thin dim neurites </a:t>
-                      </a:r>
-                      <a:endParaRPr lang="en-US" sz="1800" b="0" u="none" strike="noStrike">
-                        <a:solidFill>
-                          <a:srgbClr val="000000"/>
-                        </a:solidFill>
-                        <a:effectLst/>
-                        <a:uFillTx/>
-                        <a:latin typeface="Arial"/>
-                      </a:endParaRPr>
-                    </a:p>
-                  </a:txBody>
-                  <a:tcPr anchor="t" marL="36000" marR="36000" marT="36000" marB="36000">
-                    <a:lnL w="7200">
-                      <a:solidFill>
-                        <a:srgbClr val="000000"/>
-                      </a:solidFill>
-                      <a:prstDash val="solid"/>
-                    </a:lnL>
-                    <a:lnR w="7200">
-                      <a:solidFill>
-                        <a:srgbClr val="000000"/>
-                      </a:solidFill>
-                      <a:prstDash val="solid"/>
-                    </a:lnR>
-                    <a:lnT w="7200">
-                      <a:solidFill>
-                        <a:srgbClr val="000000"/>
-                      </a:solidFill>
-                      <a:prstDash val="solid"/>
-                    </a:lnT>
-                    <a:lnB w="7200">
-                      <a:solidFill>
-                        <a:srgbClr val="000000"/>
-                      </a:solidFill>
-                      <a:prstDash val="solid"/>
-                    </a:lnB>
-                    <a:noFill/>
-                  </a:tcPr>
-                </a:tc>
-                <a:tc>
-                  <a:txBody>
-                    <a:bodyPr lIns="36000" rIns="36000" tIns="36000" bIns="36000" anchor="t">
-                      <a:noAutofit/>
-                    </a:bodyPr>
-                    <a:p>
-                      <a:pPr>
-                        <a:lnSpc>
-                          <a:spcPct val="100000"/>
-                        </a:lnSpc>
-                      </a:pPr>
-                      <a:r>
-                        <a:rPr lang="en-US" sz="1800" b="0" u="none" strike="noStrike">
-                          <a:solidFill>
-                            <a:srgbClr val="000000"/>
-                          </a:solidFill>
-                          <a:effectLst/>
-                          <a:uFillTx/>
-                          <a:latin typeface="Arial"/>
-                        </a:rPr>
-                        <a:t>91–151 + 0.18–0.22 </a:t>
-                      </a:r>
-                      <a:endParaRPr lang="en-US" sz="1800" b="0" u="none" strike="noStrike">
-                        <a:solidFill>
-                          <a:srgbClr val="000000"/>
-                        </a:solidFill>
-                        <a:effectLst/>
-                        <a:uFillTx/>
-                        <a:latin typeface="Arial"/>
-                      </a:endParaRPr>
-                    </a:p>
-                  </a:txBody>
-                  <a:tcPr anchor="t" marL="36000" marR="36000" marT="36000" marB="36000">
-                    <a:lnL w="7200">
-                      <a:solidFill>
-                        <a:srgbClr val="000000"/>
-                      </a:solidFill>
-                      <a:prstDash val="solid"/>
-                    </a:lnL>
-                    <a:lnR w="7200">
-                      <a:solidFill>
-                        <a:srgbClr val="000000"/>
-                      </a:solidFill>
-                      <a:prstDash val="solid"/>
-                    </a:lnR>
-                    <a:lnT w="7200">
-                      <a:solidFill>
-                        <a:srgbClr val="000000"/>
-                      </a:solidFill>
-                      <a:prstDash val="solid"/>
-                    </a:lnT>
-                    <a:lnB w="7200">
-                      <a:solidFill>
-                        <a:srgbClr val="000000"/>
-                      </a:solidFill>
-                      <a:prstDash val="solid"/>
-                    </a:lnB>
-                    <a:noFill/>
-                  </a:tcPr>
-                </a:tc>
-              </a:tr>
-              <a:tr h="346320">
-                <a:tc>
-                  <a:txBody>
-                    <a:bodyPr lIns="36000" rIns="36000" tIns="36000" bIns="36000" anchor="t">
-                      <a:noAutofit/>
-                    </a:bodyPr>
-                    <a:p>
-                      <a:pPr>
-                        <a:lnSpc>
-                          <a:spcPct val="100000"/>
-                        </a:lnSpc>
-                      </a:pPr>
-                      <a:r>
-                        <a:rPr lang="en-US" sz="1800" b="0" u="none" strike="noStrike">
-                          <a:solidFill>
-                            <a:srgbClr val="000000"/>
-                          </a:solidFill>
-                          <a:effectLst/>
-                          <a:uFillTx/>
-                          <a:latin typeface="Arial"/>
-                        </a:rPr>
-                        <a:t>Very noisy image </a:t>
-                      </a:r>
-                      <a:endParaRPr lang="en-US" sz="1800" b="0" u="none" strike="noStrike">
-                        <a:solidFill>
-                          <a:srgbClr val="000000"/>
-                        </a:solidFill>
-                        <a:effectLst/>
-                        <a:uFillTx/>
-                        <a:latin typeface="Arial"/>
-                      </a:endParaRPr>
-                    </a:p>
-                  </a:txBody>
-                  <a:tcPr anchor="t" marL="36000" marR="36000" marT="36000" marB="36000">
-                    <a:lnL w="7200">
-                      <a:solidFill>
-                        <a:srgbClr val="000000"/>
-                      </a:solidFill>
-                      <a:prstDash val="solid"/>
-                    </a:lnL>
-                    <a:lnR w="7200">
-                      <a:solidFill>
-                        <a:srgbClr val="000000"/>
-                      </a:solidFill>
-                      <a:prstDash val="solid"/>
-                    </a:lnR>
-                    <a:lnT w="7200">
-                      <a:solidFill>
-                        <a:srgbClr val="000000"/>
-                      </a:solidFill>
-                      <a:prstDash val="solid"/>
-                    </a:lnT>
-                    <a:lnB w="7200">
-                      <a:solidFill>
-                        <a:srgbClr val="000000"/>
-                      </a:solidFill>
-                      <a:prstDash val="solid"/>
-                    </a:lnB>
-                    <a:noFill/>
-                  </a:tcPr>
-                </a:tc>
-                <a:tc>
-                  <a:txBody>
-                    <a:bodyPr lIns="36000" rIns="36000" tIns="36000" bIns="36000" anchor="t">
-                      <a:noAutofit/>
-                    </a:bodyPr>
-                    <a:p>
-                      <a:pPr>
-                        <a:lnSpc>
-                          <a:spcPct val="100000"/>
-                        </a:lnSpc>
-                      </a:pPr>
-                      <a:r>
-                        <a:rPr lang="en-US" sz="1800" b="0" u="none" strike="noStrike">
-                          <a:solidFill>
-                            <a:srgbClr val="000000"/>
-                          </a:solidFill>
-                          <a:effectLst/>
-                          <a:uFillTx/>
-                          <a:latin typeface="Arial"/>
-                        </a:rPr>
-                        <a:t>201 + 0.08–0.12 </a:t>
-                      </a:r>
-                      <a:endParaRPr lang="en-US" sz="1800" b="0" u="none" strike="noStrike">
-                        <a:solidFill>
-                          <a:srgbClr val="000000"/>
-                        </a:solidFill>
-                        <a:effectLst/>
-                        <a:uFillTx/>
-                        <a:latin typeface="Arial"/>
-                      </a:endParaRPr>
-                    </a:p>
-                  </a:txBody>
-                  <a:tcPr anchor="t" marL="36000" marR="36000" marT="36000" marB="36000">
-                    <a:lnL w="7200">
-                      <a:solidFill>
-                        <a:srgbClr val="000000"/>
-                      </a:solidFill>
-                      <a:prstDash val="solid"/>
-                    </a:lnL>
-                    <a:lnR w="7200">
-                      <a:solidFill>
-                        <a:srgbClr val="000000"/>
-                      </a:solidFill>
-                      <a:prstDash val="solid"/>
-                    </a:lnR>
-                    <a:lnT w="7200">
-                      <a:solidFill>
-                        <a:srgbClr val="000000"/>
-                      </a:solidFill>
-                      <a:prstDash val="solid"/>
-                    </a:lnT>
-                    <a:lnB w="7200">
-                      <a:solidFill>
-                        <a:srgbClr val="000000"/>
-                      </a:solidFill>
-                      <a:prstDash val="solid"/>
-                    </a:lnB>
-                    <a:noFill/>
-                  </a:tcPr>
-                </a:tc>
-              </a:tr>
-              <a:tr h="346320">
-                <a:tc>
-                  <a:txBody>
-                    <a:bodyPr lIns="36000" rIns="36000" tIns="36000" bIns="36000" anchor="t">
-                      <a:noAutofit/>
-                    </a:bodyPr>
-                    <a:p>
-                      <a:pPr>
-                        <a:lnSpc>
-                          <a:spcPct val="100000"/>
-                        </a:lnSpc>
-                      </a:pPr>
-                      <a:r>
-                        <a:rPr lang="en-US" sz="1800" b="0" u="none" strike="noStrike">
-                          <a:solidFill>
-                            <a:srgbClr val="000000"/>
-                          </a:solidFill>
-                          <a:effectLst/>
-                          <a:uFillTx/>
-                          <a:latin typeface="Arial"/>
-                        </a:rPr>
-                        <a:t>Highly fragmented mask </a:t>
-                      </a:r>
-                      <a:endParaRPr lang="en-US" sz="1800" b="0" u="none" strike="noStrike">
-                        <a:solidFill>
-                          <a:srgbClr val="000000"/>
-                        </a:solidFill>
-                        <a:effectLst/>
-                        <a:uFillTx/>
-                        <a:latin typeface="Arial"/>
-                      </a:endParaRPr>
-                    </a:p>
-                  </a:txBody>
-                  <a:tcPr anchor="t" marL="36000" marR="36000" marT="36000" marB="36000">
-                    <a:lnL w="7200">
-                      <a:solidFill>
-                        <a:srgbClr val="000000"/>
-                      </a:solidFill>
-                      <a:prstDash val="solid"/>
-                    </a:lnL>
-                    <a:lnR w="7200">
-                      <a:solidFill>
-                        <a:srgbClr val="000000"/>
-                      </a:solidFill>
-                      <a:prstDash val="solid"/>
-                    </a:lnR>
-                    <a:lnT w="7200">
-                      <a:solidFill>
-                        <a:srgbClr val="000000"/>
-                      </a:solidFill>
-                      <a:prstDash val="solid"/>
-                    </a:lnT>
-                    <a:lnB w="7200">
-                      <a:solidFill>
-                        <a:srgbClr val="000000"/>
-                      </a:solidFill>
-                      <a:prstDash val="solid"/>
-                    </a:lnB>
-                    <a:noFill/>
-                  </a:tcPr>
-                </a:tc>
-                <a:tc>
-                  <a:txBody>
-                    <a:bodyPr lIns="36000" rIns="36000" tIns="36000" bIns="36000" anchor="t">
-                      <a:noAutofit/>
-                    </a:bodyPr>
-                    <a:p>
-                      <a:pPr>
-                        <a:lnSpc>
-                          <a:spcPct val="100000"/>
-                        </a:lnSpc>
-                      </a:pPr>
-                      <a:r>
-                        <a:rPr lang="en-US" sz="1800" b="0" u="none" strike="noStrike">
-                          <a:solidFill>
-                            <a:srgbClr val="000000"/>
-                          </a:solidFill>
-                          <a:effectLst/>
-                          <a:uFillTx/>
-                          <a:latin typeface="Arial"/>
-                        </a:rPr>
-                        <a:t>101 + 0.18–0.22 </a:t>
-                      </a:r>
-                      <a:endParaRPr lang="en-US" sz="1800" b="0" u="none" strike="noStrike">
-                        <a:solidFill>
-                          <a:srgbClr val="000000"/>
-                        </a:solidFill>
-                        <a:effectLst/>
-                        <a:uFillTx/>
-                        <a:latin typeface="Arial"/>
-                      </a:endParaRPr>
-                    </a:p>
-                  </a:txBody>
-                  <a:tcPr anchor="t" marL="36000" marR="36000" marT="36000" marB="36000">
-                    <a:lnL w="7200">
-                      <a:solidFill>
-                        <a:srgbClr val="000000"/>
-                      </a:solidFill>
-                      <a:prstDash val="solid"/>
-                    </a:lnL>
-                    <a:lnR w="7200">
-                      <a:solidFill>
-                        <a:srgbClr val="000000"/>
-                      </a:solidFill>
-                      <a:prstDash val="solid"/>
-                    </a:lnR>
-                    <a:lnT w="7200">
-                      <a:solidFill>
-                        <a:srgbClr val="000000"/>
-                      </a:solidFill>
-                      <a:prstDash val="solid"/>
-                    </a:lnT>
-                    <a:lnB w="7200">
-                      <a:solidFill>
-                        <a:srgbClr val="000000"/>
-                      </a:solidFill>
-                      <a:prstDash val="solid"/>
-                    </a:lnB>
-                    <a:noFill/>
-                  </a:tcPr>
-                </a:tc>
-              </a:tr>
-            </a:tbl>
-          </a:graphicData>
-        </a:graphic>
-      </p:graphicFrame>
-      <p:graphicFrame>
-        <p:nvGraphicFramePr>
-          <p:cNvPr id="107" name=""/>
-          <p:cNvGraphicFramePr/>
-          <p:nvPr/>
-        </p:nvGraphicFramePr>
-        <p:xfrm>
-          <a:off x="6944760" y="4153680"/>
-          <a:ext cx="5075280" cy="1733400"/>
-        </p:xfrm>
-        <a:graphic>
-          <a:graphicData uri="http://schemas.openxmlformats.org/drawingml/2006/table">
-            <a:tbl>
-              <a:tblPr/>
-              <a:tblGrid>
-                <a:gridCol w="2537640"/>
-                <a:gridCol w="2538000"/>
-              </a:tblGrid>
-              <a:tr h="346320">
-                <a:tc>
-                  <a:txBody>
-                    <a:bodyPr lIns="36000" rIns="36000" tIns="36000" bIns="36000" anchor="t">
-                      <a:noAutofit/>
-                    </a:bodyPr>
-                    <a:p>
-                      <a:pPr>
-                        <a:lnSpc>
-                          <a:spcPct val="100000"/>
-                        </a:lnSpc>
-                      </a:pPr>
-                      <a:r>
-                        <a:rPr lang="en-US" sz="1800" b="0" u="none" strike="noStrike">
-                          <a:solidFill>
-                            <a:srgbClr val="000000"/>
-                          </a:solidFill>
-                          <a:effectLst/>
-                          <a:uFillTx/>
-                          <a:latin typeface="Arial"/>
-                        </a:rPr>
-                        <a:t>You want</a:t>
-                      </a:r>
-                      <a:endParaRPr lang="en-US" sz="1800" b="0" u="none" strike="noStrike">
-                        <a:solidFill>
-                          <a:srgbClr val="000000"/>
-                        </a:solidFill>
-                        <a:effectLst/>
-                        <a:uFillTx/>
-                        <a:latin typeface="Arial"/>
-                      </a:endParaRPr>
-                    </a:p>
-                  </a:txBody>
-                  <a:tcPr anchor="t" marL="36000" marR="36000" marT="36000" marB="36000">
-                    <a:lnL w="7200">
-                      <a:solidFill>
-                        <a:srgbClr val="000000"/>
-                      </a:solidFill>
-                      <a:prstDash val="solid"/>
-                    </a:lnL>
-                    <a:lnR w="7200">
-                      <a:solidFill>
-                        <a:srgbClr val="000000"/>
-                      </a:solidFill>
-                      <a:prstDash val="solid"/>
-                    </a:lnR>
-                    <a:lnT w="7200">
-                      <a:solidFill>
-                        <a:srgbClr val="000000"/>
-                      </a:solidFill>
-                      <a:prstDash val="solid"/>
-                    </a:lnT>
-                    <a:lnB w="7200">
-                      <a:solidFill>
-                        <a:srgbClr val="000000"/>
-                      </a:solidFill>
-                      <a:prstDash val="solid"/>
-                    </a:lnB>
-                    <a:noFill/>
-                  </a:tcPr>
-                </a:tc>
-                <a:tc>
-                  <a:txBody>
-                    <a:bodyPr lIns="36000" rIns="36000" tIns="36000" bIns="36000" anchor="t">
-                      <a:noAutofit/>
-                    </a:bodyPr>
-                    <a:p>
-                      <a:pPr>
-                        <a:lnSpc>
-                          <a:spcPct val="100000"/>
-                        </a:lnSpc>
-                      </a:pPr>
-                      <a:r>
-                        <a:rPr lang="en-US" sz="1800" b="0" u="none" strike="noStrike">
-                          <a:solidFill>
-                            <a:srgbClr val="000000"/>
-                          </a:solidFill>
-                          <a:effectLst/>
-                          <a:uFillTx/>
-                          <a:latin typeface="Arial"/>
-                        </a:rPr>
-                        <a:t>Do this</a:t>
-                      </a:r>
-                      <a:endParaRPr lang="en-US" sz="1800" b="0" u="none" strike="noStrike">
-                        <a:solidFill>
-                          <a:srgbClr val="000000"/>
-                        </a:solidFill>
-                        <a:effectLst/>
-                        <a:uFillTx/>
-                        <a:latin typeface="Arial"/>
-                      </a:endParaRPr>
-                    </a:p>
-                  </a:txBody>
-                  <a:tcPr anchor="t" marL="36000" marR="36000" marT="36000" marB="36000">
-                    <a:lnL w="7200">
-                      <a:solidFill>
-                        <a:srgbClr val="000000"/>
-                      </a:solidFill>
-                      <a:prstDash val="solid"/>
-                    </a:lnL>
-                    <a:lnR w="7200">
-                      <a:solidFill>
-                        <a:srgbClr val="000000"/>
-                      </a:solidFill>
-                      <a:prstDash val="solid"/>
-                    </a:lnR>
-                    <a:lnT w="7200">
-                      <a:solidFill>
-                        <a:srgbClr val="000000"/>
-                      </a:solidFill>
-                      <a:prstDash val="solid"/>
-                    </a:lnT>
-                    <a:lnB w="7200">
-                      <a:solidFill>
-                        <a:srgbClr val="000000"/>
-                      </a:solidFill>
-                      <a:prstDash val="solid"/>
-                    </a:lnB>
-                    <a:noFill/>
-                  </a:tcPr>
-                </a:tc>
-              </a:tr>
-              <a:tr h="346320">
-                <a:tc>
-                  <a:txBody>
-                    <a:bodyPr lIns="36000" rIns="36000" tIns="36000" bIns="36000" anchor="t">
-                      <a:noAutofit/>
-                    </a:bodyPr>
-                    <a:p>
-                      <a:pPr>
-                        <a:lnSpc>
-                          <a:spcPct val="100000"/>
-                        </a:lnSpc>
-                      </a:pPr>
-                      <a:r>
-                        <a:rPr lang="en-US" sz="1800" b="0" u="none" strike="noStrike">
-                          <a:solidFill>
-                            <a:srgbClr val="000000"/>
-                          </a:solidFill>
-                          <a:effectLst/>
-                          <a:uFillTx/>
-                          <a:latin typeface="Arial"/>
-                        </a:rPr>
-                        <a:t>More continuity </a:t>
-                      </a:r>
-                      <a:endParaRPr lang="en-US" sz="1800" b="0" u="none" strike="noStrike">
-                        <a:solidFill>
-                          <a:srgbClr val="000000"/>
-                        </a:solidFill>
-                        <a:effectLst/>
-                        <a:uFillTx/>
-                        <a:latin typeface="Arial"/>
-                      </a:endParaRPr>
-                    </a:p>
-                  </a:txBody>
-                  <a:tcPr anchor="t" marL="36000" marR="36000" marT="36000" marB="36000">
-                    <a:lnL w="7200">
-                      <a:solidFill>
-                        <a:srgbClr val="000000"/>
-                      </a:solidFill>
-                      <a:prstDash val="solid"/>
-                    </a:lnL>
-                    <a:lnR w="7200">
-                      <a:solidFill>
-                        <a:srgbClr val="000000"/>
-                      </a:solidFill>
-                      <a:prstDash val="solid"/>
-                    </a:lnR>
-                    <a:lnT w="7200">
-                      <a:solidFill>
-                        <a:srgbClr val="000000"/>
-                      </a:solidFill>
-                      <a:prstDash val="solid"/>
-                    </a:lnT>
-                    <a:lnB w="7200">
-                      <a:solidFill>
-                        <a:srgbClr val="000000"/>
-                      </a:solidFill>
-                      <a:prstDash val="solid"/>
-                    </a:lnB>
-                    <a:noFill/>
-                  </a:tcPr>
-                </a:tc>
-                <a:tc>
-                  <a:txBody>
-                    <a:bodyPr lIns="36000" rIns="36000" tIns="36000" bIns="36000" anchor="t">
-                      <a:noAutofit/>
-                    </a:bodyPr>
-                    <a:p>
-                      <a:pPr>
-                        <a:lnSpc>
-                          <a:spcPct val="100000"/>
-                        </a:lnSpc>
-                      </a:pPr>
-                      <a:r>
-                        <a:rPr lang="en-US" sz="1800" b="0" u="none" strike="noStrike">
-                          <a:solidFill>
-                            <a:srgbClr val="000000"/>
-                          </a:solidFill>
-                          <a:effectLst/>
-                          <a:uFillTx/>
-                          <a:latin typeface="Arial"/>
-                        </a:rPr>
-                        <a:t>Increase offset </a:t>
-                      </a:r>
-                      <a:endParaRPr lang="en-US" sz="1800" b="0" u="none" strike="noStrike">
-                        <a:solidFill>
-                          <a:srgbClr val="000000"/>
-                        </a:solidFill>
-                        <a:effectLst/>
-                        <a:uFillTx/>
-                        <a:latin typeface="Arial"/>
-                      </a:endParaRPr>
-                    </a:p>
-                  </a:txBody>
-                  <a:tcPr anchor="t" marL="36000" marR="36000" marT="36000" marB="36000">
-                    <a:lnL w="7200">
-                      <a:solidFill>
-                        <a:srgbClr val="000000"/>
-                      </a:solidFill>
-                      <a:prstDash val="solid"/>
-                    </a:lnL>
-                    <a:lnR w="7200">
-                      <a:solidFill>
-                        <a:srgbClr val="000000"/>
-                      </a:solidFill>
-                      <a:prstDash val="solid"/>
-                    </a:lnR>
-                    <a:lnT w="7200">
-                      <a:solidFill>
-                        <a:srgbClr val="000000"/>
-                      </a:solidFill>
-                      <a:prstDash val="solid"/>
-                    </a:lnT>
-                    <a:lnB w="7200">
-                      <a:solidFill>
-                        <a:srgbClr val="000000"/>
-                      </a:solidFill>
-                      <a:prstDash val="solid"/>
-                    </a:lnB>
-                    <a:noFill/>
-                  </a:tcPr>
-                </a:tc>
-              </a:tr>
-              <a:tr h="346320">
-                <a:tc>
-                  <a:txBody>
-                    <a:bodyPr lIns="36000" rIns="36000" tIns="36000" bIns="36000" anchor="t">
-                      <a:noAutofit/>
-                    </a:bodyPr>
-                    <a:p>
-                      <a:pPr>
-                        <a:lnSpc>
-                          <a:spcPct val="100000"/>
-                        </a:lnSpc>
-                      </a:pPr>
-                      <a:r>
-                        <a:rPr lang="en-US" sz="1800" b="0" u="none" strike="noStrike">
-                          <a:solidFill>
-                            <a:srgbClr val="000000"/>
-                          </a:solidFill>
-                          <a:effectLst/>
-                          <a:uFillTx/>
-                          <a:latin typeface="Arial"/>
-                        </a:rPr>
-                        <a:t>Less noise </a:t>
-                      </a:r>
-                      <a:endParaRPr lang="en-US" sz="1800" b="0" u="none" strike="noStrike">
-                        <a:solidFill>
-                          <a:srgbClr val="000000"/>
-                        </a:solidFill>
-                        <a:effectLst/>
-                        <a:uFillTx/>
-                        <a:latin typeface="Arial"/>
-                      </a:endParaRPr>
-                    </a:p>
-                  </a:txBody>
-                  <a:tcPr anchor="t" marL="36000" marR="36000" marT="36000" marB="36000">
-                    <a:lnL w="7200">
-                      <a:solidFill>
-                        <a:srgbClr val="000000"/>
-                      </a:solidFill>
-                      <a:prstDash val="solid"/>
-                    </a:lnL>
-                    <a:lnR w="7200">
-                      <a:solidFill>
-                        <a:srgbClr val="000000"/>
-                      </a:solidFill>
-                      <a:prstDash val="solid"/>
-                    </a:lnR>
-                    <a:lnT w="7200">
-                      <a:solidFill>
-                        <a:srgbClr val="000000"/>
-                      </a:solidFill>
-                      <a:prstDash val="solid"/>
-                    </a:lnT>
-                    <a:lnB w="7200">
-                      <a:solidFill>
-                        <a:srgbClr val="000000"/>
-                      </a:solidFill>
-                      <a:prstDash val="solid"/>
-                    </a:lnB>
-                    <a:noFill/>
-                  </a:tcPr>
-                </a:tc>
-                <a:tc>
-                  <a:txBody>
-                    <a:bodyPr lIns="36000" rIns="36000" tIns="36000" bIns="36000" anchor="t">
-                      <a:noAutofit/>
-                    </a:bodyPr>
-                    <a:p>
-                      <a:pPr>
-                        <a:lnSpc>
-                          <a:spcPct val="100000"/>
-                        </a:lnSpc>
-                      </a:pPr>
-                      <a:r>
-                        <a:rPr lang="en-US" sz="1800" b="0" u="none" strike="noStrike">
-                          <a:solidFill>
-                            <a:srgbClr val="000000"/>
-                          </a:solidFill>
-                          <a:effectLst/>
-                          <a:uFillTx/>
-                          <a:latin typeface="Arial"/>
-                        </a:rPr>
-                        <a:t>Decrease offset </a:t>
-                      </a:r>
-                      <a:endParaRPr lang="en-US" sz="1800" b="0" u="none" strike="noStrike">
-                        <a:solidFill>
-                          <a:srgbClr val="000000"/>
-                        </a:solidFill>
-                        <a:effectLst/>
-                        <a:uFillTx/>
-                        <a:latin typeface="Arial"/>
-                      </a:endParaRPr>
-                    </a:p>
-                  </a:txBody>
-                  <a:tcPr anchor="t" marL="36000" marR="36000" marT="36000" marB="36000">
-                    <a:lnL w="7200">
-                      <a:solidFill>
-                        <a:srgbClr val="000000"/>
-                      </a:solidFill>
-                      <a:prstDash val="solid"/>
-                    </a:lnL>
-                    <a:lnR w="7200">
-                      <a:solidFill>
-                        <a:srgbClr val="000000"/>
-                      </a:solidFill>
-                      <a:prstDash val="solid"/>
-                    </a:lnR>
-                    <a:lnT w="7200">
-                      <a:solidFill>
-                        <a:srgbClr val="000000"/>
-                      </a:solidFill>
-                      <a:prstDash val="solid"/>
-                    </a:lnT>
-                    <a:lnB w="7200">
-                      <a:solidFill>
-                        <a:srgbClr val="000000"/>
-                      </a:solidFill>
-                      <a:prstDash val="solid"/>
-                    </a:lnB>
-                    <a:noFill/>
-                  </a:tcPr>
-                </a:tc>
-              </a:tr>
-              <a:tr h="346320">
-                <a:tc>
-                  <a:txBody>
-                    <a:bodyPr lIns="36000" rIns="36000" tIns="36000" bIns="36000" anchor="t">
-                      <a:noAutofit/>
-                    </a:bodyPr>
-                    <a:p>
-                      <a:pPr>
-                        <a:lnSpc>
-                          <a:spcPct val="100000"/>
-                        </a:lnSpc>
-                      </a:pPr>
-                      <a:r>
-                        <a:rPr lang="en-US" sz="1800" b="0" u="none" strike="noStrike">
-                          <a:solidFill>
-                            <a:srgbClr val="000000"/>
-                          </a:solidFill>
-                          <a:effectLst/>
-                          <a:uFillTx/>
-                          <a:latin typeface="Arial"/>
-                        </a:rPr>
-                        <a:t>More sensitivity </a:t>
-                      </a:r>
-                      <a:endParaRPr lang="en-US" sz="1800" b="0" u="none" strike="noStrike">
-                        <a:solidFill>
-                          <a:srgbClr val="000000"/>
-                        </a:solidFill>
-                        <a:effectLst/>
-                        <a:uFillTx/>
-                        <a:latin typeface="Arial"/>
-                      </a:endParaRPr>
-                    </a:p>
-                  </a:txBody>
-                  <a:tcPr anchor="t" marL="36000" marR="36000" marT="36000" marB="36000">
-                    <a:lnL w="7200">
-                      <a:solidFill>
-                        <a:srgbClr val="000000"/>
-                      </a:solidFill>
-                      <a:prstDash val="solid"/>
-                    </a:lnL>
-                    <a:lnR w="7200">
-                      <a:solidFill>
-                        <a:srgbClr val="000000"/>
-                      </a:solidFill>
-                      <a:prstDash val="solid"/>
-                    </a:lnR>
-                    <a:lnT w="7200">
-                      <a:solidFill>
-                        <a:srgbClr val="000000"/>
-                      </a:solidFill>
-                      <a:prstDash val="solid"/>
-                    </a:lnT>
-                    <a:lnB w="7200">
-                      <a:solidFill>
-                        <a:srgbClr val="000000"/>
-                      </a:solidFill>
-                      <a:prstDash val="solid"/>
-                    </a:lnB>
-                    <a:noFill/>
-                  </a:tcPr>
-                </a:tc>
-                <a:tc>
-                  <a:txBody>
-                    <a:bodyPr lIns="36000" rIns="36000" tIns="36000" bIns="36000" anchor="t">
-                      <a:noAutofit/>
-                    </a:bodyPr>
-                    <a:p>
-                      <a:pPr>
-                        <a:lnSpc>
-                          <a:spcPct val="100000"/>
-                        </a:lnSpc>
-                      </a:pPr>
-                      <a:r>
-                        <a:rPr lang="en-US" sz="1800" b="0" u="none" strike="noStrike">
-                          <a:solidFill>
-                            <a:srgbClr val="000000"/>
-                          </a:solidFill>
-                          <a:effectLst/>
-                          <a:uFillTx/>
-                          <a:latin typeface="Arial"/>
-                        </a:rPr>
-                        <a:t>Decrease block size </a:t>
-                      </a:r>
-                      <a:endParaRPr lang="en-US" sz="1800" b="0" u="none" strike="noStrike">
-                        <a:solidFill>
-                          <a:srgbClr val="000000"/>
-                        </a:solidFill>
-                        <a:effectLst/>
-                        <a:uFillTx/>
-                        <a:latin typeface="Arial"/>
-                      </a:endParaRPr>
-                    </a:p>
-                  </a:txBody>
-                  <a:tcPr anchor="t" marL="36000" marR="36000" marT="36000" marB="36000">
-                    <a:lnL w="7200">
-                      <a:solidFill>
-                        <a:srgbClr val="000000"/>
-                      </a:solidFill>
-                      <a:prstDash val="solid"/>
-                    </a:lnL>
-                    <a:lnR w="7200">
-                      <a:solidFill>
-                        <a:srgbClr val="000000"/>
-                      </a:solidFill>
-                      <a:prstDash val="solid"/>
-                    </a:lnR>
-                    <a:lnT w="7200">
-                      <a:solidFill>
-                        <a:srgbClr val="000000"/>
-                      </a:solidFill>
-                      <a:prstDash val="solid"/>
-                    </a:lnT>
-                    <a:lnB w="7200">
-                      <a:solidFill>
-                        <a:srgbClr val="000000"/>
-                      </a:solidFill>
-                      <a:prstDash val="solid"/>
-                    </a:lnB>
-                    <a:noFill/>
-                  </a:tcPr>
-                </a:tc>
-              </a:tr>
-              <a:tr h="346320">
-                <a:tc>
-                  <a:txBody>
-                    <a:bodyPr lIns="36000" rIns="36000" tIns="36000" bIns="36000" anchor="t">
-                      <a:noAutofit/>
-                    </a:bodyPr>
-                    <a:p>
-                      <a:pPr>
-                        <a:lnSpc>
-                          <a:spcPct val="100000"/>
-                        </a:lnSpc>
-                      </a:pPr>
-                      <a:r>
-                        <a:rPr lang="en-US" sz="1800" b="0" u="none" strike="noStrike">
-                          <a:solidFill>
-                            <a:srgbClr val="000000"/>
-                          </a:solidFill>
-                          <a:effectLst/>
-                          <a:uFillTx/>
-                          <a:latin typeface="Arial"/>
-                        </a:rPr>
-                        <a:t>More smooth mask </a:t>
-                      </a:r>
-                      <a:endParaRPr lang="en-US" sz="1800" b="0" u="none" strike="noStrike">
-                        <a:solidFill>
-                          <a:srgbClr val="000000"/>
-                        </a:solidFill>
-                        <a:effectLst/>
-                        <a:uFillTx/>
-                        <a:latin typeface="Arial"/>
-                      </a:endParaRPr>
-                    </a:p>
-                  </a:txBody>
-                  <a:tcPr anchor="t" marL="36000" marR="36000" marT="36000" marB="36000">
-                    <a:lnL w="7200">
-                      <a:solidFill>
-                        <a:srgbClr val="000000"/>
-                      </a:solidFill>
-                      <a:prstDash val="solid"/>
-                    </a:lnL>
-                    <a:lnR w="7200">
-                      <a:solidFill>
-                        <a:srgbClr val="000000"/>
-                      </a:solidFill>
-                      <a:prstDash val="solid"/>
-                    </a:lnR>
-                    <a:lnT w="7200">
-                      <a:solidFill>
-                        <a:srgbClr val="000000"/>
-                      </a:solidFill>
-                      <a:prstDash val="solid"/>
-                    </a:lnT>
-                    <a:lnB w="7200">
-                      <a:solidFill>
-                        <a:srgbClr val="000000"/>
-                      </a:solidFill>
-                      <a:prstDash val="solid"/>
-                    </a:lnB>
-                    <a:noFill/>
-                  </a:tcPr>
-                </a:tc>
-                <a:tc>
-                  <a:txBody>
-                    <a:bodyPr lIns="36000" rIns="36000" tIns="36000" bIns="36000" anchor="t">
-                      <a:noAutofit/>
-                    </a:bodyPr>
-                    <a:p>
-                      <a:pPr>
-                        <a:lnSpc>
-                          <a:spcPct val="100000"/>
-                        </a:lnSpc>
-                      </a:pPr>
-                      <a:r>
-                        <a:rPr lang="en-US" sz="1800" b="0" u="none" strike="noStrike">
-                          <a:solidFill>
-                            <a:srgbClr val="000000"/>
-                          </a:solidFill>
-                          <a:effectLst/>
-                          <a:uFillTx/>
-                          <a:latin typeface="Arial"/>
-                        </a:rPr>
-                        <a:t>Increase block size </a:t>
-                      </a:r>
-                      <a:endParaRPr lang="en-US" sz="1800" b="0" u="none" strike="noStrike">
-                        <a:solidFill>
-                          <a:srgbClr val="000000"/>
-                        </a:solidFill>
-                        <a:effectLst/>
-                        <a:uFillTx/>
-                        <a:latin typeface="Arial"/>
-                      </a:endParaRPr>
-                    </a:p>
-                  </a:txBody>
-                  <a:tcPr anchor="t" marL="36000" marR="36000" marT="36000" marB="36000">
-                    <a:lnL w="7200">
-                      <a:solidFill>
-                        <a:srgbClr val="000000"/>
-                      </a:solidFill>
-                      <a:prstDash val="solid"/>
-                    </a:lnL>
-                    <a:lnR w="7200">
-                      <a:solidFill>
-                        <a:srgbClr val="000000"/>
-                      </a:solidFill>
-                      <a:prstDash val="solid"/>
-                    </a:lnR>
-                    <a:lnT w="7200">
-                      <a:solidFill>
-                        <a:srgbClr val="000000"/>
-                      </a:solidFill>
-                      <a:prstDash val="solid"/>
-                    </a:lnT>
-                    <a:lnB w="7200">
-                      <a:solidFill>
-                        <a:srgbClr val="000000"/>
-                      </a:solidFill>
-                      <a:prstDash val="solid"/>
-                    </a:lnB>
-                    <a:noFill/>
-                  </a:tcPr>
-                </a:tc>
-              </a:tr>
-            </a:tbl>
-          </a:graphicData>
-        </a:graphic>
-      </p:graphicFrame>
     </p:spTree>
   </p:cSld>
   <mc:AlternateContent>
@@ -10628,17 +7302,13 @@
       </p:grpSpPr>
       <p:sp>
         <p:nvSpPr>
-          <p:cNvPr id="108" name="PlaceHolder 1"/>
-          <p:cNvSpPr>
-            <a:spLocks noGrp="1"/>
-          </p:cNvSpPr>
-          <p:nvPr>
-            <p:ph type="title"/>
-          </p:nvPr>
+          <p:cNvPr id="104" name="PlaceHolder 6"/>
+          <p:cNvSpPr txBox="1"/>
+          <p:nvPr/>
         </p:nvSpPr>
         <p:spPr>
           <a:xfrm>
-            <a:off x="609480" y="137880"/>
+            <a:off x="156960" y="8280"/>
             <a:ext cx="2586240" cy="677520"/>
           </a:xfrm>
           <a:prstGeom prst="rect">
@@ -10654,11 +7324,10 @@
             <a:spAutoFit/>
           </a:bodyPr>
           <a:p>
-            <a:pPr indent="0" algn="ctr">
-              <a:lnSpc>
-                <a:spcPct val="100000"/>
-              </a:lnSpc>
-              <a:buNone/>
+            <a:pPr algn="ctr">
+              <a:lnSpc>
+                <a:spcPct val="100000"/>
+              </a:lnSpc>
               <a:tabLst>
                 <a:tab algn="l" pos="0"/>
               </a:tabLst>
@@ -10672,7 +7341,7 @@
                 <a:uFillTx/>
                 <a:latin typeface="Arial"/>
               </a:rPr>
-              <a:t>0H 2</a:t>
+              <a:t>Interface</a:t>
             </a:r>
             <a:endParaRPr lang="en-US" sz="4400" b="0" u="none" strike="noStrike">
               <a:solidFill>
@@ -10687,365 +7356,14 @@
       </p:sp>
       <p:sp>
         <p:nvSpPr>
-          <p:cNvPr id="109" name="Rectangles 104"/>
-          <p:cNvSpPr/>
+          <p:cNvPr id="105" name=""/>
+          <p:cNvSpPr txBox="1"/>
           <p:nvPr/>
         </p:nvSpPr>
         <p:spPr>
           <a:xfrm>
-            <a:off x="0" y="1143000"/>
-            <a:ext cx="2284560" cy="5249880"/>
-          </a:xfrm>
-          <a:prstGeom prst="rect">
-            <a:avLst/>
-          </a:prstGeom>
-          <a:solidFill>
-            <a:srgbClr val="729fcf"/>
-          </a:solidFill>
-          <a:ln w="0">
-            <a:solidFill>
-              <a:srgbClr val="3465a4"/>
-            </a:solidFill>
-          </a:ln>
-        </p:spPr>
-        <p:style>
-          <a:lnRef idx="0"/>
-          <a:fillRef idx="0"/>
-          <a:effectRef idx="0"/>
-          <a:fontRef idx="minor"/>
-        </p:style>
-        <p:txBody>
-          <a:bodyPr lIns="90000" rIns="90000" tIns="45000" bIns="45000" anchor="ctr">
-            <a:noAutofit/>
-          </a:bodyPr>
-          <a:p>
-            <a:pPr defTabSz="914400">
-              <a:lnSpc>
-                <a:spcPct val="100000"/>
-              </a:lnSpc>
-            </a:pPr>
-            <a:r>
-              <a:rPr lang="en-US" sz="1400" b="1" u="none" strike="noStrike">
-                <a:solidFill>
-                  <a:srgbClr val="000000"/>
-                </a:solidFill>
-                <a:effectLst/>
-                <a:uFillTx/>
-                <a:latin typeface="Arial"/>
-                <a:ea typeface="SimSun"/>
-              </a:rPr>
-              <a:t>Erosion = 5</a:t>
-            </a:r>
-            <a:endParaRPr lang="en-US" sz="1400" b="0" u="none" strike="noStrike">
-              <a:solidFill>
-                <a:srgbClr val="000000"/>
-              </a:solidFill>
-              <a:effectLst/>
-              <a:uFillTx/>
-              <a:latin typeface="Arial"/>
-            </a:endParaRPr>
-          </a:p>
-          <a:p>
-            <a:pPr defTabSz="914400">
-              <a:lnSpc>
-                <a:spcPct val="100000"/>
-              </a:lnSpc>
-            </a:pPr>
-            <a:r>
-              <a:rPr lang="en-US" sz="1400" b="1" u="none" strike="noStrike">
-                <a:solidFill>
-                  <a:srgbClr val="000000"/>
-                </a:solidFill>
-                <a:effectLst/>
-                <a:uFillTx/>
-                <a:latin typeface="Arial"/>
-                <a:ea typeface="SimSun"/>
-              </a:rPr>
-              <a:t>Thresholding = 0.002</a:t>
-            </a:r>
-            <a:endParaRPr lang="en-US" sz="1400" b="0" u="none" strike="noStrike">
-              <a:solidFill>
-                <a:srgbClr val="000000"/>
-              </a:solidFill>
-              <a:effectLst/>
-              <a:uFillTx/>
-              <a:latin typeface="Arial"/>
-            </a:endParaRPr>
-          </a:p>
-          <a:p>
-            <a:pPr defTabSz="914400">
-              <a:lnSpc>
-                <a:spcPct val="100000"/>
-              </a:lnSpc>
-            </a:pPr>
-            <a:r>
-              <a:rPr lang="en-US" sz="1400" b="1" u="none" strike="noStrike">
-                <a:solidFill>
-                  <a:srgbClr val="000000"/>
-                </a:solidFill>
-                <a:effectLst/>
-                <a:uFillTx/>
-                <a:latin typeface="Arial"/>
-                <a:ea typeface="SimSun"/>
-              </a:rPr>
-              <a:t>margin um = 0.8</a:t>
-            </a:r>
-            <a:endParaRPr lang="en-US" sz="1400" b="0" u="none" strike="noStrike">
-              <a:solidFill>
-                <a:srgbClr val="000000"/>
-              </a:solidFill>
-              <a:effectLst/>
-              <a:uFillTx/>
-              <a:latin typeface="Arial"/>
-            </a:endParaRPr>
-          </a:p>
-          <a:p>
-            <a:pPr defTabSz="914400">
-              <a:lnSpc>
-                <a:spcPct val="100000"/>
-              </a:lnSpc>
-            </a:pPr>
-            <a:r>
-              <a:rPr lang="en-US" sz="1400" b="1" u="none" strike="noStrike">
-                <a:solidFill>
-                  <a:srgbClr val="000000"/>
-                </a:solidFill>
-                <a:effectLst/>
-                <a:uFillTx/>
-                <a:latin typeface="Arial"/>
-                <a:ea typeface="SimSun"/>
-              </a:rPr>
-              <a:t>overlap alpha = 0.1</a:t>
-            </a:r>
-            <a:endParaRPr lang="en-US" sz="1400" b="0" u="none" strike="noStrike">
-              <a:solidFill>
-                <a:srgbClr val="000000"/>
-              </a:solidFill>
-              <a:effectLst/>
-              <a:uFillTx/>
-              <a:latin typeface="Arial"/>
-            </a:endParaRPr>
-          </a:p>
-          <a:p>
-            <a:pPr defTabSz="914400">
-              <a:lnSpc>
-                <a:spcPct val="100000"/>
-              </a:lnSpc>
-            </a:pPr>
-            <a:r>
-              <a:rPr lang="en-US" sz="1400" b="1" u="none" strike="noStrike">
-                <a:solidFill>
-                  <a:srgbClr val="000000"/>
-                </a:solidFill>
-                <a:effectLst/>
-                <a:uFillTx/>
-                <a:latin typeface="Arial"/>
-                <a:ea typeface="SimSun"/>
-              </a:rPr>
-              <a:t>viz min voxels = 2500</a:t>
-            </a:r>
-            <a:endParaRPr lang="en-US" sz="1400" b="0" u="none" strike="noStrike">
-              <a:solidFill>
-                <a:srgbClr val="000000"/>
-              </a:solidFill>
-              <a:effectLst/>
-              <a:uFillTx/>
-              <a:latin typeface="Arial"/>
-            </a:endParaRPr>
-          </a:p>
-          <a:p>
-            <a:pPr defTabSz="914400">
-              <a:lnSpc>
-                <a:spcPct val="100000"/>
-              </a:lnSpc>
-            </a:pPr>
-            <a:r>
-              <a:rPr lang="en-US" sz="1400" b="1" u="none" strike="noStrike">
-                <a:solidFill>
-                  <a:srgbClr val="000000"/>
-                </a:solidFill>
-                <a:effectLst/>
-                <a:uFillTx/>
-                <a:latin typeface="Arial"/>
-                <a:ea typeface="SimSun"/>
-              </a:rPr>
-              <a:t>max_gap_UM = 8</a:t>
-            </a:r>
-            <a:endParaRPr lang="en-US" sz="1400" b="0" u="none" strike="noStrike">
-              <a:solidFill>
-                <a:srgbClr val="000000"/>
-              </a:solidFill>
-              <a:effectLst/>
-              <a:uFillTx/>
-              <a:latin typeface="Arial"/>
-            </a:endParaRPr>
-          </a:p>
-          <a:p>
-            <a:pPr defTabSz="914400">
-              <a:lnSpc>
-                <a:spcPct val="100000"/>
-              </a:lnSpc>
-            </a:pPr>
-            <a:r>
-              <a:rPr lang="en-US" sz="1400" b="1" u="none" strike="noStrike">
-                <a:solidFill>
-                  <a:srgbClr val="000000"/>
-                </a:solidFill>
-                <a:effectLst/>
-                <a:uFillTx/>
-                <a:latin typeface="Arial"/>
-                <a:ea typeface="SimSun"/>
-              </a:rPr>
-              <a:t>Closing=8</a:t>
-            </a:r>
-            <a:endParaRPr lang="en-US" sz="1400" b="0" u="none" strike="noStrike">
-              <a:solidFill>
-                <a:srgbClr val="000000"/>
-              </a:solidFill>
-              <a:effectLst/>
-              <a:uFillTx/>
-              <a:latin typeface="Arial"/>
-            </a:endParaRPr>
-          </a:p>
-          <a:p>
-            <a:pPr defTabSz="914400">
-              <a:lnSpc>
-                <a:spcPct val="100000"/>
-              </a:lnSpc>
-            </a:pPr>
-            <a:r>
-              <a:rPr lang="en-US" sz="1400" b="1" u="none" strike="noStrike">
-                <a:solidFill>
-                  <a:srgbClr val="000000"/>
-                </a:solidFill>
-                <a:effectLst/>
-                <a:uFillTx/>
-                <a:latin typeface="Arial"/>
-                <a:ea typeface="SimSun"/>
-              </a:rPr>
-              <a:t>Cos_min =0.7</a:t>
-            </a:r>
-            <a:endParaRPr lang="en-US" sz="1400" b="0" u="none" strike="noStrike">
-              <a:solidFill>
-                <a:srgbClr val="000000"/>
-              </a:solidFill>
-              <a:effectLst/>
-              <a:uFillTx/>
-              <a:latin typeface="Arial"/>
-            </a:endParaRPr>
-          </a:p>
-          <a:p>
-            <a:pPr defTabSz="914400">
-              <a:lnSpc>
-                <a:spcPct val="100000"/>
-              </a:lnSpc>
-            </a:pPr>
-            <a:r>
-              <a:rPr lang="en-US" sz="1400" b="1" u="none" strike="noStrike">
-                <a:solidFill>
-                  <a:srgbClr val="000000"/>
-                </a:solidFill>
-                <a:effectLst/>
-                <a:uFillTx/>
-                <a:latin typeface="Arial"/>
-                <a:ea typeface="SimSun"/>
-              </a:rPr>
-              <a:t>Intesity_min_frac =0.45</a:t>
-            </a:r>
-            <a:endParaRPr lang="en-US" sz="1400" b="0" u="none" strike="noStrike">
-              <a:solidFill>
-                <a:srgbClr val="000000"/>
-              </a:solidFill>
-              <a:effectLst/>
-              <a:uFillTx/>
-              <a:latin typeface="Arial"/>
-            </a:endParaRPr>
-          </a:p>
-          <a:p>
-            <a:pPr defTabSz="914400">
-              <a:lnSpc>
-                <a:spcPct val="100000"/>
-              </a:lnSpc>
-            </a:pPr>
-            <a:r>
-              <a:rPr lang="en-US" sz="1400" b="1" u="none" strike="noStrike">
-                <a:solidFill>
-                  <a:srgbClr val="000000"/>
-                </a:solidFill>
-                <a:effectLst/>
-                <a:uFillTx/>
-                <a:latin typeface="Arial"/>
-                <a:ea typeface="SimSun"/>
-              </a:rPr>
-              <a:t>thres_block_ size=101 </a:t>
-            </a:r>
-            <a:endParaRPr lang="en-US" sz="1400" b="0" u="none" strike="noStrike">
-              <a:solidFill>
-                <a:srgbClr val="000000"/>
-              </a:solidFill>
-              <a:effectLst/>
-              <a:uFillTx/>
-              <a:latin typeface="Arial"/>
-            </a:endParaRPr>
-          </a:p>
-          <a:p>
-            <a:pPr defTabSz="914400">
-              <a:lnSpc>
-                <a:spcPct val="100000"/>
-              </a:lnSpc>
-            </a:pPr>
-            <a:r>
-              <a:rPr lang="en-US" sz="1400" b="1" u="none" strike="noStrike">
-                <a:solidFill>
-                  <a:srgbClr val="000000"/>
-                </a:solidFill>
-                <a:effectLst/>
-                <a:uFillTx/>
-                <a:latin typeface="Arial"/>
-                <a:ea typeface="SimSun"/>
-              </a:rPr>
-              <a:t>thres_offset_mult=0.2</a:t>
-            </a:r>
-            <a:endParaRPr lang="en-US" sz="1400" b="0" u="none" strike="noStrike">
-              <a:solidFill>
-                <a:srgbClr val="000000"/>
-              </a:solidFill>
-              <a:effectLst/>
-              <a:uFillTx/>
-              <a:latin typeface="Arial"/>
-            </a:endParaRPr>
-          </a:p>
-          <a:p>
-            <a:pPr defTabSz="914400">
-              <a:lnSpc>
-                <a:spcPct val="100000"/>
-              </a:lnSpc>
-            </a:pPr>
-            <a:endParaRPr lang="en-US" sz="1800" b="0" u="none" strike="noStrike">
-              <a:solidFill>
-                <a:srgbClr val="000000"/>
-              </a:solidFill>
-              <a:effectLst/>
-              <a:uFillTx/>
-              <a:latin typeface="Arial"/>
-            </a:endParaRPr>
-          </a:p>
-        </p:txBody>
-      </p:sp>
-      <p:pic>
-        <p:nvPicPr>
-          <p:cNvPr id="110" name=""/>
-          <p:cNvPicPr/>
-          <p:nvPr/>
-        </p:nvPicPr>
-        <p:blipFill>
-          <a:blip r:embed="rId1"/>
-          <a:stretch/>
-        </p:blipFill>
-        <p:spPr>
-          <a:xfrm>
-            <a:off x="2286000" y="1371600"/>
-            <a:ext cx="5356800" cy="4568400"/>
+            <a:off x="228600" y="685800"/>
+            <a:ext cx="11658960" cy="5715000"/>
           </a:xfrm>
           <a:prstGeom prst="rect">
             <a:avLst/>
@@ -11055,31 +7373,179 @@
             <a:noFill/>
           </a:ln>
         </p:spPr>
-      </p:pic>
-      <p:pic>
-        <p:nvPicPr>
-          <p:cNvPr id="111" name=""/>
-          <p:cNvPicPr/>
-          <p:nvPr/>
-        </p:nvPicPr>
-        <p:blipFill>
-          <a:blip r:embed="rId2"/>
-          <a:stretch/>
-        </p:blipFill>
-        <p:spPr>
-          <a:xfrm>
-            <a:off x="6629400" y="1371600"/>
-            <a:ext cx="5359320" cy="4570560"/>
-          </a:xfrm>
-          <a:prstGeom prst="rect">
-            <a:avLst/>
-          </a:prstGeom>
-          <a:noFill/>
-          <a:ln w="0">
-            <a:noFill/>
-          </a:ln>
-        </p:spPr>
-      </p:pic>
+        <p:txBody>
+          <a:bodyPr lIns="90000" rIns="90000" tIns="45000" bIns="45000" anchor="t">
+            <a:spAutoFit/>
+          </a:bodyPr>
+          <a:p>
+            <a:endParaRPr lang="en-US" sz="1800" b="0" u="none" strike="noStrike">
+              <a:solidFill>
+                <a:srgbClr val="000000"/>
+              </a:solidFill>
+              <a:effectLst/>
+              <a:uFillTx/>
+              <a:latin typeface="Arial"/>
+            </a:endParaRPr>
+          </a:p>
+          <a:p>
+            <a:r>
+              <a:rPr lang="en-US" sz="1800" b="1" u="none" strike="noStrike">
+                <a:solidFill>
+                  <a:srgbClr val="000000"/>
+                </a:solidFill>
+                <a:effectLst/>
+                <a:uFillTx/>
+                <a:latin typeface="Arial"/>
+              </a:rPr>
+              <a:t>Normalize image </a:t>
+            </a:r>
+            <a:endParaRPr lang="en-US" sz="1800" b="0" u="none" strike="noStrike">
+              <a:solidFill>
+                <a:srgbClr val="000000"/>
+              </a:solidFill>
+              <a:effectLst/>
+              <a:uFillTx/>
+              <a:latin typeface="Arial"/>
+            </a:endParaRPr>
+          </a:p>
+          <a:p>
+            <a:r>
+              <a:rPr lang="en-US" sz="1800" b="0" u="none" strike="noStrike">
+                <a:solidFill>
+                  <a:srgbClr val="000000"/>
+                </a:solidFill>
+                <a:effectLst/>
+                <a:uFillTx/>
+                <a:latin typeface="Arial"/>
+              </a:rPr>
+              <a:t>Applies intensity normalization across the 3D stack.</a:t>
+            </a:r>
+            <a:endParaRPr lang="en-US" sz="1800" b="0" u="none" strike="noStrike">
+              <a:solidFill>
+                <a:srgbClr val="000000"/>
+              </a:solidFill>
+              <a:effectLst/>
+              <a:uFillTx/>
+              <a:latin typeface="Arial"/>
+            </a:endParaRPr>
+          </a:p>
+          <a:p>
+            <a:r>
+              <a:rPr lang="en-US" sz="1800" b="0" u="none" strike="noStrike">
+                <a:solidFill>
+                  <a:srgbClr val="000000"/>
+                </a:solidFill>
+                <a:effectLst/>
+                <a:uFillTx/>
+                <a:latin typeface="Arial"/>
+              </a:rPr>
+              <a:t>Helps compensate for:depth attenuation and uneven illumination</a:t>
+            </a:r>
+            <a:endParaRPr lang="en-US" sz="1800" b="0" u="none" strike="noStrike">
+              <a:solidFill>
+                <a:srgbClr val="000000"/>
+              </a:solidFill>
+              <a:effectLst/>
+              <a:uFillTx/>
+              <a:latin typeface="Arial"/>
+            </a:endParaRPr>
+          </a:p>
+          <a:p>
+            <a:r>
+              <a:rPr lang="en-US" sz="1800" b="0" u="none" strike="noStrike">
+                <a:solidFill>
+                  <a:srgbClr val="000000"/>
+                </a:solidFill>
+                <a:effectLst/>
+                <a:uFillTx/>
+                <a:latin typeface="Arial"/>
+              </a:rPr>
+              <a:t>Normalization percentiles low: 1.0%(Removes very dark background noise)</a:t>
+            </a:r>
+            <a:endParaRPr lang="en-US" sz="1800" b="0" u="none" strike="noStrike">
+              <a:solidFill>
+                <a:srgbClr val="000000"/>
+              </a:solidFill>
+              <a:effectLst/>
+              <a:uFillTx/>
+              <a:latin typeface="Arial"/>
+            </a:endParaRPr>
+          </a:p>
+          <a:p>
+            <a:r>
+              <a:rPr lang="en-US" sz="1800" b="0" u="none" strike="noStrike">
+                <a:solidFill>
+                  <a:srgbClr val="000000"/>
+                </a:solidFill>
+                <a:effectLst/>
+                <a:uFillTx/>
+                <a:latin typeface="Arial"/>
+              </a:rPr>
+              <a:t>High: 99.8%(Caps very bright pixels)</a:t>
+            </a:r>
+            <a:endParaRPr lang="en-US" sz="1800" b="0" u="none" strike="noStrike">
+              <a:solidFill>
+                <a:srgbClr val="000000"/>
+              </a:solidFill>
+              <a:effectLst/>
+              <a:uFillTx/>
+              <a:latin typeface="Arial"/>
+            </a:endParaRPr>
+          </a:p>
+          <a:p>
+            <a:endParaRPr lang="en-US" sz="1800" b="0" u="none" strike="noStrike">
+              <a:solidFill>
+                <a:srgbClr val="000000"/>
+              </a:solidFill>
+              <a:effectLst/>
+              <a:uFillTx/>
+              <a:latin typeface="Arial"/>
+            </a:endParaRPr>
+          </a:p>
+          <a:p>
+            <a:r>
+              <a:rPr lang="en-US" sz="1800" b="0" u="none" strike="noStrike">
+                <a:solidFill>
+                  <a:srgbClr val="000000"/>
+                </a:solidFill>
+                <a:effectLst/>
+                <a:uFillTx/>
+                <a:latin typeface="Arial"/>
+              </a:rPr>
+              <a:t>In 3D, this is especially useful because intensity often varies with depth.</a:t>
+            </a:r>
+            <a:endParaRPr lang="en-US" sz="1800" b="0" u="none" strike="noStrike">
+              <a:solidFill>
+                <a:srgbClr val="000000"/>
+              </a:solidFill>
+              <a:effectLst/>
+              <a:uFillTx/>
+              <a:latin typeface="Arial"/>
+            </a:endParaRPr>
+          </a:p>
+          <a:p>
+            <a:r>
+              <a:rPr lang="en-US" sz="1800" b="0" u="none" strike="noStrike">
+                <a:solidFill>
+                  <a:srgbClr val="000000"/>
+                </a:solidFill>
+                <a:effectLst/>
+                <a:uFillTx/>
+                <a:latin typeface="Arial"/>
+              </a:rPr>
+              <a:t>                                                                </a:t>
+            </a:r>
+            <a:endParaRPr lang="en-US" sz="1800" b="0" u="none" strike="noStrike">
+              <a:solidFill>
+                <a:srgbClr val="000000"/>
+              </a:solidFill>
+              <a:effectLst/>
+              <a:uFillTx/>
+              <a:latin typeface="Arial"/>
+            </a:endParaRPr>
+          </a:p>
+        </p:txBody>
+      </p:sp>
     </p:spTree>
   </p:cSld>
   <mc:AlternateContent>
@@ -11112,17 +7578,13 @@
       </p:grpSpPr>
       <p:sp>
         <p:nvSpPr>
-          <p:cNvPr id="112" name="PlaceHolder 1"/>
-          <p:cNvSpPr>
-            <a:spLocks noGrp="1"/>
-          </p:cNvSpPr>
-          <p:nvPr>
-            <p:ph type="title"/>
-          </p:nvPr>
+          <p:cNvPr id="106" name="PlaceHolder 7"/>
+          <p:cNvSpPr txBox="1"/>
+          <p:nvPr/>
         </p:nvSpPr>
         <p:spPr>
           <a:xfrm>
-            <a:off x="609480" y="137880"/>
+            <a:off x="156960" y="8280"/>
             <a:ext cx="2586240" cy="677520"/>
           </a:xfrm>
           <a:prstGeom prst="rect">
@@ -11138,11 +7600,10 @@
             <a:spAutoFit/>
           </a:bodyPr>
           <a:p>
-            <a:pPr indent="0" algn="ctr">
-              <a:lnSpc>
-                <a:spcPct val="100000"/>
-              </a:lnSpc>
-              <a:buNone/>
+            <a:pPr algn="ctr">
+              <a:lnSpc>
+                <a:spcPct val="100000"/>
+              </a:lnSpc>
               <a:tabLst>
                 <a:tab algn="l" pos="0"/>
               </a:tabLst>
@@ -11156,7 +7617,7 @@
                 <a:uFillTx/>
                 <a:latin typeface="Arial"/>
               </a:rPr>
-              <a:t>0H 2</a:t>
+              <a:t>Interface</a:t>
             </a:r>
             <a:endParaRPr lang="en-US" sz="4400" b="0" u="none" strike="noStrike">
               <a:solidFill>
@@ -11171,365 +7632,14 @@
       </p:sp>
       <p:sp>
         <p:nvSpPr>
-          <p:cNvPr id="113" name="Rectangles 4"/>
-          <p:cNvSpPr/>
+          <p:cNvPr id="107" name=""/>
+          <p:cNvSpPr txBox="1"/>
           <p:nvPr/>
         </p:nvSpPr>
         <p:spPr>
           <a:xfrm>
-            <a:off x="0" y="1143000"/>
-            <a:ext cx="2284560" cy="5249880"/>
-          </a:xfrm>
-          <a:prstGeom prst="rect">
-            <a:avLst/>
-          </a:prstGeom>
-          <a:solidFill>
-            <a:srgbClr val="729fcf"/>
-          </a:solidFill>
-          <a:ln w="0">
-            <a:solidFill>
-              <a:srgbClr val="3465a4"/>
-            </a:solidFill>
-          </a:ln>
-        </p:spPr>
-        <p:style>
-          <a:lnRef idx="0"/>
-          <a:fillRef idx="0"/>
-          <a:effectRef idx="0"/>
-          <a:fontRef idx="minor"/>
-        </p:style>
-        <p:txBody>
-          <a:bodyPr lIns="90000" rIns="90000" tIns="45000" bIns="45000" anchor="ctr">
-            <a:noAutofit/>
-          </a:bodyPr>
-          <a:p>
-            <a:pPr defTabSz="914400">
-              <a:lnSpc>
-                <a:spcPct val="100000"/>
-              </a:lnSpc>
-            </a:pPr>
-            <a:r>
-              <a:rPr lang="en-US" sz="1400" b="1" u="none" strike="noStrike">
-                <a:solidFill>
-                  <a:srgbClr val="000000"/>
-                </a:solidFill>
-                <a:effectLst/>
-                <a:uFillTx/>
-                <a:latin typeface="Arial"/>
-                <a:ea typeface="SimSun"/>
-              </a:rPr>
-              <a:t>Erosion = 3</a:t>
-            </a:r>
-            <a:endParaRPr lang="en-US" sz="1400" b="0" u="none" strike="noStrike">
-              <a:solidFill>
-                <a:srgbClr val="000000"/>
-              </a:solidFill>
-              <a:effectLst/>
-              <a:uFillTx/>
-              <a:latin typeface="Arial"/>
-            </a:endParaRPr>
-          </a:p>
-          <a:p>
-            <a:pPr defTabSz="914400">
-              <a:lnSpc>
-                <a:spcPct val="100000"/>
-              </a:lnSpc>
-            </a:pPr>
-            <a:r>
-              <a:rPr lang="en-US" sz="1400" b="1" u="none" strike="noStrike">
-                <a:solidFill>
-                  <a:srgbClr val="000000"/>
-                </a:solidFill>
-                <a:effectLst/>
-                <a:uFillTx/>
-                <a:latin typeface="Arial"/>
-                <a:ea typeface="SimSun"/>
-              </a:rPr>
-              <a:t>Thresholding = 0.002</a:t>
-            </a:r>
-            <a:endParaRPr lang="en-US" sz="1400" b="0" u="none" strike="noStrike">
-              <a:solidFill>
-                <a:srgbClr val="000000"/>
-              </a:solidFill>
-              <a:effectLst/>
-              <a:uFillTx/>
-              <a:latin typeface="Arial"/>
-            </a:endParaRPr>
-          </a:p>
-          <a:p>
-            <a:pPr defTabSz="914400">
-              <a:lnSpc>
-                <a:spcPct val="100000"/>
-              </a:lnSpc>
-            </a:pPr>
-            <a:r>
-              <a:rPr lang="en-US" sz="1400" b="1" u="none" strike="noStrike">
-                <a:solidFill>
-                  <a:srgbClr val="000000"/>
-                </a:solidFill>
-                <a:effectLst/>
-                <a:uFillTx/>
-                <a:latin typeface="Arial"/>
-                <a:ea typeface="SimSun"/>
-              </a:rPr>
-              <a:t>margin um = 0.8</a:t>
-            </a:r>
-            <a:endParaRPr lang="en-US" sz="1400" b="0" u="none" strike="noStrike">
-              <a:solidFill>
-                <a:srgbClr val="000000"/>
-              </a:solidFill>
-              <a:effectLst/>
-              <a:uFillTx/>
-              <a:latin typeface="Arial"/>
-            </a:endParaRPr>
-          </a:p>
-          <a:p>
-            <a:pPr defTabSz="914400">
-              <a:lnSpc>
-                <a:spcPct val="100000"/>
-              </a:lnSpc>
-            </a:pPr>
-            <a:r>
-              <a:rPr lang="en-US" sz="1400" b="1" u="none" strike="noStrike">
-                <a:solidFill>
-                  <a:srgbClr val="000000"/>
-                </a:solidFill>
-                <a:effectLst/>
-                <a:uFillTx/>
-                <a:latin typeface="Arial"/>
-                <a:ea typeface="SimSun"/>
-              </a:rPr>
-              <a:t>overlap alpha = 0.1</a:t>
-            </a:r>
-            <a:endParaRPr lang="en-US" sz="1400" b="0" u="none" strike="noStrike">
-              <a:solidFill>
-                <a:srgbClr val="000000"/>
-              </a:solidFill>
-              <a:effectLst/>
-              <a:uFillTx/>
-              <a:latin typeface="Arial"/>
-            </a:endParaRPr>
-          </a:p>
-          <a:p>
-            <a:pPr defTabSz="914400">
-              <a:lnSpc>
-                <a:spcPct val="100000"/>
-              </a:lnSpc>
-            </a:pPr>
-            <a:r>
-              <a:rPr lang="en-US" sz="1400" b="1" u="none" strike="noStrike">
-                <a:solidFill>
-                  <a:srgbClr val="000000"/>
-                </a:solidFill>
-                <a:effectLst/>
-                <a:uFillTx/>
-                <a:latin typeface="Arial"/>
-                <a:ea typeface="SimSun"/>
-              </a:rPr>
-              <a:t>viz min voxels = 2500</a:t>
-            </a:r>
-            <a:endParaRPr lang="en-US" sz="1400" b="0" u="none" strike="noStrike">
-              <a:solidFill>
-                <a:srgbClr val="000000"/>
-              </a:solidFill>
-              <a:effectLst/>
-              <a:uFillTx/>
-              <a:latin typeface="Arial"/>
-            </a:endParaRPr>
-          </a:p>
-          <a:p>
-            <a:pPr defTabSz="914400">
-              <a:lnSpc>
-                <a:spcPct val="100000"/>
-              </a:lnSpc>
-            </a:pPr>
-            <a:r>
-              <a:rPr lang="en-US" sz="1400" b="1" u="none" strike="noStrike">
-                <a:solidFill>
-                  <a:srgbClr val="000000"/>
-                </a:solidFill>
-                <a:effectLst/>
-                <a:uFillTx/>
-                <a:latin typeface="Arial"/>
-                <a:ea typeface="SimSun"/>
-              </a:rPr>
-              <a:t>max_gap_UM = 8</a:t>
-            </a:r>
-            <a:endParaRPr lang="en-US" sz="1400" b="0" u="none" strike="noStrike">
-              <a:solidFill>
-                <a:srgbClr val="000000"/>
-              </a:solidFill>
-              <a:effectLst/>
-              <a:uFillTx/>
-              <a:latin typeface="Arial"/>
-            </a:endParaRPr>
-          </a:p>
-          <a:p>
-            <a:pPr defTabSz="914400">
-              <a:lnSpc>
-                <a:spcPct val="100000"/>
-              </a:lnSpc>
-            </a:pPr>
-            <a:r>
-              <a:rPr lang="en-US" sz="1400" b="1" u="none" strike="noStrike">
-                <a:solidFill>
-                  <a:srgbClr val="000000"/>
-                </a:solidFill>
-                <a:effectLst/>
-                <a:uFillTx/>
-                <a:latin typeface="Arial"/>
-                <a:ea typeface="SimSun"/>
-              </a:rPr>
-              <a:t>Closing=8</a:t>
-            </a:r>
-            <a:endParaRPr lang="en-US" sz="1400" b="0" u="none" strike="noStrike">
-              <a:solidFill>
-                <a:srgbClr val="000000"/>
-              </a:solidFill>
-              <a:effectLst/>
-              <a:uFillTx/>
-              <a:latin typeface="Arial"/>
-            </a:endParaRPr>
-          </a:p>
-          <a:p>
-            <a:pPr defTabSz="914400">
-              <a:lnSpc>
-                <a:spcPct val="100000"/>
-              </a:lnSpc>
-            </a:pPr>
-            <a:r>
-              <a:rPr lang="en-US" sz="1400" b="1" u="none" strike="noStrike">
-                <a:solidFill>
-                  <a:srgbClr val="000000"/>
-                </a:solidFill>
-                <a:effectLst/>
-                <a:uFillTx/>
-                <a:latin typeface="Arial"/>
-                <a:ea typeface="SimSun"/>
-              </a:rPr>
-              <a:t>Cos_min =0.7</a:t>
-            </a:r>
-            <a:endParaRPr lang="en-US" sz="1400" b="0" u="none" strike="noStrike">
-              <a:solidFill>
-                <a:srgbClr val="000000"/>
-              </a:solidFill>
-              <a:effectLst/>
-              <a:uFillTx/>
-              <a:latin typeface="Arial"/>
-            </a:endParaRPr>
-          </a:p>
-          <a:p>
-            <a:pPr defTabSz="914400">
-              <a:lnSpc>
-                <a:spcPct val="100000"/>
-              </a:lnSpc>
-            </a:pPr>
-            <a:r>
-              <a:rPr lang="en-US" sz="1400" b="1" u="none" strike="noStrike">
-                <a:solidFill>
-                  <a:srgbClr val="000000"/>
-                </a:solidFill>
-                <a:effectLst/>
-                <a:uFillTx/>
-                <a:latin typeface="Arial"/>
-                <a:ea typeface="SimSun"/>
-              </a:rPr>
-              <a:t>Intesity_min_frac =0.45</a:t>
-            </a:r>
-            <a:endParaRPr lang="en-US" sz="1400" b="0" u="none" strike="noStrike">
-              <a:solidFill>
-                <a:srgbClr val="000000"/>
-              </a:solidFill>
-              <a:effectLst/>
-              <a:uFillTx/>
-              <a:latin typeface="Arial"/>
-            </a:endParaRPr>
-          </a:p>
-          <a:p>
-            <a:pPr defTabSz="914400">
-              <a:lnSpc>
-                <a:spcPct val="100000"/>
-              </a:lnSpc>
-            </a:pPr>
-            <a:r>
-              <a:rPr lang="en-US" sz="1400" b="1" u="none" strike="noStrike">
-                <a:solidFill>
-                  <a:srgbClr val="000000"/>
-                </a:solidFill>
-                <a:effectLst/>
-                <a:uFillTx/>
-                <a:latin typeface="Arial"/>
-                <a:ea typeface="SimSun"/>
-              </a:rPr>
-              <a:t>thres_block_ size=101 </a:t>
-            </a:r>
-            <a:endParaRPr lang="en-US" sz="1400" b="0" u="none" strike="noStrike">
-              <a:solidFill>
-                <a:srgbClr val="000000"/>
-              </a:solidFill>
-              <a:effectLst/>
-              <a:uFillTx/>
-              <a:latin typeface="Arial"/>
-            </a:endParaRPr>
-          </a:p>
-          <a:p>
-            <a:pPr defTabSz="914400">
-              <a:lnSpc>
-                <a:spcPct val="100000"/>
-              </a:lnSpc>
-            </a:pPr>
-            <a:r>
-              <a:rPr lang="en-US" sz="1400" b="1" u="none" strike="noStrike">
-                <a:solidFill>
-                  <a:srgbClr val="000000"/>
-                </a:solidFill>
-                <a:effectLst/>
-                <a:uFillTx/>
-                <a:latin typeface="Arial"/>
-                <a:ea typeface="SimSun"/>
-              </a:rPr>
-              <a:t>thres_offset_mult=0.2</a:t>
-            </a:r>
-            <a:endParaRPr lang="en-US" sz="1400" b="0" u="none" strike="noStrike">
-              <a:solidFill>
-                <a:srgbClr val="000000"/>
-              </a:solidFill>
-              <a:effectLst/>
-              <a:uFillTx/>
-              <a:latin typeface="Arial"/>
-            </a:endParaRPr>
-          </a:p>
-          <a:p>
-            <a:pPr defTabSz="914400">
-              <a:lnSpc>
-                <a:spcPct val="100000"/>
-              </a:lnSpc>
-            </a:pPr>
-            <a:endParaRPr lang="en-US" sz="1800" b="0" u="none" strike="noStrike">
-              <a:solidFill>
-                <a:srgbClr val="000000"/>
-              </a:solidFill>
-              <a:effectLst/>
-              <a:uFillTx/>
-              <a:latin typeface="Arial"/>
-            </a:endParaRPr>
-          </a:p>
-        </p:txBody>
-      </p:sp>
-      <p:pic>
-        <p:nvPicPr>
-          <p:cNvPr id="114" name=""/>
-          <p:cNvPicPr/>
-          <p:nvPr/>
-        </p:nvPicPr>
-        <p:blipFill>
-          <a:blip r:embed="rId1"/>
-          <a:stretch/>
-        </p:blipFill>
-        <p:spPr>
-          <a:xfrm>
-            <a:off x="2286000" y="1371600"/>
-            <a:ext cx="5359320" cy="4570560"/>
+            <a:off x="228600" y="685800"/>
+            <a:ext cx="11658960" cy="5715000"/>
           </a:xfrm>
           <a:prstGeom prst="rect">
             <a:avLst/>
@@ -11539,31 +7649,398 @@
             <a:noFill/>
           </a:ln>
         </p:spPr>
-      </p:pic>
-      <p:pic>
-        <p:nvPicPr>
-          <p:cNvPr id="115" name=""/>
-          <p:cNvPicPr/>
-          <p:nvPr/>
-        </p:nvPicPr>
-        <p:blipFill>
-          <a:blip r:embed="rId2"/>
-          <a:stretch/>
-        </p:blipFill>
-        <p:spPr>
-          <a:xfrm>
-            <a:off x="6629400" y="1371600"/>
-            <a:ext cx="5359680" cy="4570560"/>
-          </a:xfrm>
-          <a:prstGeom prst="rect">
-            <a:avLst/>
-          </a:prstGeom>
-          <a:noFill/>
-          <a:ln w="0">
-            <a:noFill/>
-          </a:ln>
-        </p:spPr>
-      </p:pic>
+        <p:txBody>
+          <a:bodyPr lIns="90000" rIns="90000" tIns="45000" bIns="45000" anchor="t">
+            <a:spAutoFit/>
+          </a:bodyPr>
+          <a:p>
+            <a:r>
+              <a:rPr lang="en-US" sz="1800" b="0" u="none" strike="noStrike">
+                <a:solidFill>
+                  <a:srgbClr val="000000"/>
+                </a:solidFill>
+                <a:effectLst/>
+                <a:uFillTx/>
+                <a:latin typeface="Arial"/>
+              </a:rPr>
+              <a:t>Subpixel prediction ✔</a:t>
+            </a:r>
+            <a:endParaRPr lang="en-US" sz="1800" b="0" u="none" strike="noStrike">
+              <a:solidFill>
+                <a:srgbClr val="000000"/>
+              </a:solidFill>
+              <a:effectLst/>
+              <a:uFillTx/>
+              <a:latin typeface="Arial"/>
+            </a:endParaRPr>
+          </a:p>
+          <a:p>
+            <a:r>
+              <a:rPr lang="en-US" sz="1800" b="0" u="none" strike="noStrike">
+                <a:solidFill>
+                  <a:srgbClr val="000000"/>
+                </a:solidFill>
+                <a:effectLst/>
+                <a:uFillTx/>
+                <a:latin typeface="Arial"/>
+              </a:rPr>
+              <a:t>Outputs spot coordinates with fractional precision (x.y, y.z, z.t).</a:t>
+            </a:r>
+            <a:endParaRPr lang="en-US" sz="1800" b="0" u="none" strike="noStrike">
+              <a:solidFill>
+                <a:srgbClr val="000000"/>
+              </a:solidFill>
+              <a:effectLst/>
+              <a:uFillTx/>
+              <a:latin typeface="Arial"/>
+            </a:endParaRPr>
+          </a:p>
+          <a:p>
+            <a:r>
+              <a:rPr lang="en-US" sz="1800" b="0" u="none" strike="noStrike">
+                <a:solidFill>
+                  <a:srgbClr val="000000"/>
+                </a:solidFill>
+                <a:effectLst/>
+                <a:uFillTx/>
+                <a:latin typeface="Arial"/>
+              </a:rPr>
+              <a:t>Important for:</a:t>
+            </a:r>
+            <a:endParaRPr lang="en-US" sz="1800" b="0" u="none" strike="noStrike">
+              <a:solidFill>
+                <a:srgbClr val="000000"/>
+              </a:solidFill>
+              <a:effectLst/>
+              <a:uFillTx/>
+              <a:latin typeface="Arial"/>
+            </a:endParaRPr>
+          </a:p>
+          <a:p>
+            <a:r>
+              <a:rPr lang="en-US" sz="1800" b="0" u="none" strike="noStrike">
+                <a:solidFill>
+                  <a:srgbClr val="000000"/>
+                </a:solidFill>
+                <a:effectLst/>
+                <a:uFillTx/>
+                <a:latin typeface="Arial"/>
+              </a:rPr>
+              <a:t>accurate spatial measurements</a:t>
+            </a:r>
+            <a:endParaRPr lang="en-US" sz="1800" b="0" u="none" strike="noStrike">
+              <a:solidFill>
+                <a:srgbClr val="000000"/>
+              </a:solidFill>
+              <a:effectLst/>
+              <a:uFillTx/>
+              <a:latin typeface="Arial"/>
+            </a:endParaRPr>
+          </a:p>
+          <a:p>
+            <a:r>
+              <a:rPr lang="en-US" sz="1800" b="0" u="none" strike="noStrike">
+                <a:solidFill>
+                  <a:srgbClr val="000000"/>
+                </a:solidFill>
+                <a:effectLst/>
+                <a:uFillTx/>
+                <a:latin typeface="Arial"/>
+              </a:rPr>
+              <a:t>downstream quantification</a:t>
+            </a:r>
+            <a:endParaRPr lang="en-US" sz="1800" b="0" u="none" strike="noStrike">
+              <a:solidFill>
+                <a:srgbClr val="000000"/>
+              </a:solidFill>
+              <a:effectLst/>
+              <a:uFillTx/>
+              <a:latin typeface="Arial"/>
+            </a:endParaRPr>
+          </a:p>
+          <a:p>
+            <a:r>
+              <a:rPr lang="en-US" sz="1800" b="0" u="none" strike="noStrike">
+                <a:solidFill>
+                  <a:srgbClr val="000000"/>
+                </a:solidFill>
+                <a:effectLst/>
+                <a:uFillTx/>
+                <a:latin typeface="Arial"/>
+              </a:rPr>
+              <a:t>🔹 Postprocessing</a:t>
+            </a:r>
+            <a:endParaRPr lang="en-US" sz="1800" b="0" u="none" strike="noStrike">
+              <a:solidFill>
+                <a:srgbClr val="000000"/>
+              </a:solidFill>
+              <a:effectLst/>
+              <a:uFillTx/>
+              <a:latin typeface="Arial"/>
+            </a:endParaRPr>
+          </a:p>
+          <a:p>
+            <a:r>
+              <a:rPr lang="en-US" sz="1800" b="0" u="none" strike="noStrike">
+                <a:solidFill>
+                  <a:srgbClr val="000000"/>
+                </a:solidFill>
+                <a:effectLst/>
+                <a:uFillTx/>
+                <a:latin typeface="Arial"/>
+              </a:rPr>
+              <a:t>Use optimized probability threshold ✔</a:t>
+            </a:r>
+            <a:endParaRPr lang="en-US" sz="1800" b="0" u="none" strike="noStrike">
+              <a:solidFill>
+                <a:srgbClr val="000000"/>
+              </a:solidFill>
+              <a:effectLst/>
+              <a:uFillTx/>
+              <a:latin typeface="Arial"/>
+            </a:endParaRPr>
+          </a:p>
+          <a:p>
+            <a:r>
+              <a:rPr lang="en-US" sz="1800" b="0" u="none" strike="noStrike">
+                <a:solidFill>
+                  <a:srgbClr val="000000"/>
+                </a:solidFill>
+                <a:effectLst/>
+                <a:uFillTx/>
+                <a:latin typeface="Arial"/>
+              </a:rPr>
+              <a:t>Automatically determines detection cutoff.</a:t>
+            </a:r>
+            <a:endParaRPr lang="en-US" sz="1800" b="0" u="none" strike="noStrike">
+              <a:solidFill>
+                <a:srgbClr val="000000"/>
+              </a:solidFill>
+              <a:effectLst/>
+              <a:uFillTx/>
+              <a:latin typeface="Arial"/>
+            </a:endParaRPr>
+          </a:p>
+          <a:p>
+            <a:r>
+              <a:rPr lang="en-US" sz="1800" b="0" u="none" strike="noStrike">
+                <a:solidFill>
+                  <a:srgbClr val="000000"/>
+                </a:solidFill>
+                <a:effectLst/>
+                <a:uFillTx/>
+                <a:latin typeface="Arial"/>
+              </a:rPr>
+              <a:t>In 3D, this is very helpful since manual tuning is harder.</a:t>
+            </a:r>
+            <a:endParaRPr lang="en-US" sz="1800" b="0" u="none" strike="noStrike">
+              <a:solidFill>
+                <a:srgbClr val="000000"/>
+              </a:solidFill>
+              <a:effectLst/>
+              <a:uFillTx/>
+              <a:latin typeface="Arial"/>
+            </a:endParaRPr>
+          </a:p>
+          <a:p>
+            <a:r>
+              <a:rPr lang="en-US" sz="1800" b="0" u="none" strike="noStrike">
+                <a:solidFill>
+                  <a:srgbClr val="000000"/>
+                </a:solidFill>
+                <a:effectLst/>
+                <a:uFillTx/>
+                <a:latin typeface="Arial"/>
+              </a:rPr>
+              <a:t>Minimum distance: 2.0</a:t>
+            </a:r>
+            <a:endParaRPr lang="en-US" sz="1800" b="0" u="none" strike="noStrike">
+              <a:solidFill>
+                <a:srgbClr val="000000"/>
+              </a:solidFill>
+              <a:effectLst/>
+              <a:uFillTx/>
+              <a:latin typeface="Arial"/>
+            </a:endParaRPr>
+          </a:p>
+          <a:p>
+            <a:r>
+              <a:rPr lang="en-US" sz="1800" b="0" u="none" strike="noStrike">
+                <a:solidFill>
+                  <a:srgbClr val="000000"/>
+                </a:solidFill>
+                <a:effectLst/>
+                <a:uFillTx/>
+                <a:latin typeface="Arial"/>
+              </a:rPr>
+              <a:t>Minimum spacing between detected spots (in pixels).</a:t>
+            </a:r>
+            <a:endParaRPr lang="en-US" sz="1800" b="0" u="none" strike="noStrike">
+              <a:solidFill>
+                <a:srgbClr val="000000"/>
+              </a:solidFill>
+              <a:effectLst/>
+              <a:uFillTx/>
+              <a:latin typeface="Arial"/>
+            </a:endParaRPr>
+          </a:p>
+          <a:p>
+            <a:endParaRPr lang="en-US" sz="1800" b="0" u="none" strike="noStrike">
+              <a:solidFill>
+                <a:srgbClr val="000000"/>
+              </a:solidFill>
+              <a:effectLst/>
+              <a:uFillTx/>
+              <a:latin typeface="Arial"/>
+            </a:endParaRPr>
+          </a:p>
+          <a:p>
+            <a:r>
+              <a:rPr lang="en-US" sz="1800" b="0" u="none" strike="noStrike">
+                <a:solidFill>
+                  <a:srgbClr val="000000"/>
+                </a:solidFill>
+                <a:effectLst/>
+                <a:uFillTx/>
+                <a:latin typeface="Arial"/>
+              </a:rPr>
+              <a:t>⚠️ In 3D, this applies in XYZ space, not just XY.</a:t>
+            </a:r>
+            <a:endParaRPr lang="en-US" sz="1800" b="0" u="none" strike="noStrike">
+              <a:solidFill>
+                <a:srgbClr val="000000"/>
+              </a:solidFill>
+              <a:effectLst/>
+              <a:uFillTx/>
+              <a:latin typeface="Arial"/>
+            </a:endParaRPr>
+          </a:p>
+          <a:p>
+            <a:endParaRPr lang="en-US" sz="1800" b="0" u="none" strike="noStrike">
+              <a:solidFill>
+                <a:srgbClr val="000000"/>
+              </a:solidFill>
+              <a:effectLst/>
+              <a:uFillTx/>
+              <a:latin typeface="Arial"/>
+            </a:endParaRPr>
+          </a:p>
+          <a:p>
+            <a:r>
+              <a:rPr lang="en-US" sz="1800" b="0" u="none" strike="noStrike">
+                <a:solidFill>
+                  <a:srgbClr val="000000"/>
+                </a:solidFill>
+                <a:effectLst/>
+                <a:uFillTx/>
+                <a:latin typeface="Arial"/>
+              </a:rPr>
+              <a:t>Interpretation:</a:t>
+            </a:r>
+            <a:endParaRPr lang="en-US" sz="1800" b="0" u="none" strike="noStrike">
+              <a:solidFill>
+                <a:srgbClr val="000000"/>
+              </a:solidFill>
+              <a:effectLst/>
+              <a:uFillTx/>
+              <a:latin typeface="Arial"/>
+            </a:endParaRPr>
+          </a:p>
+          <a:p>
+            <a:endParaRPr lang="en-US" sz="1800" b="0" u="none" strike="noStrike">
+              <a:solidFill>
+                <a:srgbClr val="000000"/>
+              </a:solidFill>
+              <a:effectLst/>
+              <a:uFillTx/>
+              <a:latin typeface="Arial"/>
+            </a:endParaRPr>
+          </a:p>
+          <a:p>
+            <a:r>
+              <a:rPr lang="en-US" sz="1800" b="0" u="none" strike="noStrike">
+                <a:solidFill>
+                  <a:srgbClr val="000000"/>
+                </a:solidFill>
+                <a:effectLst/>
+                <a:uFillTx/>
+                <a:latin typeface="Arial"/>
+              </a:rPr>
+              <a:t>If two detections are closer than 2 pixels → merged or suppressed.</a:t>
+            </a:r>
+            <a:endParaRPr lang="en-US" sz="1800" b="0" u="none" strike="noStrike">
+              <a:solidFill>
+                <a:srgbClr val="000000"/>
+              </a:solidFill>
+              <a:effectLst/>
+              <a:uFillTx/>
+              <a:latin typeface="Arial"/>
+            </a:endParaRPr>
+          </a:p>
+          <a:p>
+            <a:endParaRPr lang="en-US" sz="1800" b="0" u="none" strike="noStrike">
+              <a:solidFill>
+                <a:srgbClr val="000000"/>
+              </a:solidFill>
+              <a:effectLst/>
+              <a:uFillTx/>
+              <a:latin typeface="Arial"/>
+            </a:endParaRPr>
+          </a:p>
+          <a:p>
+            <a:r>
+              <a:rPr lang="en-US" sz="1800" b="0" u="none" strike="noStrike">
+                <a:solidFill>
+                  <a:srgbClr val="000000"/>
+                </a:solidFill>
+                <a:effectLst/>
+                <a:uFillTx/>
+                <a:latin typeface="Arial"/>
+              </a:rPr>
+              <a:t>👉 Important:</a:t>
+            </a:r>
+            <a:endParaRPr lang="en-US" sz="1800" b="0" u="none" strike="noStrike">
+              <a:solidFill>
+                <a:srgbClr val="000000"/>
+              </a:solidFill>
+              <a:effectLst/>
+              <a:uFillTx/>
+              <a:latin typeface="Arial"/>
+            </a:endParaRPr>
+          </a:p>
+          <a:p>
+            <a:endParaRPr lang="en-US" sz="1800" b="0" u="none" strike="noStrike">
+              <a:solidFill>
+                <a:srgbClr val="000000"/>
+              </a:solidFill>
+              <a:effectLst/>
+              <a:uFillTx/>
+              <a:latin typeface="Arial"/>
+            </a:endParaRPr>
+          </a:p>
+          <a:p>
+            <a:r>
+              <a:rPr lang="en-US" sz="1800" b="0" u="none" strike="noStrike">
+                <a:solidFill>
+                  <a:srgbClr val="000000"/>
+                </a:solidFill>
+                <a:effectLst/>
+                <a:uFillTx/>
+                <a:latin typeface="Arial"/>
+              </a:rPr>
+              <a:t>If your Z spacing is larger than XY (common!), this value may need adjustment.</a:t>
+            </a:r>
+            <a:endParaRPr lang="en-US" sz="1800" b="0" u="none" strike="noStrike">
+              <a:solidFill>
+                <a:srgbClr val="000000"/>
+              </a:solidFill>
+              <a:effectLst/>
+              <a:uFillTx/>
+              <a:latin typeface="Arial"/>
+            </a:endParaRPr>
+          </a:p>
+        </p:txBody>
+      </p:sp>
     </p:spTree>
   </p:cSld>
   <mc:AlternateContent>
@@ -11596,17 +8073,13 @@
       </p:grpSpPr>
       <p:sp>
         <p:nvSpPr>
-          <p:cNvPr id="116" name="PlaceHolder 1"/>
-          <p:cNvSpPr>
-            <a:spLocks noGrp="1"/>
-          </p:cNvSpPr>
-          <p:nvPr>
-            <p:ph type="title"/>
-          </p:nvPr>
+          <p:cNvPr id="108" name="PlaceHolder 8"/>
+          <p:cNvSpPr txBox="1"/>
+          <p:nvPr/>
         </p:nvSpPr>
         <p:spPr>
           <a:xfrm>
-            <a:off x="609480" y="137880"/>
+            <a:off x="156960" y="8280"/>
             <a:ext cx="2586240" cy="677520"/>
           </a:xfrm>
           <a:prstGeom prst="rect">
@@ -11622,11 +8095,10 @@
             <a:spAutoFit/>
           </a:bodyPr>
           <a:p>
-            <a:pPr indent="0" algn="ctr">
-              <a:lnSpc>
-                <a:spcPct val="100000"/>
-              </a:lnSpc>
-              <a:buNone/>
+            <a:pPr algn="ctr">
+              <a:lnSpc>
+                <a:spcPct val="100000"/>
+              </a:lnSpc>
               <a:tabLst>
                 <a:tab algn="l" pos="0"/>
               </a:tabLst>
@@ -11640,7 +8112,7 @@
                 <a:uFillTx/>
                 <a:latin typeface="Arial"/>
               </a:rPr>
-              <a:t>0H 2</a:t>
+              <a:t>Interface</a:t>
             </a:r>
             <a:endParaRPr lang="en-US" sz="4400" b="0" u="none" strike="noStrike">
               <a:solidFill>
@@ -11655,365 +8127,14 @@
       </p:sp>
       <p:sp>
         <p:nvSpPr>
-          <p:cNvPr id="117" name="Rectangles 7"/>
-          <p:cNvSpPr/>
+          <p:cNvPr id="109" name=""/>
+          <p:cNvSpPr txBox="1"/>
           <p:nvPr/>
         </p:nvSpPr>
         <p:spPr>
           <a:xfrm>
-            <a:off x="229320" y="914400"/>
-            <a:ext cx="2284560" cy="5249880"/>
-          </a:xfrm>
-          <a:prstGeom prst="rect">
-            <a:avLst/>
-          </a:prstGeom>
-          <a:solidFill>
-            <a:srgbClr val="729fcf"/>
-          </a:solidFill>
-          <a:ln w="0">
-            <a:solidFill>
-              <a:srgbClr val="3465a4"/>
-            </a:solidFill>
-          </a:ln>
-        </p:spPr>
-        <p:style>
-          <a:lnRef idx="0"/>
-          <a:fillRef idx="0"/>
-          <a:effectRef idx="0"/>
-          <a:fontRef idx="minor"/>
-        </p:style>
-        <p:txBody>
-          <a:bodyPr lIns="90000" rIns="90000" tIns="45000" bIns="45000" anchor="ctr">
-            <a:noAutofit/>
-          </a:bodyPr>
-          <a:p>
-            <a:pPr defTabSz="914400">
-              <a:lnSpc>
-                <a:spcPct val="100000"/>
-              </a:lnSpc>
-            </a:pPr>
-            <a:r>
-              <a:rPr lang="en-US" sz="1400" b="1" u="none" strike="noStrike">
-                <a:solidFill>
-                  <a:srgbClr val="000000"/>
-                </a:solidFill>
-                <a:effectLst/>
-                <a:uFillTx/>
-                <a:latin typeface="Arial"/>
-                <a:ea typeface="SimSun"/>
-              </a:rPr>
-              <a:t>Erosion = 4</a:t>
-            </a:r>
-            <a:endParaRPr lang="en-US" sz="1400" b="0" u="none" strike="noStrike">
-              <a:solidFill>
-                <a:srgbClr val="000000"/>
-              </a:solidFill>
-              <a:effectLst/>
-              <a:uFillTx/>
-              <a:latin typeface="Arial"/>
-            </a:endParaRPr>
-          </a:p>
-          <a:p>
-            <a:pPr defTabSz="914400">
-              <a:lnSpc>
-                <a:spcPct val="100000"/>
-              </a:lnSpc>
-            </a:pPr>
-            <a:r>
-              <a:rPr lang="en-US" sz="1400" b="1" u="none" strike="noStrike">
-                <a:solidFill>
-                  <a:srgbClr val="000000"/>
-                </a:solidFill>
-                <a:effectLst/>
-                <a:uFillTx/>
-                <a:latin typeface="Arial"/>
-                <a:ea typeface="SimSun"/>
-              </a:rPr>
-              <a:t>Thresholding = 0.002</a:t>
-            </a:r>
-            <a:endParaRPr lang="en-US" sz="1400" b="0" u="none" strike="noStrike">
-              <a:solidFill>
-                <a:srgbClr val="000000"/>
-              </a:solidFill>
-              <a:effectLst/>
-              <a:uFillTx/>
-              <a:latin typeface="Arial"/>
-            </a:endParaRPr>
-          </a:p>
-          <a:p>
-            <a:pPr defTabSz="914400">
-              <a:lnSpc>
-                <a:spcPct val="100000"/>
-              </a:lnSpc>
-            </a:pPr>
-            <a:r>
-              <a:rPr lang="en-US" sz="1400" b="1" u="none" strike="noStrike">
-                <a:solidFill>
-                  <a:srgbClr val="000000"/>
-                </a:solidFill>
-                <a:effectLst/>
-                <a:uFillTx/>
-                <a:latin typeface="Arial"/>
-                <a:ea typeface="SimSun"/>
-              </a:rPr>
-              <a:t>margin um = 0.8</a:t>
-            </a:r>
-            <a:endParaRPr lang="en-US" sz="1400" b="0" u="none" strike="noStrike">
-              <a:solidFill>
-                <a:srgbClr val="000000"/>
-              </a:solidFill>
-              <a:effectLst/>
-              <a:uFillTx/>
-              <a:latin typeface="Arial"/>
-            </a:endParaRPr>
-          </a:p>
-          <a:p>
-            <a:pPr defTabSz="914400">
-              <a:lnSpc>
-                <a:spcPct val="100000"/>
-              </a:lnSpc>
-            </a:pPr>
-            <a:r>
-              <a:rPr lang="en-US" sz="1400" b="1" u="none" strike="noStrike">
-                <a:solidFill>
-                  <a:srgbClr val="000000"/>
-                </a:solidFill>
-                <a:effectLst/>
-                <a:uFillTx/>
-                <a:latin typeface="Arial"/>
-                <a:ea typeface="SimSun"/>
-              </a:rPr>
-              <a:t>overlap alpha = 0.1</a:t>
-            </a:r>
-            <a:endParaRPr lang="en-US" sz="1400" b="0" u="none" strike="noStrike">
-              <a:solidFill>
-                <a:srgbClr val="000000"/>
-              </a:solidFill>
-              <a:effectLst/>
-              <a:uFillTx/>
-              <a:latin typeface="Arial"/>
-            </a:endParaRPr>
-          </a:p>
-          <a:p>
-            <a:pPr defTabSz="914400">
-              <a:lnSpc>
-                <a:spcPct val="100000"/>
-              </a:lnSpc>
-            </a:pPr>
-            <a:r>
-              <a:rPr lang="en-US" sz="1400" b="1" u="none" strike="noStrike">
-                <a:solidFill>
-                  <a:srgbClr val="000000"/>
-                </a:solidFill>
-                <a:effectLst/>
-                <a:uFillTx/>
-                <a:latin typeface="Arial"/>
-                <a:ea typeface="SimSun"/>
-              </a:rPr>
-              <a:t>viz min voxels = 2800</a:t>
-            </a:r>
-            <a:endParaRPr lang="en-US" sz="1400" b="0" u="none" strike="noStrike">
-              <a:solidFill>
-                <a:srgbClr val="000000"/>
-              </a:solidFill>
-              <a:effectLst/>
-              <a:uFillTx/>
-              <a:latin typeface="Arial"/>
-            </a:endParaRPr>
-          </a:p>
-          <a:p>
-            <a:pPr defTabSz="914400">
-              <a:lnSpc>
-                <a:spcPct val="100000"/>
-              </a:lnSpc>
-            </a:pPr>
-            <a:r>
-              <a:rPr lang="en-US" sz="1400" b="1" u="none" strike="noStrike">
-                <a:solidFill>
-                  <a:srgbClr val="000000"/>
-                </a:solidFill>
-                <a:effectLst/>
-                <a:uFillTx/>
-                <a:latin typeface="Arial"/>
-                <a:ea typeface="SimSun"/>
-              </a:rPr>
-              <a:t>max_gap_UM = 9</a:t>
-            </a:r>
-            <a:endParaRPr lang="en-US" sz="1400" b="0" u="none" strike="noStrike">
-              <a:solidFill>
-                <a:srgbClr val="000000"/>
-              </a:solidFill>
-              <a:effectLst/>
-              <a:uFillTx/>
-              <a:latin typeface="Arial"/>
-            </a:endParaRPr>
-          </a:p>
-          <a:p>
-            <a:pPr defTabSz="914400">
-              <a:lnSpc>
-                <a:spcPct val="100000"/>
-              </a:lnSpc>
-            </a:pPr>
-            <a:r>
-              <a:rPr lang="en-US" sz="1400" b="1" u="none" strike="noStrike">
-                <a:solidFill>
-                  <a:srgbClr val="000000"/>
-                </a:solidFill>
-                <a:effectLst/>
-                <a:uFillTx/>
-                <a:latin typeface="Arial"/>
-                <a:ea typeface="SimSun"/>
-              </a:rPr>
-              <a:t>Closing=8</a:t>
-            </a:r>
-            <a:endParaRPr lang="en-US" sz="1400" b="0" u="none" strike="noStrike">
-              <a:solidFill>
-                <a:srgbClr val="000000"/>
-              </a:solidFill>
-              <a:effectLst/>
-              <a:uFillTx/>
-              <a:latin typeface="Arial"/>
-            </a:endParaRPr>
-          </a:p>
-          <a:p>
-            <a:pPr defTabSz="914400">
-              <a:lnSpc>
-                <a:spcPct val="100000"/>
-              </a:lnSpc>
-            </a:pPr>
-            <a:r>
-              <a:rPr lang="en-US" sz="1400" b="1" u="none" strike="noStrike">
-                <a:solidFill>
-                  <a:srgbClr val="000000"/>
-                </a:solidFill>
-                <a:effectLst/>
-                <a:uFillTx/>
-                <a:latin typeface="Arial"/>
-                <a:ea typeface="SimSun"/>
-              </a:rPr>
-              <a:t>Cos_min =0.7</a:t>
-            </a:r>
-            <a:endParaRPr lang="en-US" sz="1400" b="0" u="none" strike="noStrike">
-              <a:solidFill>
-                <a:srgbClr val="000000"/>
-              </a:solidFill>
-              <a:effectLst/>
-              <a:uFillTx/>
-              <a:latin typeface="Arial"/>
-            </a:endParaRPr>
-          </a:p>
-          <a:p>
-            <a:pPr defTabSz="914400">
-              <a:lnSpc>
-                <a:spcPct val="100000"/>
-              </a:lnSpc>
-            </a:pPr>
-            <a:r>
-              <a:rPr lang="en-US" sz="1400" b="1" u="none" strike="noStrike">
-                <a:solidFill>
-                  <a:srgbClr val="000000"/>
-                </a:solidFill>
-                <a:effectLst/>
-                <a:uFillTx/>
-                <a:latin typeface="Arial"/>
-                <a:ea typeface="SimSun"/>
-              </a:rPr>
-              <a:t>Intesity_min_frac =0.45</a:t>
-            </a:r>
-            <a:endParaRPr lang="en-US" sz="1400" b="0" u="none" strike="noStrike">
-              <a:solidFill>
-                <a:srgbClr val="000000"/>
-              </a:solidFill>
-              <a:effectLst/>
-              <a:uFillTx/>
-              <a:latin typeface="Arial"/>
-            </a:endParaRPr>
-          </a:p>
-          <a:p>
-            <a:pPr defTabSz="914400">
-              <a:lnSpc>
-                <a:spcPct val="100000"/>
-              </a:lnSpc>
-            </a:pPr>
-            <a:r>
-              <a:rPr lang="en-US" sz="1400" b="1" u="none" strike="noStrike">
-                <a:solidFill>
-                  <a:srgbClr val="000000"/>
-                </a:solidFill>
-                <a:effectLst/>
-                <a:uFillTx/>
-                <a:latin typeface="Arial"/>
-                <a:ea typeface="SimSun"/>
-              </a:rPr>
-              <a:t>thres_block_ size=151 </a:t>
-            </a:r>
-            <a:endParaRPr lang="en-US" sz="1400" b="0" u="none" strike="noStrike">
-              <a:solidFill>
-                <a:srgbClr val="000000"/>
-              </a:solidFill>
-              <a:effectLst/>
-              <a:uFillTx/>
-              <a:latin typeface="Arial"/>
-            </a:endParaRPr>
-          </a:p>
-          <a:p>
-            <a:pPr defTabSz="914400">
-              <a:lnSpc>
-                <a:spcPct val="100000"/>
-              </a:lnSpc>
-            </a:pPr>
-            <a:r>
-              <a:rPr lang="en-US" sz="1400" b="1" u="none" strike="noStrike">
-                <a:solidFill>
-                  <a:srgbClr val="000000"/>
-                </a:solidFill>
-                <a:effectLst/>
-                <a:uFillTx/>
-                <a:latin typeface="Arial"/>
-                <a:ea typeface="SimSun"/>
-              </a:rPr>
-              <a:t>thres_offset_mult=0.15</a:t>
-            </a:r>
-            <a:endParaRPr lang="en-US" sz="1400" b="0" u="none" strike="noStrike">
-              <a:solidFill>
-                <a:srgbClr val="000000"/>
-              </a:solidFill>
-              <a:effectLst/>
-              <a:uFillTx/>
-              <a:latin typeface="Arial"/>
-            </a:endParaRPr>
-          </a:p>
-          <a:p>
-            <a:pPr defTabSz="914400">
-              <a:lnSpc>
-                <a:spcPct val="100000"/>
-              </a:lnSpc>
-            </a:pPr>
-            <a:endParaRPr lang="en-US" sz="1800" b="0" u="none" strike="noStrike">
-              <a:solidFill>
-                <a:srgbClr val="000000"/>
-              </a:solidFill>
-              <a:effectLst/>
-              <a:uFillTx/>
-              <a:latin typeface="Arial"/>
-            </a:endParaRPr>
-          </a:p>
-        </p:txBody>
-      </p:sp>
-      <p:pic>
-        <p:nvPicPr>
-          <p:cNvPr id="118" name=""/>
-          <p:cNvPicPr/>
-          <p:nvPr/>
-        </p:nvPicPr>
-        <p:blipFill>
-          <a:blip r:embed="rId1"/>
-          <a:stretch/>
-        </p:blipFill>
-        <p:spPr>
-          <a:xfrm>
-            <a:off x="2286000" y="1143000"/>
-            <a:ext cx="5297040" cy="4517280"/>
+            <a:off x="228600" y="686160"/>
+            <a:ext cx="11658960" cy="5721480"/>
           </a:xfrm>
           <a:prstGeom prst="rect">
             <a:avLst/>
@@ -12023,31 +8144,441 @@
             <a:noFill/>
           </a:ln>
         </p:spPr>
-      </p:pic>
-      <p:pic>
-        <p:nvPicPr>
-          <p:cNvPr id="119" name=""/>
-          <p:cNvPicPr/>
-          <p:nvPr/>
-        </p:nvPicPr>
-        <p:blipFill>
-          <a:blip r:embed="rId2"/>
-          <a:stretch/>
-        </p:blipFill>
-        <p:spPr>
-          <a:xfrm>
-            <a:off x="6794640" y="1143360"/>
-            <a:ext cx="5360040" cy="4570920"/>
-          </a:xfrm>
-          <a:prstGeom prst="rect">
-            <a:avLst/>
-          </a:prstGeom>
-          <a:noFill/>
-          <a:ln w="0">
-            <a:noFill/>
-          </a:ln>
-        </p:spPr>
-      </p:pic>
+        <p:txBody>
+          <a:bodyPr lIns="90000" rIns="90000" tIns="45000" bIns="45000" anchor="t">
+            <a:spAutoFit/>
+          </a:bodyPr>
+          <a:p>
+            <a:r>
+              <a:rPr lang="en-US" sz="1800" b="0" u="none" strike="noStrike">
+                <a:solidFill>
+                  <a:srgbClr val="000000"/>
+                </a:solidFill>
+                <a:effectLst/>
+                <a:uFillTx/>
+                <a:latin typeface="Arial"/>
+              </a:rPr>
+              <a:t>🔹 Advanced options</a:t>
+            </a:r>
+            <a:endParaRPr lang="en-US" sz="1800" b="0" u="none" strike="noStrike">
+              <a:solidFill>
+                <a:srgbClr val="000000"/>
+              </a:solidFill>
+              <a:effectLst/>
+              <a:uFillTx/>
+              <a:latin typeface="Arial"/>
+            </a:endParaRPr>
+          </a:p>
+          <a:p>
+            <a:r>
+              <a:rPr lang="en-US" sz="1800" b="0" u="none" strike="noStrike">
+                <a:solidFill>
+                  <a:srgbClr val="000000"/>
+                </a:solidFill>
+                <a:effectLst/>
+                <a:uFillTx/>
+                <a:latin typeface="Arial"/>
+              </a:rPr>
+              <a:t>Automatically infer tiling ✔</a:t>
+            </a:r>
+            <a:endParaRPr lang="en-US" sz="1800" b="0" u="none" strike="noStrike">
+              <a:solidFill>
+                <a:srgbClr val="000000"/>
+              </a:solidFill>
+              <a:effectLst/>
+              <a:uFillTx/>
+              <a:latin typeface="Arial"/>
+            </a:endParaRPr>
+          </a:p>
+          <a:p>
+            <a:r>
+              <a:rPr lang="en-US" sz="1800" b="0" u="none" strike="noStrike">
+                <a:solidFill>
+                  <a:srgbClr val="000000"/>
+                </a:solidFill>
+                <a:effectLst/>
+                <a:uFillTx/>
+                <a:latin typeface="Arial"/>
+              </a:rPr>
+              <a:t>Splits volume into smaller blocks during inference.</a:t>
+            </a:r>
+            <a:endParaRPr lang="en-US" sz="1800" b="0" u="none" strike="noStrike">
+              <a:solidFill>
+                <a:srgbClr val="000000"/>
+              </a:solidFill>
+              <a:effectLst/>
+              <a:uFillTx/>
+              <a:latin typeface="Arial"/>
+            </a:endParaRPr>
+          </a:p>
+          <a:p>
+            <a:r>
+              <a:rPr lang="en-US" sz="1800" b="0" u="none" strike="noStrike">
+                <a:solidFill>
+                  <a:srgbClr val="000000"/>
+                </a:solidFill>
+                <a:effectLst/>
+                <a:uFillTx/>
+                <a:latin typeface="Arial"/>
+              </a:rPr>
+              <a:t>Prevents memory crashes with large stacks.</a:t>
+            </a:r>
+            <a:endParaRPr lang="en-US" sz="1800" b="0" u="none" strike="noStrike">
+              <a:solidFill>
+                <a:srgbClr val="000000"/>
+              </a:solidFill>
+              <a:effectLst/>
+              <a:uFillTx/>
+              <a:latin typeface="Arial"/>
+            </a:endParaRPr>
+          </a:p>
+          <a:p>
+            <a:endParaRPr lang="en-US" sz="1800" b="0" u="none" strike="noStrike">
+              <a:solidFill>
+                <a:srgbClr val="000000"/>
+              </a:solidFill>
+              <a:effectLst/>
+              <a:uFillTx/>
+              <a:latin typeface="Arial"/>
+            </a:endParaRPr>
+          </a:p>
+          <a:p>
+            <a:r>
+              <a:rPr lang="en-US" sz="1800" b="0" u="none" strike="noStrike">
+                <a:solidFill>
+                  <a:srgbClr val="000000"/>
+                </a:solidFill>
+                <a:effectLst/>
+                <a:uFillTx/>
+                <a:latin typeface="Arial"/>
+              </a:rPr>
+              <a:t>👉 Highly recommended for 3D data.</a:t>
+            </a:r>
+            <a:endParaRPr lang="en-US" sz="1800" b="0" u="none" strike="noStrike">
+              <a:solidFill>
+                <a:srgbClr val="000000"/>
+              </a:solidFill>
+              <a:effectLst/>
+              <a:uFillTx/>
+              <a:latin typeface="Arial"/>
+            </a:endParaRPr>
+          </a:p>
+          <a:p>
+            <a:endParaRPr lang="en-US" sz="1800" b="0" u="none" strike="noStrike">
+              <a:solidFill>
+                <a:srgbClr val="000000"/>
+              </a:solidFill>
+              <a:effectLst/>
+              <a:uFillTx/>
+              <a:latin typeface="Arial"/>
+            </a:endParaRPr>
+          </a:p>
+          <a:p>
+            <a:r>
+              <a:rPr lang="en-US" sz="1800" b="0" u="none" strike="noStrike">
+                <a:solidFill>
+                  <a:srgbClr val="000000"/>
+                </a:solidFill>
+                <a:effectLst/>
+                <a:uFillTx/>
+                <a:latin typeface="Arial"/>
+              </a:rPr>
+              <a:t>Show CNN output ❌</a:t>
+            </a:r>
+            <a:endParaRPr lang="en-US" sz="1800" b="0" u="none" strike="noStrike">
+              <a:solidFill>
+                <a:srgbClr val="000000"/>
+              </a:solidFill>
+              <a:effectLst/>
+              <a:uFillTx/>
+              <a:latin typeface="Arial"/>
+            </a:endParaRPr>
+          </a:p>
+          <a:p>
+            <a:r>
+              <a:rPr lang="en-US" sz="1800" b="0" u="none" strike="noStrike">
+                <a:solidFill>
+                  <a:srgbClr val="000000"/>
+                </a:solidFill>
+                <a:effectLst/>
+                <a:uFillTx/>
+                <a:latin typeface="Arial"/>
+              </a:rPr>
+              <a:t>Disabled.</a:t>
+            </a:r>
+            <a:endParaRPr lang="en-US" sz="1800" b="0" u="none" strike="noStrike">
+              <a:solidFill>
+                <a:srgbClr val="000000"/>
+              </a:solidFill>
+              <a:effectLst/>
+              <a:uFillTx/>
+              <a:latin typeface="Arial"/>
+            </a:endParaRPr>
+          </a:p>
+          <a:p>
+            <a:r>
+              <a:rPr lang="en-US" sz="1800" b="0" u="none" strike="noStrike">
+                <a:solidFill>
+                  <a:srgbClr val="000000"/>
+                </a:solidFill>
+                <a:effectLst/>
+                <a:uFillTx/>
+                <a:latin typeface="Arial"/>
+              </a:rPr>
+              <a:t>If enabled, would show:</a:t>
+            </a:r>
+            <a:endParaRPr lang="en-US" sz="1800" b="0" u="none" strike="noStrike">
+              <a:solidFill>
+                <a:srgbClr val="000000"/>
+              </a:solidFill>
+              <a:effectLst/>
+              <a:uFillTx/>
+              <a:latin typeface="Arial"/>
+            </a:endParaRPr>
+          </a:p>
+          <a:p>
+            <a:r>
+              <a:rPr lang="en-US" sz="1800" b="0" u="none" strike="noStrike">
+                <a:solidFill>
+                  <a:srgbClr val="000000"/>
+                </a:solidFill>
+                <a:effectLst/>
+                <a:uFillTx/>
+                <a:latin typeface="Arial"/>
+              </a:rPr>
+              <a:t>probability maps (where the model “thinks” spots are)</a:t>
+            </a:r>
+            <a:endParaRPr lang="en-US" sz="1800" b="0" u="none" strike="noStrike">
+              <a:solidFill>
+                <a:srgbClr val="000000"/>
+              </a:solidFill>
+              <a:effectLst/>
+              <a:uFillTx/>
+              <a:latin typeface="Arial"/>
+            </a:endParaRPr>
+          </a:p>
+          <a:p>
+            <a:r>
+              <a:rPr lang="en-US" sz="1800" b="0" u="none" strike="noStrike">
+                <a:solidFill>
+                  <a:srgbClr val="000000"/>
+                </a:solidFill>
+                <a:effectLst/>
+                <a:uFillTx/>
+                <a:latin typeface="Arial"/>
+              </a:rPr>
+              <a:t>Visualize channels separately ❌</a:t>
+            </a:r>
+            <a:endParaRPr lang="en-US" sz="1800" b="0" u="none" strike="noStrike">
+              <a:solidFill>
+                <a:srgbClr val="000000"/>
+              </a:solidFill>
+              <a:effectLst/>
+              <a:uFillTx/>
+              <a:latin typeface="Arial"/>
+            </a:endParaRPr>
+          </a:p>
+          <a:p>
+            <a:r>
+              <a:rPr lang="en-US" sz="1800" b="0" u="none" strike="noStrike">
+                <a:solidFill>
+                  <a:srgbClr val="000000"/>
+                </a:solidFill>
+                <a:effectLst/>
+                <a:uFillTx/>
+                <a:latin typeface="Arial"/>
+              </a:rPr>
+              <a:t>Not relevant here since:</a:t>
+            </a:r>
+            <a:endParaRPr lang="en-US" sz="1800" b="0" u="none" strike="noStrike">
+              <a:solidFill>
+                <a:srgbClr val="000000"/>
+              </a:solidFill>
+              <a:effectLst/>
+              <a:uFillTx/>
+              <a:latin typeface="Arial"/>
+            </a:endParaRPr>
+          </a:p>
+          <a:p>
+            <a:r>
+              <a:rPr lang="en-US" sz="1800" b="0" u="none" strike="noStrike">
+                <a:solidFill>
+                  <a:srgbClr val="000000"/>
+                </a:solidFill>
+                <a:effectLst/>
+                <a:uFillTx/>
+                <a:latin typeface="Arial"/>
+              </a:rPr>
+              <a:t>You selected a single channel input</a:t>
+            </a:r>
+            <a:endParaRPr lang="en-US" sz="1800" b="0" u="none" strike="noStrike">
+              <a:solidFill>
+                <a:srgbClr val="000000"/>
+              </a:solidFill>
+              <a:effectLst/>
+              <a:uFillTx/>
+              <a:latin typeface="Arial"/>
+            </a:endParaRPr>
+          </a:p>
+          <a:p>
+            <a:r>
+              <a:rPr lang="en-US" sz="1800" b="0" u="none" strike="noStrike">
+                <a:solidFill>
+                  <a:srgbClr val="000000"/>
+                </a:solidFill>
+                <a:effectLst/>
+                <a:uFillTx/>
+                <a:latin typeface="Arial"/>
+              </a:rPr>
+              <a:t>🔹 Detect spots (button)</a:t>
+            </a:r>
+            <a:endParaRPr lang="en-US" sz="1800" b="0" u="none" strike="noStrike">
+              <a:solidFill>
+                <a:srgbClr val="000000"/>
+              </a:solidFill>
+              <a:effectLst/>
+              <a:uFillTx/>
+              <a:latin typeface="Arial"/>
+            </a:endParaRPr>
+          </a:p>
+          <a:p>
+            <a:r>
+              <a:rPr lang="en-US" sz="1800" b="0" u="none" strike="noStrike">
+                <a:solidFill>
+                  <a:srgbClr val="000000"/>
+                </a:solidFill>
+                <a:effectLst/>
+                <a:uFillTx/>
+                <a:latin typeface="Arial"/>
+              </a:rPr>
+              <a:t>Runs full pipeline:</a:t>
+            </a:r>
+            <a:endParaRPr lang="en-US" sz="1800" b="0" u="none" strike="noStrike">
+              <a:solidFill>
+                <a:srgbClr val="000000"/>
+              </a:solidFill>
+              <a:effectLst/>
+              <a:uFillTx/>
+              <a:latin typeface="Arial"/>
+            </a:endParaRPr>
+          </a:p>
+          <a:p>
+            <a:r>
+              <a:rPr lang="en-US" sz="1800" b="0" u="none" strike="noStrike">
+                <a:solidFill>
+                  <a:srgbClr val="000000"/>
+                </a:solidFill>
+                <a:effectLst/>
+                <a:uFillTx/>
+                <a:latin typeface="Arial"/>
+              </a:rPr>
+              <a:t>Normalize</a:t>
+            </a:r>
+            <a:endParaRPr lang="en-US" sz="1800" b="0" u="none" strike="noStrike">
+              <a:solidFill>
+                <a:srgbClr val="000000"/>
+              </a:solidFill>
+              <a:effectLst/>
+              <a:uFillTx/>
+              <a:latin typeface="Arial"/>
+            </a:endParaRPr>
+          </a:p>
+          <a:p>
+            <a:r>
+              <a:rPr lang="en-US" sz="1800" b="0" u="none" strike="noStrike">
+                <a:solidFill>
+                  <a:srgbClr val="000000"/>
+                </a:solidFill>
+                <a:effectLst/>
+                <a:uFillTx/>
+                <a:latin typeface="Arial"/>
+              </a:rPr>
+              <a:t>Apply 3D CNN</a:t>
+            </a:r>
+            <a:endParaRPr lang="en-US" sz="1800" b="0" u="none" strike="noStrike">
+              <a:solidFill>
+                <a:srgbClr val="000000"/>
+              </a:solidFill>
+              <a:effectLst/>
+              <a:uFillTx/>
+              <a:latin typeface="Arial"/>
+            </a:endParaRPr>
+          </a:p>
+          <a:p>
+            <a:r>
+              <a:rPr lang="en-US" sz="1800" b="0" u="none" strike="noStrike">
+                <a:solidFill>
+                  <a:srgbClr val="000000"/>
+                </a:solidFill>
+                <a:effectLst/>
+                <a:uFillTx/>
+                <a:latin typeface="Arial"/>
+              </a:rPr>
+              <a:t>Postprocess detections</a:t>
+            </a:r>
+            <a:endParaRPr lang="en-US" sz="1800" b="0" u="none" strike="noStrike">
+              <a:solidFill>
+                <a:srgbClr val="000000"/>
+              </a:solidFill>
+              <a:effectLst/>
+              <a:uFillTx/>
+              <a:latin typeface="Arial"/>
+            </a:endParaRPr>
+          </a:p>
+          <a:p>
+            <a:r>
+              <a:rPr lang="en-US" sz="1800" b="0" u="none" strike="noStrike">
+                <a:solidFill>
+                  <a:srgbClr val="000000"/>
+                </a:solidFill>
+                <a:effectLst/>
+                <a:uFillTx/>
+                <a:latin typeface="Arial"/>
+              </a:rPr>
+              <a:t>Output:</a:t>
+            </a:r>
+            <a:endParaRPr lang="en-US" sz="1800" b="0" u="none" strike="noStrike">
+              <a:solidFill>
+                <a:srgbClr val="000000"/>
+              </a:solidFill>
+              <a:effectLst/>
+              <a:uFillTx/>
+              <a:latin typeface="Arial"/>
+            </a:endParaRPr>
+          </a:p>
+          <a:p>
+            <a:r>
+              <a:rPr lang="en-US" sz="1800" b="0" u="none" strike="noStrike">
+                <a:solidFill>
+                  <a:srgbClr val="000000"/>
+                </a:solidFill>
+                <a:effectLst/>
+                <a:uFillTx/>
+                <a:latin typeface="Arial"/>
+              </a:rPr>
+              <a:t>A points layer in napari with (Z, Y, X) coordinates</a:t>
+            </a:r>
+            <a:endParaRPr lang="en-US" sz="1800" b="0" u="none" strike="noStrike">
+              <a:solidFill>
+                <a:srgbClr val="000000"/>
+              </a:solidFill>
+              <a:effectLst/>
+              <a:uFillTx/>
+              <a:latin typeface="Arial"/>
+            </a:endParaRPr>
+          </a:p>
+          <a:p>
+            <a:endParaRPr lang="en-US" sz="1800" b="0" u="none" strike="noStrike">
+              <a:solidFill>
+                <a:srgbClr val="000000"/>
+              </a:solidFill>
+              <a:effectLst/>
+              <a:uFillTx/>
+              <a:latin typeface="Arial"/>
+            </a:endParaRPr>
+          </a:p>
+        </p:txBody>
+      </p:sp>
     </p:spTree>
   </p:cSld>
   <mc:AlternateContent>
@@ -12080,7 +8611,7 @@
       </p:grpSpPr>
       <p:sp>
         <p:nvSpPr>
-          <p:cNvPr id="120" name="PlaceHolder 1"/>
+          <p:cNvPr id="110" name="PlaceHolder 1"/>
           <p:cNvSpPr>
             <a:spLocks noGrp="1"/>
           </p:cNvSpPr>
@@ -12124,7 +8655,7 @@
                 <a:uFillTx/>
                 <a:latin typeface="Arial"/>
               </a:rPr>
-              <a:t>0H 2</a:t>
+              <a:t> L3 1</a:t>
             </a:r>
             <a:endParaRPr lang="en-US" sz="4400" b="0" u="none" strike="noStrike">
               <a:solidFill>
@@ -12139,13 +8670,13 @@
       </p:sp>
       <p:sp>
         <p:nvSpPr>
-          <p:cNvPr id="121" name="Rectangles 3"/>
+          <p:cNvPr id="111" name="Rectangles 7"/>
           <p:cNvSpPr/>
           <p:nvPr/>
         </p:nvSpPr>
         <p:spPr>
           <a:xfrm>
-            <a:off x="0" y="1143000"/>
+            <a:off x="1440" y="914400"/>
             <a:ext cx="2284560" cy="5249880"/>
           </a:xfrm>
           <a:prstGeom prst="rect">
@@ -12186,7 +8717,7 @@
                 <a:latin typeface="Arial"/>
                 <a:ea typeface="SimSun"/>
               </a:rPr>
-              <a:t>Erosion = 3</a:t>
+              <a:t>Erosion = 8</a:t>
             </a:r>
             <a:endParaRPr lang="en-US" sz="1400" b="0" u="none" strike="noStrike">
               <a:solidFill>
@@ -12240,7 +8771,7 @@
                 <a:latin typeface="Arial"/>
                 <a:ea typeface="SimSun"/>
               </a:rPr>
-              <a:t>margin um = 0.8</a:t>
+              <a:t>margin um = 1.2</a:t>
             </a:r>
             <a:endParaRPr lang="en-US" sz="1400" b="0" u="none" strike="noStrike">
               <a:solidFill>
@@ -12267,7 +8798,7 @@
                 <a:latin typeface="Arial"/>
                 <a:ea typeface="SimSun"/>
               </a:rPr>
-              <a:t>overlap alpha = 0.1</a:t>
+              <a:t>overlap alpha = 0.6</a:t>
             </a:r>
             <a:endParaRPr lang="en-US" sz="1400" b="0" u="none" strike="noStrike">
               <a:solidFill>
@@ -12294,7 +8825,7 @@
                 <a:latin typeface="Arial"/>
                 <a:ea typeface="SimSun"/>
               </a:rPr>
-              <a:t>viz min voxels = 2800</a:t>
+              <a:t>viz min voxels = 12000</a:t>
             </a:r>
             <a:endParaRPr lang="en-US" sz="1400" b="0" u="none" strike="noStrike">
               <a:solidFill>
@@ -12311,169 +8842,7 @@
                 <a:spcPct val="100000"/>
               </a:lnSpc>
             </a:pPr>
-            <a:r>
-              <a:rPr lang="en-US" sz="1400" b="1" u="none" strike="noStrike">
-                <a:solidFill>
-                  <a:srgbClr val="000000"/>
-                </a:solidFill>
-                <a:effectLst/>
-                <a:uFillTx/>
-                <a:latin typeface="Arial"/>
-                <a:ea typeface="SimSun"/>
-              </a:rPr>
-              <a:t>max_gap_UM = 9</a:t>
-            </a:r>
             <a:endParaRPr lang="en-US" sz="1400" b="0" u="none" strike="noStrike">
-              <a:solidFill>
-                <a:srgbClr val="000000"/>
-              </a:solidFill>
-              <a:effectLst/>
-              <a:uFillTx/>
-              <a:latin typeface="Arial"/>
-            </a:endParaRPr>
-          </a:p>
-          <a:p>
-            <a:pPr defTabSz="914400">
-              <a:lnSpc>
-                <a:spcPct val="100000"/>
-              </a:lnSpc>
-            </a:pPr>
-            <a:r>
-              <a:rPr lang="en-US" sz="1400" b="1" u="none" strike="noStrike">
-                <a:solidFill>
-                  <a:srgbClr val="000000"/>
-                </a:solidFill>
-                <a:effectLst/>
-                <a:uFillTx/>
-                <a:latin typeface="Arial"/>
-                <a:ea typeface="SimSun"/>
-              </a:rPr>
-              <a:t>Closing=8</a:t>
-            </a:r>
-            <a:endParaRPr lang="en-US" sz="1400" b="0" u="none" strike="noStrike">
-              <a:solidFill>
-                <a:srgbClr val="000000"/>
-              </a:solidFill>
-              <a:effectLst/>
-              <a:uFillTx/>
-              <a:latin typeface="Arial"/>
-            </a:endParaRPr>
-          </a:p>
-          <a:p>
-            <a:pPr defTabSz="914400">
-              <a:lnSpc>
-                <a:spcPct val="100000"/>
-              </a:lnSpc>
-            </a:pPr>
-            <a:r>
-              <a:rPr lang="en-US" sz="1400" b="1" u="none" strike="noStrike">
-                <a:solidFill>
-                  <a:srgbClr val="000000"/>
-                </a:solidFill>
-                <a:effectLst/>
-                <a:uFillTx/>
-                <a:latin typeface="Arial"/>
-                <a:ea typeface="SimSun"/>
-              </a:rPr>
-              <a:t>Cos_min =0.7</a:t>
-            </a:r>
-            <a:endParaRPr lang="en-US" sz="1400" b="0" u="none" strike="noStrike">
-              <a:solidFill>
-                <a:srgbClr val="000000"/>
-              </a:solidFill>
-              <a:effectLst/>
-              <a:uFillTx/>
-              <a:latin typeface="Arial"/>
-            </a:endParaRPr>
-          </a:p>
-          <a:p>
-            <a:pPr defTabSz="914400">
-              <a:lnSpc>
-                <a:spcPct val="100000"/>
-              </a:lnSpc>
-            </a:pPr>
-            <a:r>
-              <a:rPr lang="en-US" sz="1400" b="1" u="none" strike="noStrike">
-                <a:solidFill>
-                  <a:srgbClr val="000000"/>
-                </a:solidFill>
-                <a:effectLst/>
-                <a:uFillTx/>
-                <a:latin typeface="Arial"/>
-                <a:ea typeface="SimSun"/>
-              </a:rPr>
-              <a:t>Intesity_min_frac =0.45</a:t>
-            </a:r>
-            <a:endParaRPr lang="en-US" sz="1400" b="0" u="none" strike="noStrike">
-              <a:solidFill>
-                <a:srgbClr val="000000"/>
-              </a:solidFill>
-              <a:effectLst/>
-              <a:uFillTx/>
-              <a:latin typeface="Arial"/>
-            </a:endParaRPr>
-          </a:p>
-          <a:p>
-            <a:pPr defTabSz="914400">
-              <a:lnSpc>
-                <a:spcPct val="100000"/>
-              </a:lnSpc>
-            </a:pPr>
-            <a:r>
-              <a:rPr lang="en-US" sz="1400" b="1" u="none" strike="noStrike">
-                <a:solidFill>
-                  <a:srgbClr val="000000"/>
-                </a:solidFill>
-                <a:effectLst/>
-                <a:uFillTx/>
-                <a:latin typeface="Arial"/>
-                <a:ea typeface="SimSun"/>
-              </a:rPr>
-              <a:t>thres_block_ size=101 </a:t>
-            </a:r>
-            <a:endParaRPr lang="en-US" sz="1400" b="0" u="none" strike="noStrike">
-              <a:solidFill>
-                <a:srgbClr val="000000"/>
-              </a:solidFill>
-              <a:effectLst/>
-              <a:uFillTx/>
-              <a:latin typeface="Arial"/>
-            </a:endParaRPr>
-          </a:p>
-          <a:p>
-            <a:pPr defTabSz="914400">
-              <a:lnSpc>
-                <a:spcPct val="100000"/>
-              </a:lnSpc>
-            </a:pPr>
-            <a:r>
-              <a:rPr lang="en-US" sz="1400" b="1" u="none" strike="noStrike">
-                <a:solidFill>
-                  <a:srgbClr val="000000"/>
-                </a:solidFill>
-                <a:effectLst/>
-                <a:uFillTx/>
-                <a:latin typeface="Arial"/>
-                <a:ea typeface="SimSun"/>
-              </a:rPr>
-              <a:t>thres_offset_mult=0.2</a:t>
-            </a:r>
-            <a:endParaRPr lang="en-US" sz="1400" b="0" u="none" strike="noStrike">
-              <a:solidFill>
-                <a:srgbClr val="000000"/>
-              </a:solidFill>
-              <a:effectLst/>
-              <a:uFillTx/>
-              <a:latin typeface="Arial"/>
-            </a:endParaRPr>
-          </a:p>
-          <a:p>
-            <a:pPr defTabSz="914400">
-              <a:lnSpc>
-                <a:spcPct val="100000"/>
-              </a:lnSpc>
-            </a:pPr>
-            <a:endParaRPr lang="en-US" sz="1800" b="0" u="none" strike="noStrike">
               <a:solidFill>
                 <a:srgbClr val="000000"/>
               </a:solidFill>
@@ -12486,7 +8855,7 @@
       </p:sp>
       <p:pic>
         <p:nvPicPr>
-          <p:cNvPr id="122" name=""/>
+          <p:cNvPr id="112" name=""/>
           <p:cNvPicPr/>
           <p:nvPr/>
         </p:nvPicPr>
@@ -12496,8 +8865,8 @@
         </p:blipFill>
         <p:spPr>
           <a:xfrm>
-            <a:off x="2057400" y="1371600"/>
-            <a:ext cx="5359320" cy="4570560"/>
+            <a:off x="2057400" y="1600200"/>
+            <a:ext cx="4825080" cy="4114800"/>
           </a:xfrm>
           <a:prstGeom prst="rect">
             <a:avLst/>
@@ -12510,7 +8879,7 @@
       </p:pic>
       <p:pic>
         <p:nvPicPr>
-          <p:cNvPr id="123" name=""/>
+          <p:cNvPr id="113" name=""/>
           <p:cNvPicPr/>
           <p:nvPr/>
         </p:nvPicPr>
@@ -12520,8 +8889,8 @@
         </p:blipFill>
         <p:spPr>
           <a:xfrm>
-            <a:off x="6599880" y="1239120"/>
-            <a:ext cx="5514480" cy="4703040"/>
+            <a:off x="6882480" y="1600200"/>
+            <a:ext cx="4824720" cy="4114800"/>
           </a:xfrm>
           <a:prstGeom prst="rect">
             <a:avLst/>
@@ -12564,7 +8933,7 @@
       </p:grpSpPr>
       <p:sp>
         <p:nvSpPr>
-          <p:cNvPr id="124" name="PlaceHolder 1"/>
+          <p:cNvPr id="114" name="PlaceHolder 1"/>
           <p:cNvSpPr>
             <a:spLocks noGrp="1"/>
           </p:cNvSpPr>
@@ -12574,8 +8943,8 @@
         </p:nvSpPr>
         <p:spPr>
           <a:xfrm>
-            <a:off x="609480" y="137160"/>
-            <a:ext cx="10962000" cy="678600"/>
+            <a:off x="609480" y="137880"/>
+            <a:ext cx="2586240" cy="677520"/>
           </a:xfrm>
           <a:prstGeom prst="rect">
             <a:avLst/>
@@ -12608,7 +8977,7 @@
                 <a:uFillTx/>
                 <a:latin typeface="Arial"/>
               </a:rPr>
-              <a:t>0H 2</a:t>
+              <a:t>L3 1</a:t>
             </a:r>
             <a:endParaRPr lang="en-US" sz="4400" b="0" u="none" strike="noStrike">
               <a:solidFill>
@@ -12623,7 +8992,7 @@
       </p:sp>
       <p:pic>
         <p:nvPicPr>
-          <p:cNvPr id="125" name="Picture 108"/>
+          <p:cNvPr id="115" name=""/>
           <p:cNvPicPr/>
           <p:nvPr/>
         </p:nvPicPr>
@@ -12633,8 +9002,8 @@
         </p:blipFill>
         <p:spPr>
           <a:xfrm>
-            <a:off x="457200" y="914400"/>
-            <a:ext cx="4956480" cy="5253480"/>
+            <a:off x="0" y="1595880"/>
+            <a:ext cx="4818240" cy="4119120"/>
           </a:xfrm>
           <a:prstGeom prst="rect">
             <a:avLst/>
@@ -12647,7 +9016,7 @@
       </p:pic>
       <p:pic>
         <p:nvPicPr>
-          <p:cNvPr id="126" name="Picture 109"/>
+          <p:cNvPr id="116" name=""/>
           <p:cNvPicPr/>
           <p:nvPr/>
         </p:nvPicPr>
@@ -12657,8 +9026,224 @@
         </p:blipFill>
         <p:spPr>
           <a:xfrm>
-            <a:off x="5718600" y="951840"/>
-            <a:ext cx="4335480" cy="5220720"/>
+            <a:off x="5715000" y="1582920"/>
+            <a:ext cx="4831200" cy="4132080"/>
+          </a:xfrm>
+          <a:prstGeom prst="rect">
+            <a:avLst/>
+          </a:prstGeom>
+          <a:noFill/>
+          <a:ln w="0">
+            <a:noFill/>
+          </a:ln>
+        </p:spPr>
+      </p:pic>
+    </p:spTree>
+  </p:cSld>
+  <mc:AlternateContent>
+    <mc:Choice Requires="p14">
+      <p:transition spd="slow" p14:dur="2000"/>
+    </mc:Choice>
+    <mc:Fallback>
+      <p:transition spd="slow"/>
+    </mc:Fallback>
+  </mc:AlternateContent>
+</p:sld>
+</file>
+
+<file path=ppt/slides/slide18.xml><?xml version="1.0" encoding="utf-8"?>
+<p:sld xmlns:a="http://schemas.openxmlformats.org/drawingml/2006/main" xmlns:p="http://schemas.openxmlformats.org/presentationml/2006/main" xmlns:r="http://schemas.openxmlformats.org/officeDocument/2006/relationships" xmlns:p14="http://schemas.microsoft.com/office/powerpoint/2010/main" xmlns:p15="http://schemas.microsoft.com/office/powerpoint/2012/main" xmlns:mc="http://schemas.openxmlformats.org/markup-compatibility/2006">
+  <p:cSld>
+    <p:spTree>
+      <p:nvGrpSpPr>
+        <p:cNvPr id="1" name=""/>
+        <p:cNvGrpSpPr/>
+        <p:nvPr/>
+      </p:nvGrpSpPr>
+      <p:grpSpPr>
+        <a:xfrm>
+          <a:off x="0" y="0"/>
+          <a:ext cx="0" cy="0"/>
+          <a:chOff x="0" y="0"/>
+          <a:chExt cx="0" cy="0"/>
+        </a:xfrm>
+      </p:grpSpPr>
+      <p:sp>
+        <p:nvSpPr>
+          <p:cNvPr id="117" name="PlaceHolder 2"/>
+          <p:cNvSpPr txBox="1"/>
+          <p:nvPr/>
+        </p:nvSpPr>
+        <p:spPr>
+          <a:xfrm>
+            <a:off x="609480" y="-193680"/>
+            <a:ext cx="3505320" cy="1341000"/>
+          </a:xfrm>
+          <a:prstGeom prst="rect">
+            <a:avLst/>
+          </a:prstGeom>
+          <a:noFill/>
+          <a:ln w="0">
+            <a:noFill/>
+          </a:ln>
+        </p:spPr>
+        <p:txBody>
+          <a:bodyPr lIns="0" rIns="0" tIns="0" bIns="0" anchor="ctr">
+            <a:spAutoFit/>
+          </a:bodyPr>
+          <a:p>
+            <a:pPr algn="ctr">
+              <a:lnSpc>
+                <a:spcPct val="100000"/>
+              </a:lnSpc>
+              <a:tabLst>
+                <a:tab algn="l" pos="0"/>
+              </a:tabLst>
+            </a:pPr>
+            <a:r>
+              <a:rPr lang="en-US" sz="4400" b="1" u="none" strike="noStrike">
+                <a:solidFill>
+                  <a:srgbClr val="ff0000"/>
+                </a:solidFill>
+                <a:effectLst/>
+                <a:uFillTx/>
+                <a:latin typeface="Arial"/>
+              </a:rPr>
+              <a:t>L3 1 CELLS</a:t>
+            </a:r>
+            <a:endParaRPr lang="en-US" sz="4400" b="0" u="none" strike="noStrike">
+              <a:solidFill>
+                <a:srgbClr val="000000"/>
+              </a:solidFill>
+              <a:effectLst/>
+              <a:uFillTx/>
+              <a:latin typeface="Arial"/>
+            </a:endParaRPr>
+          </a:p>
+        </p:txBody>
+      </p:sp>
+      <p:pic>
+        <p:nvPicPr>
+          <p:cNvPr id="118" name=""/>
+          <p:cNvPicPr/>
+          <p:nvPr/>
+        </p:nvPicPr>
+        <p:blipFill>
+          <a:blip r:embed="rId1"/>
+          <a:stretch/>
+        </p:blipFill>
+        <p:spPr>
+          <a:xfrm>
+            <a:off x="3020400" y="1115640"/>
+            <a:ext cx="6185520" cy="4642920"/>
+          </a:xfrm>
+          <a:prstGeom prst="rect">
+            <a:avLst/>
+          </a:prstGeom>
+          <a:noFill/>
+          <a:ln w="0">
+            <a:noFill/>
+          </a:ln>
+        </p:spPr>
+      </p:pic>
+    </p:spTree>
+  </p:cSld>
+  <mc:AlternateContent>
+    <mc:Choice Requires="p14">
+      <p:transition spd="slow" p14:dur="2000"/>
+    </mc:Choice>
+    <mc:Fallback>
+      <p:transition spd="slow"/>
+    </mc:Fallback>
+  </mc:AlternateContent>
+</p:sld>
+</file>
+
+<file path=ppt/slides/slide19.xml><?xml version="1.0" encoding="utf-8"?>
+<p:sld xmlns:a="http://schemas.openxmlformats.org/drawingml/2006/main" xmlns:p="http://schemas.openxmlformats.org/presentationml/2006/main" xmlns:r="http://schemas.openxmlformats.org/officeDocument/2006/relationships" xmlns:p14="http://schemas.microsoft.com/office/powerpoint/2010/main" xmlns:p15="http://schemas.microsoft.com/office/powerpoint/2012/main" xmlns:mc="http://schemas.openxmlformats.org/markup-compatibility/2006">
+  <p:cSld>
+    <p:spTree>
+      <p:nvGrpSpPr>
+        <p:cNvPr id="1" name=""/>
+        <p:cNvGrpSpPr/>
+        <p:nvPr/>
+      </p:nvGrpSpPr>
+      <p:grpSpPr>
+        <a:xfrm>
+          <a:off x="0" y="0"/>
+          <a:ext cx="0" cy="0"/>
+          <a:chOff x="0" y="0"/>
+          <a:chExt cx="0" cy="0"/>
+        </a:xfrm>
+      </p:grpSpPr>
+      <p:sp>
+        <p:nvSpPr>
+          <p:cNvPr id="119" name="PlaceHolder 4"/>
+          <p:cNvSpPr txBox="1"/>
+          <p:nvPr/>
+        </p:nvSpPr>
+        <p:spPr>
+          <a:xfrm>
+            <a:off x="609480" y="-193680"/>
+            <a:ext cx="3505320" cy="1341000"/>
+          </a:xfrm>
+          <a:prstGeom prst="rect">
+            <a:avLst/>
+          </a:prstGeom>
+          <a:noFill/>
+          <a:ln w="0">
+            <a:noFill/>
+          </a:ln>
+        </p:spPr>
+        <p:txBody>
+          <a:bodyPr lIns="0" rIns="0" tIns="0" bIns="0" anchor="ctr">
+            <a:spAutoFit/>
+          </a:bodyPr>
+          <a:p>
+            <a:pPr algn="ctr">
+              <a:lnSpc>
+                <a:spcPct val="100000"/>
+              </a:lnSpc>
+              <a:tabLst>
+                <a:tab algn="l" pos="0"/>
+              </a:tabLst>
+            </a:pPr>
+            <a:r>
+              <a:rPr lang="en-US" sz="4400" b="1" u="none" strike="noStrike">
+                <a:solidFill>
+                  <a:srgbClr val="ff0000"/>
+                </a:solidFill>
+                <a:effectLst/>
+                <a:uFillTx/>
+                <a:latin typeface="Arial"/>
+              </a:rPr>
+              <a:t>L3 1 CELLS</a:t>
+            </a:r>
+            <a:endParaRPr lang="en-US" sz="4400" b="0" u="none" strike="noStrike">
+              <a:solidFill>
+                <a:srgbClr val="000000"/>
+              </a:solidFill>
+              <a:effectLst/>
+              <a:uFillTx/>
+              <a:latin typeface="Arial"/>
+            </a:endParaRPr>
+          </a:p>
+        </p:txBody>
+      </p:sp>
+      <p:pic>
+        <p:nvPicPr>
+          <p:cNvPr id="120" name=""/>
+          <p:cNvPicPr/>
+          <p:nvPr/>
+        </p:nvPicPr>
+        <p:blipFill>
+          <a:blip r:embed="rId1"/>
+          <a:stretch/>
+        </p:blipFill>
+        <p:spPr>
+          <a:xfrm>
+            <a:off x="2317320" y="818280"/>
+            <a:ext cx="7591680" cy="5238000"/>
           </a:xfrm>
           <a:prstGeom prst="rect">
             <a:avLst/>
@@ -12772,6 +9357,143 @@
 </p:sld>
 </file>
 
+<file path=ppt/slides/slide20.xml><?xml version="1.0" encoding="utf-8"?>
+<p:sld xmlns:a="http://schemas.openxmlformats.org/drawingml/2006/main" xmlns:p="http://schemas.openxmlformats.org/presentationml/2006/main" xmlns:r="http://schemas.openxmlformats.org/officeDocument/2006/relationships" xmlns:p14="http://schemas.microsoft.com/office/powerpoint/2010/main" xmlns:p15="http://schemas.microsoft.com/office/powerpoint/2012/main" xmlns:mc="http://schemas.openxmlformats.org/markup-compatibility/2006">
+  <p:cSld>
+    <p:spTree>
+      <p:nvGrpSpPr>
+        <p:cNvPr id="1" name=""/>
+        <p:cNvGrpSpPr/>
+        <p:nvPr/>
+      </p:nvGrpSpPr>
+      <p:grpSpPr>
+        <a:xfrm>
+          <a:off x="0" y="0"/>
+          <a:ext cx="0" cy="0"/>
+          <a:chOff x="0" y="0"/>
+          <a:chExt cx="0" cy="0"/>
+        </a:xfrm>
+      </p:grpSpPr>
+      <p:sp>
+        <p:nvSpPr>
+          <p:cNvPr id="121" name="PlaceHolder 1"/>
+          <p:cNvSpPr>
+            <a:spLocks noGrp="1"/>
+          </p:cNvSpPr>
+          <p:nvPr>
+            <p:ph type="title"/>
+          </p:nvPr>
+        </p:nvSpPr>
+        <p:spPr>
+          <a:xfrm>
+            <a:off x="609480" y="137160"/>
+            <a:ext cx="10962000" cy="678600"/>
+          </a:xfrm>
+          <a:prstGeom prst="rect">
+            <a:avLst/>
+          </a:prstGeom>
+          <a:noFill/>
+          <a:ln w="0">
+            <a:noFill/>
+          </a:ln>
+        </p:spPr>
+        <p:txBody>
+          <a:bodyPr lIns="0" rIns="0" tIns="0" bIns="0" anchor="ctr">
+            <a:spAutoFit/>
+          </a:bodyPr>
+          <a:p>
+            <a:pPr indent="0">
+              <a:lnSpc>
+                <a:spcPct val="100000"/>
+              </a:lnSpc>
+              <a:buNone/>
+              <a:tabLst>
+                <a:tab algn="l" pos="0"/>
+              </a:tabLst>
+            </a:pPr>
+            <a:r>
+              <a:rPr lang="en-US" sz="4400" b="1" u="none" strike="noStrike">
+                <a:solidFill>
+                  <a:srgbClr val="ff0000"/>
+                </a:solidFill>
+                <a:effectLst/>
+                <a:uFillTx/>
+                <a:latin typeface="Arial"/>
+              </a:rPr>
+              <a:t>L3 1</a:t>
+            </a:r>
+            <a:endParaRPr lang="en-US" sz="4400" b="0" u="none" strike="noStrike">
+              <a:solidFill>
+                <a:srgbClr val="000000"/>
+              </a:solidFill>
+              <a:effectLst/>
+              <a:uFillTx/>
+              <a:latin typeface="Arial"/>
+            </a:endParaRPr>
+          </a:p>
+        </p:txBody>
+      </p:sp>
+      <p:pic>
+        <p:nvPicPr>
+          <p:cNvPr id="122" name=""/>
+          <p:cNvPicPr/>
+          <p:nvPr/>
+        </p:nvPicPr>
+        <p:blipFill>
+          <a:blip r:embed="rId1"/>
+          <a:stretch/>
+        </p:blipFill>
+        <p:spPr>
+          <a:xfrm>
+            <a:off x="7086600" y="815760"/>
+            <a:ext cx="3231360" cy="5515920"/>
+          </a:xfrm>
+          <a:prstGeom prst="rect">
+            <a:avLst/>
+          </a:prstGeom>
+          <a:noFill/>
+          <a:ln w="0">
+            <a:noFill/>
+          </a:ln>
+        </p:spPr>
+      </p:pic>
+      <p:pic>
+        <p:nvPicPr>
+          <p:cNvPr id="123" name=""/>
+          <p:cNvPicPr/>
+          <p:nvPr/>
+        </p:nvPicPr>
+        <p:blipFill>
+          <a:blip r:embed="rId2"/>
+          <a:stretch/>
+        </p:blipFill>
+        <p:spPr>
+          <a:xfrm>
+            <a:off x="1143000" y="1600200"/>
+            <a:ext cx="2786400" cy="2127600"/>
+          </a:xfrm>
+          <a:prstGeom prst="rect">
+            <a:avLst/>
+          </a:prstGeom>
+          <a:noFill/>
+          <a:ln w="0">
+            <a:noFill/>
+          </a:ln>
+        </p:spPr>
+      </p:pic>
+    </p:spTree>
+  </p:cSld>
+  <mc:AlternateContent>
+    <mc:Choice Requires="p14">
+      <p:transition spd="slow" p14:dur="2000"/>
+    </mc:Choice>
+    <mc:Fallback>
+      <p:transition spd="slow"/>
+    </mc:Fallback>
+  </mc:AlternateContent>
+</p:sld>
+</file>
+
 <file path=ppt/slides/slide3.xml><?xml version="1.0" encoding="utf-8"?>
 <p:sld xmlns:a="http://schemas.openxmlformats.org/drawingml/2006/main" xmlns:p="http://schemas.openxmlformats.org/presentationml/2006/main" xmlns:r="http://schemas.openxmlformats.org/officeDocument/2006/relationships" xmlns:p14="http://schemas.microsoft.com/office/powerpoint/2010/main" xmlns:p15="http://schemas.microsoft.com/office/powerpoint/2012/main" xmlns:mc="http://schemas.openxmlformats.org/markup-compatibility/2006">
   <p:cSld>
@@ -13559,128 +10281,7 @@
                 <a:uFillTx/>
                 <a:latin typeface="Arial"/>
               </a:rPr>
-              <a:t>C</a:t>
-            </a:r>
-            <a:r>
-              <a:rPr lang="en-US" sz="4400" b="1" u="none" strike="noStrike">
-                <a:solidFill>
-                  <a:srgbClr val="ff0000"/>
-                </a:solidFill>
-                <a:effectLst/>
-                <a:uFillTx/>
-                <a:latin typeface="Arial"/>
-              </a:rPr>
-              <a:t>la</a:t>
-            </a:r>
-            <a:r>
-              <a:rPr lang="en-US" sz="4400" b="1" u="none" strike="noStrike">
-                <a:solidFill>
-                  <a:srgbClr val="ff0000"/>
-                </a:solidFill>
-                <a:effectLst/>
-                <a:uFillTx/>
-                <a:latin typeface="Arial"/>
-              </a:rPr>
-              <a:t>s</a:t>
-            </a:r>
-            <a:r>
-              <a:rPr lang="en-US" sz="4400" b="1" u="none" strike="noStrike">
-                <a:solidFill>
-                  <a:srgbClr val="ff0000"/>
-                </a:solidFill>
-                <a:effectLst/>
-                <a:uFillTx/>
-                <a:latin typeface="Arial"/>
-              </a:rPr>
-              <a:t>si</a:t>
-            </a:r>
-            <a:r>
-              <a:rPr lang="en-US" sz="4400" b="1" u="none" strike="noStrike">
-                <a:solidFill>
-                  <a:srgbClr val="ff0000"/>
-                </a:solidFill>
-                <a:effectLst/>
-                <a:uFillTx/>
-                <a:latin typeface="Arial"/>
-              </a:rPr>
-              <a:t>c</a:t>
-            </a:r>
-            <a:r>
-              <a:rPr lang="en-US" sz="4400" b="1" u="none" strike="noStrike">
-                <a:solidFill>
-                  <a:srgbClr val="ff0000"/>
-                </a:solidFill>
-                <a:effectLst/>
-                <a:uFillTx/>
-                <a:latin typeface="Arial"/>
-              </a:rPr>
-              <a:t>al </a:t>
-            </a:r>
-            <a:r>
-              <a:rPr lang="en-US" sz="4400" b="1" u="none" strike="noStrike">
-                <a:solidFill>
-                  <a:srgbClr val="ff0000"/>
-                </a:solidFill>
-                <a:effectLst/>
-                <a:uFillTx/>
-                <a:latin typeface="Arial"/>
-              </a:rPr>
-              <a:t>M</a:t>
-            </a:r>
-            <a:r>
-              <a:rPr lang="en-US" sz="4400" b="1" u="none" strike="noStrike">
-                <a:solidFill>
-                  <a:srgbClr val="ff0000"/>
-                </a:solidFill>
-                <a:effectLst/>
-                <a:uFillTx/>
-                <a:latin typeface="Arial"/>
-              </a:rPr>
-              <a:t>et</a:t>
-            </a:r>
-            <a:r>
-              <a:rPr lang="en-US" sz="4400" b="1" u="none" strike="noStrike">
-                <a:solidFill>
-                  <a:srgbClr val="ff0000"/>
-                </a:solidFill>
-                <a:effectLst/>
-                <a:uFillTx/>
-                <a:latin typeface="Arial"/>
-              </a:rPr>
-              <a:t>h</a:t>
-            </a:r>
-            <a:r>
-              <a:rPr lang="en-US" sz="4400" b="1" u="none" strike="noStrike">
-                <a:solidFill>
-                  <a:srgbClr val="ff0000"/>
-                </a:solidFill>
-                <a:effectLst/>
-                <a:uFillTx/>
-                <a:latin typeface="Arial"/>
-              </a:rPr>
-              <a:t>o</a:t>
-            </a:r>
-            <a:r>
-              <a:rPr lang="en-US" sz="4400" b="1" u="none" strike="noStrike">
-                <a:solidFill>
-                  <a:srgbClr val="ff0000"/>
-                </a:solidFill>
-                <a:effectLst/>
-                <a:uFillTx/>
-                <a:latin typeface="Arial"/>
-              </a:rPr>
-              <a:t>d</a:t>
-            </a:r>
-            <a:r>
-              <a:rPr lang="en-US" sz="4400" b="1" u="none" strike="noStrike">
-                <a:solidFill>
-                  <a:srgbClr val="ff0000"/>
-                </a:solidFill>
-                <a:effectLst/>
-                <a:uFillTx/>
-                <a:latin typeface="Arial"/>
-              </a:rPr>
-              <a:t>s</a:t>
+              <a:t>Classical Methods</a:t>
             </a:r>
             <a:br>
               <a:rPr sz="4400"/>
